--- a/demo/AI_Transcript_Intake_Agent_Demo.pptx
+++ b/demo/AI_Transcript_Intake_Agent_Demo.pptx
@@ -4,28 +4,31 @@
   <p:sldMasterIdLst>
     <p:sldMasterId id="2147483648" r:id="rId1"/>
   </p:sldMasterIdLst>
+  <p:notesMasterIdLst>
+    <p:notesMasterId r:id="rId21"/>
+  </p:notesMasterIdLst>
   <p:sldIdLst>
-    <p:sldId id="256" r:id="rId7"/>
-    <p:sldId id="257" r:id="rId8"/>
-    <p:sldId id="258" r:id="rId9"/>
-    <p:sldId id="259" r:id="rId10"/>
-    <p:sldId id="260" r:id="rId11"/>
-    <p:sldId id="261" r:id="rId12"/>
-    <p:sldId id="262" r:id="rId13"/>
-    <p:sldId id="263" r:id="rId14"/>
-    <p:sldId id="264" r:id="rId15"/>
-    <p:sldId id="265" r:id="rId16"/>
-    <p:sldId id="266" r:id="rId17"/>
-    <p:sldId id="267" r:id="rId18"/>
-    <p:sldId id="268" r:id="rId19"/>
-    <p:sldId id="269" r:id="rId20"/>
-    <p:sldId id="270" r:id="rId21"/>
-    <p:sldId id="271" r:id="rId22"/>
-    <p:sldId id="272" r:id="rId23"/>
-    <p:sldId id="273" r:id="rId24"/>
-    <p:sldId id="274" r:id="rId25"/>
+    <p:sldId id="256" r:id="rId2"/>
+    <p:sldId id="257" r:id="rId3"/>
+    <p:sldId id="258" r:id="rId4"/>
+    <p:sldId id="259" r:id="rId5"/>
+    <p:sldId id="260" r:id="rId6"/>
+    <p:sldId id="261" r:id="rId7"/>
+    <p:sldId id="262" r:id="rId8"/>
+    <p:sldId id="263" r:id="rId9"/>
+    <p:sldId id="264" r:id="rId10"/>
+    <p:sldId id="265" r:id="rId11"/>
+    <p:sldId id="266" r:id="rId12"/>
+    <p:sldId id="267" r:id="rId13"/>
+    <p:sldId id="268" r:id="rId14"/>
+    <p:sldId id="269" r:id="rId15"/>
+    <p:sldId id="270" r:id="rId16"/>
+    <p:sldId id="271" r:id="rId17"/>
+    <p:sldId id="272" r:id="rId18"/>
+    <p:sldId id="273" r:id="rId19"/>
+    <p:sldId id="274" r:id="rId20"/>
   </p:sldIdLst>
-  <p:sldSz cx="12188952" cy="6858000" type="screen4x3"/>
+  <p:sldSz cx="12188825" cy="6858000"/>
   <p:notesSz cx="6858000" cy="9144000"/>
   <p:defaultTextStyle>
     <a:defPPr>
@@ -122,7 +125,3531 @@
       </a:defRPr>
     </a:lvl9pPr>
   </p:defaultTextStyle>
+  <p:extLst>
+    <p:ext uri="{EFAFB233-063F-42B5-8137-9DF3F51BA10A}">
+      <p15:sldGuideLst xmlns:p15="http://schemas.microsoft.com/office/powerpoint/2012/main">
+        <p15:guide id="1" orient="horz" pos="2160">
+          <p15:clr>
+            <a:srgbClr val="A4A3A4"/>
+          </p15:clr>
+        </p15:guide>
+        <p15:guide id="2" pos="2880">
+          <p15:clr>
+            <a:srgbClr val="A4A3A4"/>
+          </p15:clr>
+        </p15:guide>
+      </p15:sldGuideLst>
+    </p:ext>
+  </p:extLst>
 </p:presentation>
+</file>
+
+<file path=ppt/revisionInfo.xml><?xml version="1.0" encoding="utf-8"?>
+<p1510:revInfo xmlns:a="http://schemas.openxmlformats.org/drawingml/2006/main" xmlns:r="http://schemas.openxmlformats.org/officeDocument/2006/relationships" xmlns:p1510="http://schemas.microsoft.com/office/powerpoint/2015/10/main">
+  <p1510:revLst>
+    <p1510:client id="{FDB76020-E218-4CD9-9E1C-3265F9E1C2E9}" v="28" dt="2026-06-24T14:20:06.644"/>
+  </p1510:revLst>
+</p1510:revInfo>
+</file>
+
+<file path=ppt/changesInfos/changesInfo1.xml><?xml version="1.0" encoding="utf-8"?>
+<pc:chgInfo xmlns:a="http://schemas.openxmlformats.org/drawingml/2006/main" xmlns:r="http://schemas.openxmlformats.org/officeDocument/2006/relationships" xmlns:ac="http://schemas.microsoft.com/office/drawing/2013/main/command" xmlns:pc="http://schemas.microsoft.com/office/powerpoint/2013/main/command">
+  <pc:docChgLst>
+    <pc:chgData name="High, David K" userId="5e50cd30-ed06-48cc-9ef3-56cf1bec9872" providerId="ADAL" clId="{8A645E4E-3195-4253-A039-455FF14D8D8F}"/>
+    <pc:docChg chg="undo custSel modSld">
+      <pc:chgData name="High, David K" userId="5e50cd30-ed06-48cc-9ef3-56cf1bec9872" providerId="ADAL" clId="{8A645E4E-3195-4253-A039-455FF14D8D8F}" dt="2026-06-24T14:20:08.049" v="149" actId="5793"/>
+      <pc:docMkLst>
+        <pc:docMk/>
+      </pc:docMkLst>
+      <pc:sldChg chg="modNotesTx">
+        <pc:chgData name="High, David K" userId="5e50cd30-ed06-48cc-9ef3-56cf1bec9872" providerId="ADAL" clId="{8A645E4E-3195-4253-A039-455FF14D8D8F}" dt="2026-06-24T14:00:59.673" v="68" actId="20577"/>
+        <pc:sldMkLst>
+          <pc:docMk/>
+          <pc:sldMk cId="0" sldId="256"/>
+        </pc:sldMkLst>
+      </pc:sldChg>
+      <pc:sldChg chg="modNotesTx">
+        <pc:chgData name="High, David K" userId="5e50cd30-ed06-48cc-9ef3-56cf1bec9872" providerId="ADAL" clId="{8A645E4E-3195-4253-A039-455FF14D8D8F}" dt="2026-06-24T14:01:46.674" v="72" actId="5793"/>
+        <pc:sldMkLst>
+          <pc:docMk/>
+          <pc:sldMk cId="0" sldId="257"/>
+        </pc:sldMkLst>
+      </pc:sldChg>
+      <pc:sldChg chg="modNotesTx">
+        <pc:chgData name="High, David K" userId="5e50cd30-ed06-48cc-9ef3-56cf1bec9872" providerId="ADAL" clId="{8A645E4E-3195-4253-A039-455FF14D8D8F}" dt="2026-06-24T14:04:20.145" v="74" actId="20577"/>
+        <pc:sldMkLst>
+          <pc:docMk/>
+          <pc:sldMk cId="0" sldId="259"/>
+        </pc:sldMkLst>
+      </pc:sldChg>
+      <pc:sldChg chg="modNotesTx">
+        <pc:chgData name="High, David K" userId="5e50cd30-ed06-48cc-9ef3-56cf1bec9872" providerId="ADAL" clId="{8A645E4E-3195-4253-A039-455FF14D8D8F}" dt="2026-06-24T14:05:02.874" v="77" actId="20577"/>
+        <pc:sldMkLst>
+          <pc:docMk/>
+          <pc:sldMk cId="0" sldId="260"/>
+        </pc:sldMkLst>
+      </pc:sldChg>
+      <pc:sldChg chg="modSp mod modNotesTx">
+        <pc:chgData name="High, David K" userId="5e50cd30-ed06-48cc-9ef3-56cf1bec9872" providerId="ADAL" clId="{8A645E4E-3195-4253-A039-455FF14D8D8F}" dt="2026-06-24T14:14:03.017" v="119" actId="5793"/>
+        <pc:sldMkLst>
+          <pc:docMk/>
+          <pc:sldMk cId="0" sldId="262"/>
+        </pc:sldMkLst>
+        <pc:spChg chg="mod">
+          <ac:chgData name="High, David K" userId="5e50cd30-ed06-48cc-9ef3-56cf1bec9872" providerId="ADAL" clId="{8A645E4E-3195-4253-A039-455FF14D8D8F}" dt="2026-06-24T14:06:06.198" v="79" actId="207"/>
+          <ac:spMkLst>
+            <pc:docMk/>
+            <pc:sldMk cId="0" sldId="262"/>
+            <ac:spMk id="9" creationId="{00000000-0000-0000-0000-000000000000}"/>
+          </ac:spMkLst>
+        </pc:spChg>
+        <pc:spChg chg="mod">
+          <ac:chgData name="High, David K" userId="5e50cd30-ed06-48cc-9ef3-56cf1bec9872" providerId="ADAL" clId="{8A645E4E-3195-4253-A039-455FF14D8D8F}" dt="2026-06-24T14:06:11.347" v="80" actId="207"/>
+          <ac:spMkLst>
+            <pc:docMk/>
+            <pc:sldMk cId="0" sldId="262"/>
+            <ac:spMk id="14" creationId="{00000000-0000-0000-0000-000000000000}"/>
+          </ac:spMkLst>
+        </pc:spChg>
+        <pc:spChg chg="mod">
+          <ac:chgData name="High, David K" userId="5e50cd30-ed06-48cc-9ef3-56cf1bec9872" providerId="ADAL" clId="{8A645E4E-3195-4253-A039-455FF14D8D8F}" dt="2026-06-24T14:06:36.903" v="98" actId="20577"/>
+          <ac:spMkLst>
+            <pc:docMk/>
+            <pc:sldMk cId="0" sldId="262"/>
+            <ac:spMk id="19" creationId="{00000000-0000-0000-0000-000000000000}"/>
+          </ac:spMkLst>
+        </pc:spChg>
+        <pc:spChg chg="mod">
+          <ac:chgData name="High, David K" userId="5e50cd30-ed06-48cc-9ef3-56cf1bec9872" providerId="ADAL" clId="{8A645E4E-3195-4253-A039-455FF14D8D8F}" dt="2026-06-24T14:06:46.359" v="116" actId="20577"/>
+          <ac:spMkLst>
+            <pc:docMk/>
+            <pc:sldMk cId="0" sldId="262"/>
+            <ac:spMk id="24" creationId="{00000000-0000-0000-0000-000000000000}"/>
+          </ac:spMkLst>
+        </pc:spChg>
+        <pc:spChg chg="mod">
+          <ac:chgData name="High, David K" userId="5e50cd30-ed06-48cc-9ef3-56cf1bec9872" providerId="ADAL" clId="{8A645E4E-3195-4253-A039-455FF14D8D8F}" dt="2026-06-24T14:06:15.690" v="81" actId="207"/>
+          <ac:spMkLst>
+            <pc:docMk/>
+            <pc:sldMk cId="0" sldId="262"/>
+            <ac:spMk id="29" creationId="{00000000-0000-0000-0000-000000000000}"/>
+          </ac:spMkLst>
+        </pc:spChg>
+        <pc:spChg chg="mod">
+          <ac:chgData name="High, David K" userId="5e50cd30-ed06-48cc-9ef3-56cf1bec9872" providerId="ADAL" clId="{8A645E4E-3195-4253-A039-455FF14D8D8F}" dt="2026-06-24T14:06:18.114" v="82" actId="207"/>
+          <ac:spMkLst>
+            <pc:docMk/>
+            <pc:sldMk cId="0" sldId="262"/>
+            <ac:spMk id="34" creationId="{00000000-0000-0000-0000-000000000000}"/>
+          </ac:spMkLst>
+        </pc:spChg>
+        <pc:spChg chg="mod">
+          <ac:chgData name="High, David K" userId="5e50cd30-ed06-48cc-9ef3-56cf1bec9872" providerId="ADAL" clId="{8A645E4E-3195-4253-A039-455FF14D8D8F}" dt="2026-06-24T14:06:21.075" v="83" actId="207"/>
+          <ac:spMkLst>
+            <pc:docMk/>
+            <pc:sldMk cId="0" sldId="262"/>
+            <ac:spMk id="39" creationId="{00000000-0000-0000-0000-000000000000}"/>
+          </ac:spMkLst>
+        </pc:spChg>
+        <pc:spChg chg="mod">
+          <ac:chgData name="High, David K" userId="5e50cd30-ed06-48cc-9ef3-56cf1bec9872" providerId="ADAL" clId="{8A645E4E-3195-4253-A039-455FF14D8D8F}" dt="2026-06-24T14:06:23.687" v="84" actId="207"/>
+          <ac:spMkLst>
+            <pc:docMk/>
+            <pc:sldMk cId="0" sldId="262"/>
+            <ac:spMk id="44" creationId="{00000000-0000-0000-0000-000000000000}"/>
+          </ac:spMkLst>
+        </pc:spChg>
+      </pc:sldChg>
+      <pc:sldChg chg="modSp mod modNotesTx">
+        <pc:chgData name="High, David K" userId="5e50cd30-ed06-48cc-9ef3-56cf1bec9872" providerId="ADAL" clId="{8A645E4E-3195-4253-A039-455FF14D8D8F}" dt="2026-06-24T14:14:50.251" v="123" actId="5793"/>
+        <pc:sldMkLst>
+          <pc:docMk/>
+          <pc:sldMk cId="0" sldId="263"/>
+        </pc:sldMkLst>
+        <pc:spChg chg="mod">
+          <ac:chgData name="High, David K" userId="5e50cd30-ed06-48cc-9ef3-56cf1bec9872" providerId="ADAL" clId="{8A645E4E-3195-4253-A039-455FF14D8D8F}" dt="2026-06-23T20:07:53.910" v="4" actId="20577"/>
+          <ac:spMkLst>
+            <pc:docMk/>
+            <pc:sldMk cId="0" sldId="263"/>
+            <ac:spMk id="7" creationId="{00000000-0000-0000-0000-000000000000}"/>
+          </ac:spMkLst>
+        </pc:spChg>
+        <pc:spChg chg="mod">
+          <ac:chgData name="High, David K" userId="5e50cd30-ed06-48cc-9ef3-56cf1bec9872" providerId="ADAL" clId="{8A645E4E-3195-4253-A039-455FF14D8D8F}" dt="2026-06-23T20:08:02.270" v="9" actId="20577"/>
+          <ac:spMkLst>
+            <pc:docMk/>
+            <pc:sldMk cId="0" sldId="263"/>
+            <ac:spMk id="11" creationId="{00000000-0000-0000-0000-000000000000}"/>
+          </ac:spMkLst>
+        </pc:spChg>
+      </pc:sldChg>
+      <pc:sldChg chg="modNotesTx">
+        <pc:chgData name="High, David K" userId="5e50cd30-ed06-48cc-9ef3-56cf1bec9872" providerId="ADAL" clId="{8A645E4E-3195-4253-A039-455FF14D8D8F}" dt="2026-06-24T14:15:51.754" v="125" actId="20577"/>
+        <pc:sldMkLst>
+          <pc:docMk/>
+          <pc:sldMk cId="0" sldId="264"/>
+        </pc:sldMkLst>
+      </pc:sldChg>
+      <pc:sldChg chg="modNotesTx">
+        <pc:chgData name="High, David K" userId="5e50cd30-ed06-48cc-9ef3-56cf1bec9872" providerId="ADAL" clId="{8A645E4E-3195-4253-A039-455FF14D8D8F}" dt="2026-06-24T14:16:33.122" v="129" actId="5793"/>
+        <pc:sldMkLst>
+          <pc:docMk/>
+          <pc:sldMk cId="0" sldId="265"/>
+        </pc:sldMkLst>
+      </pc:sldChg>
+      <pc:sldChg chg="modNotesTx">
+        <pc:chgData name="High, David K" userId="5e50cd30-ed06-48cc-9ef3-56cf1bec9872" providerId="ADAL" clId="{8A645E4E-3195-4253-A039-455FF14D8D8F}" dt="2026-06-24T14:17:07.908" v="133" actId="5793"/>
+        <pc:sldMkLst>
+          <pc:docMk/>
+          <pc:sldMk cId="0" sldId="266"/>
+        </pc:sldMkLst>
+      </pc:sldChg>
+      <pc:sldChg chg="modNotesTx">
+        <pc:chgData name="High, David K" userId="5e50cd30-ed06-48cc-9ef3-56cf1bec9872" providerId="ADAL" clId="{8A645E4E-3195-4253-A039-455FF14D8D8F}" dt="2026-06-24T14:17:44.266" v="137" actId="5793"/>
+        <pc:sldMkLst>
+          <pc:docMk/>
+          <pc:sldMk cId="0" sldId="270"/>
+        </pc:sldMkLst>
+      </pc:sldChg>
+      <pc:sldChg chg="modNotesTx">
+        <pc:chgData name="High, David K" userId="5e50cd30-ed06-48cc-9ef3-56cf1bec9872" providerId="ADAL" clId="{8A645E4E-3195-4253-A039-455FF14D8D8F}" dt="2026-06-24T14:19:00.857" v="141" actId="5793"/>
+        <pc:sldMkLst>
+          <pc:docMk/>
+          <pc:sldMk cId="0" sldId="271"/>
+        </pc:sldMkLst>
+      </pc:sldChg>
+      <pc:sldChg chg="modNotesTx">
+        <pc:chgData name="High, David K" userId="5e50cd30-ed06-48cc-9ef3-56cf1bec9872" providerId="ADAL" clId="{8A645E4E-3195-4253-A039-455FF14D8D8F}" dt="2026-06-24T14:19:29.169" v="145" actId="5793"/>
+        <pc:sldMkLst>
+          <pc:docMk/>
+          <pc:sldMk cId="0" sldId="272"/>
+        </pc:sldMkLst>
+      </pc:sldChg>
+      <pc:sldChg chg="modNotesTx">
+        <pc:chgData name="High, David K" userId="5e50cd30-ed06-48cc-9ef3-56cf1bec9872" providerId="ADAL" clId="{8A645E4E-3195-4253-A039-455FF14D8D8F}" dt="2026-06-24T14:20:08.049" v="149" actId="5793"/>
+        <pc:sldMkLst>
+          <pc:docMk/>
+          <pc:sldMk cId="0" sldId="273"/>
+        </pc:sldMkLst>
+      </pc:sldChg>
+    </pc:docChg>
+  </pc:docChgLst>
+</pc:chgInfo>
+</file>
+
+<file path=ppt/notesMasters/notesMaster1.xml><?xml version="1.0" encoding="utf-8"?>
+<p:notesMaster xmlns:a="http://schemas.openxmlformats.org/drawingml/2006/main" xmlns:r="http://schemas.openxmlformats.org/officeDocument/2006/relationships" xmlns:p="http://schemas.openxmlformats.org/presentationml/2006/main">
+  <p:cSld>
+    <p:bg>
+      <p:bgRef idx="1001">
+        <a:schemeClr val="bg1"/>
+      </p:bgRef>
+    </p:bg>
+    <p:spTree>
+      <p:nvGrpSpPr>
+        <p:cNvPr id="1" name=""/>
+        <p:cNvGrpSpPr/>
+        <p:nvPr/>
+      </p:nvGrpSpPr>
+      <p:grpSpPr>
+        <a:xfrm>
+          <a:off x="0" y="0"/>
+          <a:ext cx="0" cy="0"/>
+          <a:chOff x="0" y="0"/>
+          <a:chExt cx="0" cy="0"/>
+        </a:xfrm>
+      </p:grpSpPr>
+      <p:sp>
+        <p:nvSpPr>
+          <p:cNvPr id="2" name="Header Placeholder 1"/>
+          <p:cNvSpPr>
+            <a:spLocks noGrp="1"/>
+          </p:cNvSpPr>
+          <p:nvPr>
+            <p:ph type="hdr" sz="quarter"/>
+          </p:nvPr>
+        </p:nvSpPr>
+        <p:spPr>
+          <a:xfrm>
+            <a:off x="0" y="0"/>
+            <a:ext cx="2971800" cy="458788"/>
+          </a:xfrm>
+          <a:prstGeom prst="rect">
+            <a:avLst/>
+          </a:prstGeom>
+        </p:spPr>
+        <p:txBody>
+          <a:bodyPr vert="horz" lIns="91440" tIns="45720" rIns="91440" bIns="45720" rtlCol="0"/>
+          <a:lstStyle>
+            <a:lvl1pPr algn="l">
+              <a:defRPr sz="1200"/>
+            </a:lvl1pPr>
+          </a:lstStyle>
+          <a:p>
+            <a:endParaRPr lang="en-US"/>
+          </a:p>
+        </p:txBody>
+      </p:sp>
+      <p:sp>
+        <p:nvSpPr>
+          <p:cNvPr id="3" name="Date Placeholder 2"/>
+          <p:cNvSpPr>
+            <a:spLocks noGrp="1"/>
+          </p:cNvSpPr>
+          <p:nvPr>
+            <p:ph type="dt" idx="1"/>
+          </p:nvPr>
+        </p:nvSpPr>
+        <p:spPr>
+          <a:xfrm>
+            <a:off x="3884613" y="0"/>
+            <a:ext cx="2971800" cy="458788"/>
+          </a:xfrm>
+          <a:prstGeom prst="rect">
+            <a:avLst/>
+          </a:prstGeom>
+        </p:spPr>
+        <p:txBody>
+          <a:bodyPr vert="horz" lIns="91440" tIns="45720" rIns="91440" bIns="45720" rtlCol="0"/>
+          <a:lstStyle>
+            <a:lvl1pPr algn="r">
+              <a:defRPr sz="1200"/>
+            </a:lvl1pPr>
+          </a:lstStyle>
+          <a:p>
+            <a:fld id="{D52A5849-EAE3-4A79-A5B5-8FB5C2FA74A7}" type="datetimeFigureOut">
+              <a:rPr lang="en-US" smtClean="0"/>
+              <a:t>6/24/2026</a:t>
+            </a:fld>
+            <a:endParaRPr lang="en-US"/>
+          </a:p>
+        </p:txBody>
+      </p:sp>
+      <p:sp>
+        <p:nvSpPr>
+          <p:cNvPr id="4" name="Slide Image Placeholder 3"/>
+          <p:cNvSpPr>
+            <a:spLocks noGrp="1" noRot="1" noChangeAspect="1"/>
+          </p:cNvSpPr>
+          <p:nvPr>
+            <p:ph type="sldImg" idx="2"/>
+          </p:nvPr>
+        </p:nvSpPr>
+        <p:spPr>
+          <a:xfrm>
+            <a:off x="685800" y="1143000"/>
+            <a:ext cx="5486400" cy="3086100"/>
+          </a:xfrm>
+          <a:prstGeom prst="rect">
+            <a:avLst/>
+          </a:prstGeom>
+          <a:noFill/>
+          <a:ln w="12700">
+            <a:solidFill>
+              <a:prstClr val="black"/>
+            </a:solidFill>
+          </a:ln>
+        </p:spPr>
+        <p:txBody>
+          <a:bodyPr vert="horz" lIns="91440" tIns="45720" rIns="91440" bIns="45720" rtlCol="0" anchor="ctr"/>
+          <a:lstStyle/>
+          <a:p>
+            <a:endParaRPr lang="en-US"/>
+          </a:p>
+        </p:txBody>
+      </p:sp>
+      <p:sp>
+        <p:nvSpPr>
+          <p:cNvPr id="5" name="Notes Placeholder 4"/>
+          <p:cNvSpPr>
+            <a:spLocks noGrp="1"/>
+          </p:cNvSpPr>
+          <p:nvPr>
+            <p:ph type="body" sz="quarter" idx="3"/>
+          </p:nvPr>
+        </p:nvSpPr>
+        <p:spPr>
+          <a:xfrm>
+            <a:off x="685800" y="4400550"/>
+            <a:ext cx="5486400" cy="3600450"/>
+          </a:xfrm>
+          <a:prstGeom prst="rect">
+            <a:avLst/>
+          </a:prstGeom>
+        </p:spPr>
+        <p:txBody>
+          <a:bodyPr vert="horz" lIns="91440" tIns="45720" rIns="91440" bIns="45720" rtlCol="0"/>
+          <a:lstStyle/>
+          <a:p>
+            <a:pPr lvl="0"/>
+            <a:r>
+              <a:rPr lang="en-US"/>
+              <a:t>Click to edit Master text styles</a:t>
+            </a:r>
+          </a:p>
+          <a:p>
+            <a:pPr lvl="1"/>
+            <a:r>
+              <a:rPr lang="en-US"/>
+              <a:t>Second level</a:t>
+            </a:r>
+          </a:p>
+          <a:p>
+            <a:pPr lvl="2"/>
+            <a:r>
+              <a:rPr lang="en-US"/>
+              <a:t>Third level</a:t>
+            </a:r>
+          </a:p>
+          <a:p>
+            <a:pPr lvl="3"/>
+            <a:r>
+              <a:rPr lang="en-US"/>
+              <a:t>Fourth level</a:t>
+            </a:r>
+          </a:p>
+          <a:p>
+            <a:pPr lvl="4"/>
+            <a:r>
+              <a:rPr lang="en-US"/>
+              <a:t>Fifth level</a:t>
+            </a:r>
+          </a:p>
+        </p:txBody>
+      </p:sp>
+      <p:sp>
+        <p:nvSpPr>
+          <p:cNvPr id="6" name="Footer Placeholder 5"/>
+          <p:cNvSpPr>
+            <a:spLocks noGrp="1"/>
+          </p:cNvSpPr>
+          <p:nvPr>
+            <p:ph type="ftr" sz="quarter" idx="4"/>
+          </p:nvPr>
+        </p:nvSpPr>
+        <p:spPr>
+          <a:xfrm>
+            <a:off x="0" y="8685213"/>
+            <a:ext cx="2971800" cy="458787"/>
+          </a:xfrm>
+          <a:prstGeom prst="rect">
+            <a:avLst/>
+          </a:prstGeom>
+        </p:spPr>
+        <p:txBody>
+          <a:bodyPr vert="horz" lIns="91440" tIns="45720" rIns="91440" bIns="45720" rtlCol="0" anchor="b"/>
+          <a:lstStyle>
+            <a:lvl1pPr algn="l">
+              <a:defRPr sz="1200"/>
+            </a:lvl1pPr>
+          </a:lstStyle>
+          <a:p>
+            <a:endParaRPr lang="en-US"/>
+          </a:p>
+        </p:txBody>
+      </p:sp>
+      <p:sp>
+        <p:nvSpPr>
+          <p:cNvPr id="7" name="Slide Number Placeholder 6"/>
+          <p:cNvSpPr>
+            <a:spLocks noGrp="1"/>
+          </p:cNvSpPr>
+          <p:nvPr>
+            <p:ph type="sldNum" sz="quarter" idx="5"/>
+          </p:nvPr>
+        </p:nvSpPr>
+        <p:spPr>
+          <a:xfrm>
+            <a:off x="3884613" y="8685213"/>
+            <a:ext cx="2971800" cy="458787"/>
+          </a:xfrm>
+          <a:prstGeom prst="rect">
+            <a:avLst/>
+          </a:prstGeom>
+        </p:spPr>
+        <p:txBody>
+          <a:bodyPr vert="horz" lIns="91440" tIns="45720" rIns="91440" bIns="45720" rtlCol="0" anchor="b"/>
+          <a:lstStyle>
+            <a:lvl1pPr algn="r">
+              <a:defRPr sz="1200"/>
+            </a:lvl1pPr>
+          </a:lstStyle>
+          <a:p>
+            <a:fld id="{1173F729-9B69-4F7A-B335-A85BBAD54984}" type="slidenum">
+              <a:rPr lang="en-US" smtClean="0"/>
+              <a:t>‹#›</a:t>
+            </a:fld>
+            <a:endParaRPr lang="en-US"/>
+          </a:p>
+        </p:txBody>
+      </p:sp>
+    </p:spTree>
+    <p:extLst>
+      <p:ext uri="{BB962C8B-B14F-4D97-AF65-F5344CB8AC3E}">
+        <p14:creationId xmlns:p14="http://schemas.microsoft.com/office/powerpoint/2010/main" val="3448549450"/>
+      </p:ext>
+    </p:extLst>
+  </p:cSld>
+  <p:clrMap bg1="lt1" tx1="dk1" bg2="lt2" tx2="dk2" accent1="accent1" accent2="accent2" accent3="accent3" accent4="accent4" accent5="accent5" accent6="accent6" hlink="hlink" folHlink="folHlink"/>
+  <p:notesStyle>
+    <a:lvl1pPr marL="0" algn="l" defTabSz="914400" rtl="0" eaLnBrk="1" latinLnBrk="0" hangingPunct="1">
+      <a:defRPr sz="1200" kern="1200">
+        <a:solidFill>
+          <a:schemeClr val="tx1"/>
+        </a:solidFill>
+        <a:latin typeface="+mn-lt"/>
+        <a:ea typeface="+mn-ea"/>
+        <a:cs typeface="+mn-cs"/>
+      </a:defRPr>
+    </a:lvl1pPr>
+    <a:lvl2pPr marL="457200" algn="l" defTabSz="914400" rtl="0" eaLnBrk="1" latinLnBrk="0" hangingPunct="1">
+      <a:defRPr sz="1200" kern="1200">
+        <a:solidFill>
+          <a:schemeClr val="tx1"/>
+        </a:solidFill>
+        <a:latin typeface="+mn-lt"/>
+        <a:ea typeface="+mn-ea"/>
+        <a:cs typeface="+mn-cs"/>
+      </a:defRPr>
+    </a:lvl2pPr>
+    <a:lvl3pPr marL="914400" algn="l" defTabSz="914400" rtl="0" eaLnBrk="1" latinLnBrk="0" hangingPunct="1">
+      <a:defRPr sz="1200" kern="1200">
+        <a:solidFill>
+          <a:schemeClr val="tx1"/>
+        </a:solidFill>
+        <a:latin typeface="+mn-lt"/>
+        <a:ea typeface="+mn-ea"/>
+        <a:cs typeface="+mn-cs"/>
+      </a:defRPr>
+    </a:lvl3pPr>
+    <a:lvl4pPr marL="1371600" algn="l" defTabSz="914400" rtl="0" eaLnBrk="1" latinLnBrk="0" hangingPunct="1">
+      <a:defRPr sz="1200" kern="1200">
+        <a:solidFill>
+          <a:schemeClr val="tx1"/>
+        </a:solidFill>
+        <a:latin typeface="+mn-lt"/>
+        <a:ea typeface="+mn-ea"/>
+        <a:cs typeface="+mn-cs"/>
+      </a:defRPr>
+    </a:lvl4pPr>
+    <a:lvl5pPr marL="1828800" algn="l" defTabSz="914400" rtl="0" eaLnBrk="1" latinLnBrk="0" hangingPunct="1">
+      <a:defRPr sz="1200" kern="1200">
+        <a:solidFill>
+          <a:schemeClr val="tx1"/>
+        </a:solidFill>
+        <a:latin typeface="+mn-lt"/>
+        <a:ea typeface="+mn-ea"/>
+        <a:cs typeface="+mn-cs"/>
+      </a:defRPr>
+    </a:lvl5pPr>
+    <a:lvl6pPr marL="2286000" algn="l" defTabSz="914400" rtl="0" eaLnBrk="1" latinLnBrk="0" hangingPunct="1">
+      <a:defRPr sz="1200" kern="1200">
+        <a:solidFill>
+          <a:schemeClr val="tx1"/>
+        </a:solidFill>
+        <a:latin typeface="+mn-lt"/>
+        <a:ea typeface="+mn-ea"/>
+        <a:cs typeface="+mn-cs"/>
+      </a:defRPr>
+    </a:lvl6pPr>
+    <a:lvl7pPr marL="2743200" algn="l" defTabSz="914400" rtl="0" eaLnBrk="1" latinLnBrk="0" hangingPunct="1">
+      <a:defRPr sz="1200" kern="1200">
+        <a:solidFill>
+          <a:schemeClr val="tx1"/>
+        </a:solidFill>
+        <a:latin typeface="+mn-lt"/>
+        <a:ea typeface="+mn-ea"/>
+        <a:cs typeface="+mn-cs"/>
+      </a:defRPr>
+    </a:lvl7pPr>
+    <a:lvl8pPr marL="3200400" algn="l" defTabSz="914400" rtl="0" eaLnBrk="1" latinLnBrk="0" hangingPunct="1">
+      <a:defRPr sz="1200" kern="1200">
+        <a:solidFill>
+          <a:schemeClr val="tx1"/>
+        </a:solidFill>
+        <a:latin typeface="+mn-lt"/>
+        <a:ea typeface="+mn-ea"/>
+        <a:cs typeface="+mn-cs"/>
+      </a:defRPr>
+    </a:lvl8pPr>
+    <a:lvl9pPr marL="3657600" algn="l" defTabSz="914400" rtl="0" eaLnBrk="1" latinLnBrk="0" hangingPunct="1">
+      <a:defRPr sz="1200" kern="1200">
+        <a:solidFill>
+          <a:schemeClr val="tx1"/>
+        </a:solidFill>
+        <a:latin typeface="+mn-lt"/>
+        <a:ea typeface="+mn-ea"/>
+        <a:cs typeface="+mn-cs"/>
+      </a:defRPr>
+    </a:lvl9pPr>
+  </p:notesStyle>
+</p:notesMaster>
+</file>
+
+<file path=ppt/notesSlides/notesSlide1.xml><?xml version="1.0" encoding="utf-8"?>
+<p:notes xmlns:a="http://schemas.openxmlformats.org/drawingml/2006/main" xmlns:r="http://schemas.openxmlformats.org/officeDocument/2006/relationships" xmlns:p="http://schemas.openxmlformats.org/presentationml/2006/main">
+  <p:cSld>
+    <p:spTree>
+      <p:nvGrpSpPr>
+        <p:cNvPr id="1" name=""/>
+        <p:cNvGrpSpPr/>
+        <p:nvPr/>
+      </p:nvGrpSpPr>
+      <p:grpSpPr>
+        <a:xfrm>
+          <a:off x="0" y="0"/>
+          <a:ext cx="0" cy="0"/>
+          <a:chOff x="0" y="0"/>
+          <a:chExt cx="0" cy="0"/>
+        </a:xfrm>
+      </p:grpSpPr>
+      <p:sp>
+        <p:nvSpPr>
+          <p:cNvPr id="2" name="Slide Image Placeholder 1"/>
+          <p:cNvSpPr>
+            <a:spLocks noGrp="1" noRot="1" noChangeAspect="1"/>
+          </p:cNvSpPr>
+          <p:nvPr>
+            <p:ph type="sldImg"/>
+          </p:nvPr>
+        </p:nvSpPr>
+        <p:spPr/>
+      </p:sp>
+      <p:sp>
+        <p:nvSpPr>
+          <p:cNvPr id="3" name="Notes Placeholder 2"/>
+          <p:cNvSpPr>
+            <a:spLocks noGrp="1"/>
+          </p:cNvSpPr>
+          <p:nvPr>
+            <p:ph type="body" idx="1"/>
+          </p:nvPr>
+        </p:nvSpPr>
+        <p:spPr/>
+        <p:txBody>
+          <a:bodyPr/>
+          <a:lstStyle/>
+          <a:p>
+            <a:pPr marL="171450" lvl="0" indent="-171450">
+              <a:buFont typeface="Arial" panose="020B0604020202020204" pitchFamily="34" charset="0"/>
+              <a:buChar char="•"/>
+            </a:pPr>
+            <a:r>
+              <a:rPr lang="en-US" sz="1200" kern="1200" dirty="0">
+                <a:solidFill>
+                  <a:schemeClr val="tx1"/>
+                </a:solidFill>
+                <a:effectLst/>
+                <a:latin typeface="+mn-lt"/>
+                <a:ea typeface="+mn-ea"/>
+                <a:cs typeface="+mn-cs"/>
+              </a:rPr>
+              <a:t>Welcome everyone. Today I'm walking you through the AI Transcript Intake Agent - a tool I built for our Electronics AI Working Group.</a:t>
+            </a:r>
+          </a:p>
+          <a:p>
+            <a:pPr marL="171450" lvl="0" indent="-171450">
+              <a:buFont typeface="Arial" panose="020B0604020202020204" pitchFamily="34" charset="0"/>
+              <a:buChar char="•"/>
+            </a:pPr>
+            <a:r>
+              <a:rPr lang="en-US" sz="1200" kern="1200" dirty="0">
+                <a:solidFill>
+                  <a:schemeClr val="tx1"/>
+                </a:solidFill>
+                <a:effectLst/>
+                <a:latin typeface="+mn-lt"/>
+                <a:ea typeface="+mn-ea"/>
+                <a:cs typeface="+mn-cs"/>
+              </a:rPr>
+              <a:t>The one-line version: it takes the transcript of our weekly meeting and turns it into structured, reviewable AI-opportunity records - and then tracks those opportunities all the way through to who is actually working on them.</a:t>
+            </a:r>
+          </a:p>
+          <a:p>
+            <a:pPr marL="171450" lvl="0" indent="-171450">
+              <a:buFont typeface="Arial" panose="020B0604020202020204" pitchFamily="34" charset="0"/>
+              <a:buChar char="•"/>
+            </a:pPr>
+            <a:r>
+              <a:rPr lang="en-US" sz="1200" kern="1200" dirty="0">
+                <a:solidFill>
+                  <a:schemeClr val="tx1"/>
+                </a:solidFill>
+                <a:effectLst/>
+                <a:latin typeface="+mn-lt"/>
+                <a:ea typeface="+mn-ea"/>
+                <a:cs typeface="+mn-cs"/>
+              </a:rPr>
+              <a:t>I'll spend about 20-25 minutes: why I built it, how it works, a live demo, the time savings, and how any of your teams could use the same engine.</a:t>
+            </a:r>
+          </a:p>
+          <a:p>
+            <a:endParaRPr lang="en-US" dirty="0"/>
+          </a:p>
+          <a:p>
+            <a:r>
+              <a:rPr lang="en-US" dirty="0"/>
+              <a:t>Transition: </a:t>
+            </a:r>
+            <a:r>
+              <a:rPr lang="en-US" sz="1200" i="1" kern="1200" dirty="0">
+                <a:solidFill>
+                  <a:schemeClr val="tx1"/>
+                </a:solidFill>
+                <a:effectLst/>
+                <a:latin typeface="+mn-lt"/>
+                <a:ea typeface="+mn-ea"/>
+                <a:cs typeface="+mn-cs"/>
+              </a:rPr>
+              <a:t>Let's start with the agenda so you know where we're headed.</a:t>
+            </a:r>
+            <a:endParaRPr lang="en-US" dirty="0"/>
+          </a:p>
+        </p:txBody>
+      </p:sp>
+      <p:sp>
+        <p:nvSpPr>
+          <p:cNvPr id="4" name="Slide Number Placeholder 3"/>
+          <p:cNvSpPr>
+            <a:spLocks noGrp="1"/>
+          </p:cNvSpPr>
+          <p:nvPr>
+            <p:ph type="sldNum" sz="quarter" idx="5"/>
+          </p:nvPr>
+        </p:nvSpPr>
+        <p:spPr/>
+        <p:txBody>
+          <a:bodyPr/>
+          <a:lstStyle/>
+          <a:p>
+            <a:fld id="{1173F729-9B69-4F7A-B335-A85BBAD54984}" type="slidenum">
+              <a:rPr lang="en-US" smtClean="0"/>
+              <a:t>1</a:t>
+            </a:fld>
+            <a:endParaRPr lang="en-US"/>
+          </a:p>
+        </p:txBody>
+      </p:sp>
+    </p:spTree>
+    <p:extLst>
+      <p:ext uri="{BB962C8B-B14F-4D97-AF65-F5344CB8AC3E}">
+        <p14:creationId xmlns:p14="http://schemas.microsoft.com/office/powerpoint/2010/main" val="60952578"/>
+      </p:ext>
+    </p:extLst>
+  </p:cSld>
+  <p:clrMapOvr>
+    <a:masterClrMapping/>
+  </p:clrMapOvr>
+</p:notes>
+</file>
+
+<file path=ppt/notesSlides/notesSlide10.xml><?xml version="1.0" encoding="utf-8"?>
+<p:notes xmlns:a="http://schemas.openxmlformats.org/drawingml/2006/main" xmlns:r="http://schemas.openxmlformats.org/officeDocument/2006/relationships" xmlns:p="http://schemas.openxmlformats.org/presentationml/2006/main">
+  <p:cSld>
+    <p:spTree>
+      <p:nvGrpSpPr>
+        <p:cNvPr id="1" name=""/>
+        <p:cNvGrpSpPr/>
+        <p:nvPr/>
+      </p:nvGrpSpPr>
+      <p:grpSpPr>
+        <a:xfrm>
+          <a:off x="0" y="0"/>
+          <a:ext cx="0" cy="0"/>
+          <a:chOff x="0" y="0"/>
+          <a:chExt cx="0" cy="0"/>
+        </a:xfrm>
+      </p:grpSpPr>
+      <p:sp>
+        <p:nvSpPr>
+          <p:cNvPr id="2" name="Slide Image Placeholder 1"/>
+          <p:cNvSpPr>
+            <a:spLocks noGrp="1" noRot="1" noChangeAspect="1"/>
+          </p:cNvSpPr>
+          <p:nvPr>
+            <p:ph type="sldImg"/>
+          </p:nvPr>
+        </p:nvSpPr>
+        <p:spPr/>
+      </p:sp>
+      <p:sp>
+        <p:nvSpPr>
+          <p:cNvPr id="3" name="Notes Placeholder 2"/>
+          <p:cNvSpPr>
+            <a:spLocks noGrp="1"/>
+          </p:cNvSpPr>
+          <p:nvPr>
+            <p:ph type="body" idx="1"/>
+          </p:nvPr>
+        </p:nvSpPr>
+        <p:spPr/>
+        <p:txBody>
+          <a:bodyPr/>
+          <a:lstStyle/>
+          <a:p>
+            <a:pPr marL="171450" lvl="0" indent="-171450">
+              <a:buFont typeface="Arial" panose="020B0604020202020204" pitchFamily="34" charset="0"/>
+              <a:buChar char="•"/>
+            </a:pPr>
+            <a:r>
+              <a:rPr lang="en-US" sz="1200" kern="1200" dirty="0">
+                <a:solidFill>
+                  <a:schemeClr val="tx1"/>
+                </a:solidFill>
+                <a:effectLst/>
+                <a:latin typeface="+mn-lt"/>
+                <a:ea typeface="+mn-ea"/>
+                <a:cs typeface="+mn-cs"/>
+              </a:rPr>
+              <a:t>Let's talk numbers. The headline: about 7.5 hours saved every week, an 83% reduction in manual effort, roughly 390 hours a year. At a loaded rate that's about $33,000 a year in time value - and that's a lens, not a billing claim.</a:t>
+            </a:r>
+          </a:p>
+          <a:p>
+            <a:pPr marL="171450" lvl="0" indent="-171450">
+              <a:buFont typeface="Arial" panose="020B0604020202020204" pitchFamily="34" charset="0"/>
+              <a:buChar char="•"/>
+            </a:pPr>
+            <a:r>
+              <a:rPr lang="en-US" sz="1200" kern="1200" dirty="0">
+                <a:solidFill>
+                  <a:schemeClr val="tx1"/>
+                </a:solidFill>
+                <a:effectLst/>
+                <a:latin typeface="+mn-lt"/>
+                <a:ea typeface="+mn-ea"/>
+                <a:cs typeface="+mn-cs"/>
+              </a:rPr>
+              <a:t>It breaks into two buckets. The transcript processing itself saves about 5.8 hours a week - reading, identifying, classifying, and building the reports all collapse from hours to minutes.</a:t>
+            </a:r>
+          </a:p>
+          <a:p>
+            <a:pPr marL="171450" lvl="0" indent="-171450">
+              <a:buFont typeface="Arial" panose="020B0604020202020204" pitchFamily="34" charset="0"/>
+              <a:buChar char="•"/>
+            </a:pPr>
+            <a:r>
+              <a:rPr lang="en-US" sz="1200" kern="1200" dirty="0">
+                <a:solidFill>
+                  <a:schemeClr val="tx1"/>
+                </a:solidFill>
+                <a:effectLst/>
+                <a:latin typeface="+mn-lt"/>
+                <a:ea typeface="+mn-ea"/>
+                <a:cs typeface="+mn-cs"/>
+              </a:rPr>
+              <a:t>The Azure DevOps lifecycle adds another ~1.7 hours a week - work-item creation drops from a couple of hours per cycle to minutes, status tracking goes from an hour a week to about five minutes, and traceability lookups basically disappear.</a:t>
+            </a:r>
+          </a:p>
+          <a:p>
+            <a:pPr marL="171450" lvl="0" indent="-171450">
+              <a:buFont typeface="Arial" panose="020B0604020202020204" pitchFamily="34" charset="0"/>
+              <a:buChar char="•"/>
+            </a:pPr>
+            <a:r>
+              <a:rPr lang="en-US" sz="1200" kern="1200" dirty="0">
+                <a:solidFill>
+                  <a:schemeClr val="tx1"/>
+                </a:solidFill>
+                <a:effectLst/>
+                <a:latin typeface="+mn-lt"/>
+                <a:ea typeface="+mn-ea"/>
+                <a:cs typeface="+mn-cs"/>
+              </a:rPr>
+              <a:t>Two things I want to be honest about: QA and human review time is largely RETAINED - that's the judgement step and we want to keep it. And the ADO piece consumes no AI credits at all - it's a plain REST API.</a:t>
+            </a:r>
+          </a:p>
+          <a:p>
+            <a:pPr marL="171450" lvl="0" indent="-171450">
+              <a:buFont typeface="Arial" panose="020B0604020202020204" pitchFamily="34" charset="0"/>
+              <a:buChar char="•"/>
+            </a:pPr>
+            <a:r>
+              <a:rPr lang="en-US" sz="1200" kern="1200" dirty="0">
+                <a:solidFill>
+                  <a:schemeClr val="tx1"/>
+                </a:solidFill>
+                <a:effectLst/>
+                <a:latin typeface="+mn-lt"/>
+                <a:ea typeface="+mn-ea"/>
+                <a:cs typeface="+mn-cs"/>
+              </a:rPr>
+              <a:t>These estimates are deliberately conservative. If anything, the consistency benefit - everyone speaking the same language - is worth more than the raw hours.</a:t>
+            </a:r>
+          </a:p>
+          <a:p>
+            <a:pPr marL="171450" lvl="0" indent="-171450">
+              <a:buFont typeface="Arial" panose="020B0604020202020204" pitchFamily="34" charset="0"/>
+              <a:buChar char="•"/>
+            </a:pPr>
+            <a:endParaRPr lang="en-US" sz="1200" kern="1200" dirty="0">
+              <a:solidFill>
+                <a:schemeClr val="tx1"/>
+              </a:solidFill>
+              <a:effectLst/>
+              <a:latin typeface="+mn-lt"/>
+              <a:ea typeface="+mn-ea"/>
+              <a:cs typeface="+mn-cs"/>
+            </a:endParaRPr>
+          </a:p>
+          <a:p>
+            <a:pPr marL="0" marR="0" lvl="0" indent="0" algn="l" defTabSz="914400" rtl="0" eaLnBrk="1" fontAlgn="auto" latinLnBrk="0" hangingPunct="1">
+              <a:lnSpc>
+                <a:spcPct val="100000"/>
+              </a:lnSpc>
+              <a:spcBef>
+                <a:spcPts val="0"/>
+              </a:spcBef>
+              <a:spcAft>
+                <a:spcPts val="0"/>
+              </a:spcAft>
+              <a:buClrTx/>
+              <a:buSzTx/>
+              <a:buFont typeface="Arial" panose="020B0604020202020204" pitchFamily="34" charset="0"/>
+              <a:buNone/>
+              <a:tabLst/>
+              <a:defRPr/>
+            </a:pPr>
+            <a:r>
+              <a:rPr lang="en-US" sz="1200" b="1" i="1" kern="1200" dirty="0">
+                <a:solidFill>
+                  <a:schemeClr val="tx1"/>
+                </a:solidFill>
+                <a:effectLst/>
+                <a:latin typeface="+mn-lt"/>
+                <a:ea typeface="+mn-ea"/>
+                <a:cs typeface="+mn-cs"/>
+              </a:rPr>
+              <a:t>Transition:  </a:t>
+            </a:r>
+            <a:r>
+              <a:rPr lang="en-US" sz="1200" i="1" kern="1200" dirty="0">
+                <a:solidFill>
+                  <a:schemeClr val="tx1"/>
+                </a:solidFill>
+                <a:effectLst/>
+                <a:latin typeface="+mn-lt"/>
+                <a:ea typeface="+mn-ea"/>
+                <a:cs typeface="+mn-cs"/>
+              </a:rPr>
+              <a:t>And here's why this isn't just for our team.</a:t>
+            </a:r>
+            <a:endParaRPr lang="en-US" sz="1200" kern="1200" dirty="0">
+              <a:solidFill>
+                <a:schemeClr val="tx1"/>
+              </a:solidFill>
+              <a:effectLst/>
+              <a:latin typeface="+mn-lt"/>
+              <a:ea typeface="+mn-ea"/>
+              <a:cs typeface="+mn-cs"/>
+            </a:endParaRPr>
+          </a:p>
+          <a:p>
+            <a:pPr marL="0" lvl="0" indent="0">
+              <a:buFont typeface="Arial" panose="020B0604020202020204" pitchFamily="34" charset="0"/>
+              <a:buNone/>
+            </a:pPr>
+            <a:endParaRPr lang="en-US" sz="1200" kern="1200" dirty="0">
+              <a:solidFill>
+                <a:schemeClr val="tx1"/>
+              </a:solidFill>
+              <a:effectLst/>
+              <a:latin typeface="+mn-lt"/>
+              <a:ea typeface="+mn-ea"/>
+              <a:cs typeface="+mn-cs"/>
+            </a:endParaRPr>
+          </a:p>
+          <a:p>
+            <a:endParaRPr lang="en-US" dirty="0"/>
+          </a:p>
+        </p:txBody>
+      </p:sp>
+      <p:sp>
+        <p:nvSpPr>
+          <p:cNvPr id="4" name="Slide Number Placeholder 3"/>
+          <p:cNvSpPr>
+            <a:spLocks noGrp="1"/>
+          </p:cNvSpPr>
+          <p:nvPr>
+            <p:ph type="sldNum" sz="quarter" idx="5"/>
+          </p:nvPr>
+        </p:nvSpPr>
+        <p:spPr/>
+        <p:txBody>
+          <a:bodyPr/>
+          <a:lstStyle/>
+          <a:p>
+            <a:fld id="{1173F729-9B69-4F7A-B335-A85BBAD54984}" type="slidenum">
+              <a:rPr lang="en-US" smtClean="0"/>
+              <a:t>15</a:t>
+            </a:fld>
+            <a:endParaRPr lang="en-US"/>
+          </a:p>
+        </p:txBody>
+      </p:sp>
+    </p:spTree>
+    <p:extLst>
+      <p:ext uri="{BB962C8B-B14F-4D97-AF65-F5344CB8AC3E}">
+        <p14:creationId xmlns:p14="http://schemas.microsoft.com/office/powerpoint/2010/main" val="211805826"/>
+      </p:ext>
+    </p:extLst>
+  </p:cSld>
+  <p:clrMapOvr>
+    <a:masterClrMapping/>
+  </p:clrMapOvr>
+</p:notes>
+</file>
+
+<file path=ppt/notesSlides/notesSlide11.xml><?xml version="1.0" encoding="utf-8"?>
+<p:notes xmlns:a="http://schemas.openxmlformats.org/drawingml/2006/main" xmlns:r="http://schemas.openxmlformats.org/officeDocument/2006/relationships" xmlns:p="http://schemas.openxmlformats.org/presentationml/2006/main">
+  <p:cSld>
+    <p:spTree>
+      <p:nvGrpSpPr>
+        <p:cNvPr id="1" name=""/>
+        <p:cNvGrpSpPr/>
+        <p:nvPr/>
+      </p:nvGrpSpPr>
+      <p:grpSpPr>
+        <a:xfrm>
+          <a:off x="0" y="0"/>
+          <a:ext cx="0" cy="0"/>
+          <a:chOff x="0" y="0"/>
+          <a:chExt cx="0" cy="0"/>
+        </a:xfrm>
+      </p:grpSpPr>
+      <p:sp>
+        <p:nvSpPr>
+          <p:cNvPr id="2" name="Slide Image Placeholder 1"/>
+          <p:cNvSpPr>
+            <a:spLocks noGrp="1" noRot="1" noChangeAspect="1"/>
+          </p:cNvSpPr>
+          <p:nvPr>
+            <p:ph type="sldImg"/>
+          </p:nvPr>
+        </p:nvSpPr>
+        <p:spPr/>
+      </p:sp>
+      <p:sp>
+        <p:nvSpPr>
+          <p:cNvPr id="3" name="Notes Placeholder 2"/>
+          <p:cNvSpPr>
+            <a:spLocks noGrp="1"/>
+          </p:cNvSpPr>
+          <p:nvPr>
+            <p:ph type="body" idx="1"/>
+          </p:nvPr>
+        </p:nvSpPr>
+        <p:spPr/>
+        <p:txBody>
+          <a:bodyPr/>
+          <a:lstStyle/>
+          <a:p>
+            <a:pPr marL="171450" lvl="0" indent="-171450">
+              <a:buFont typeface="Arial" panose="020B0604020202020204" pitchFamily="34" charset="0"/>
+              <a:buChar char="•"/>
+            </a:pPr>
+            <a:r>
+              <a:rPr lang="en-US" sz="1200" kern="1200" dirty="0">
+                <a:solidFill>
+                  <a:schemeClr val="tx1"/>
+                </a:solidFill>
+                <a:effectLst/>
+                <a:latin typeface="+mn-lt"/>
+                <a:ea typeface="+mn-ea"/>
+                <a:cs typeface="+mn-cs"/>
+              </a:rPr>
+              <a:t>This is the part I want every team lead in the room to hear. The engine is domain-agnostic. Remember the framework is just config, and the extraction logic is just a short prompt file. Swap those two things, point it at different documents, and it works for a completely different team.</a:t>
+            </a:r>
+          </a:p>
+          <a:p>
+            <a:pPr marL="171450" lvl="0" indent="-171450">
+              <a:buFont typeface="Arial" panose="020B0604020202020204" pitchFamily="34" charset="0"/>
+              <a:buChar char="•"/>
+            </a:pPr>
+            <a:r>
+              <a:rPr lang="en-US" sz="1200" kern="1200" dirty="0">
+                <a:solidFill>
+                  <a:schemeClr val="tx1"/>
+                </a:solidFill>
+                <a:effectLst/>
+                <a:latin typeface="+mn-lt"/>
+                <a:ea typeface="+mn-ea"/>
+                <a:cs typeface="+mn-cs"/>
+              </a:rPr>
+              <a:t>Sales or CX - run it on call transcripts to extract customer pain points, feature requests, and churn signals.</a:t>
+            </a:r>
+          </a:p>
+          <a:p>
+            <a:pPr marL="171450" lvl="0" indent="-171450">
+              <a:buFont typeface="Arial" panose="020B0604020202020204" pitchFamily="34" charset="0"/>
+              <a:buChar char="•"/>
+            </a:pPr>
+            <a:r>
+              <a:rPr lang="en-US" sz="1200" kern="1200" dirty="0">
+                <a:solidFill>
+                  <a:schemeClr val="tx1"/>
+                </a:solidFill>
+                <a:effectLst/>
+                <a:latin typeface="+mn-lt"/>
+                <a:ea typeface="+mn-ea"/>
+                <a:cs typeface="+mn-cs"/>
+              </a:rPr>
+              <a:t>HR or People - interview and survey notes become themes, sentiment, and training needs.</a:t>
+            </a:r>
+          </a:p>
+          <a:p>
+            <a:pPr marL="171450" lvl="0" indent="-171450">
+              <a:buFont typeface="Arial" panose="020B0604020202020204" pitchFamily="34" charset="0"/>
+              <a:buChar char="•"/>
+            </a:pPr>
+            <a:r>
+              <a:rPr lang="en-US" sz="1200" kern="1200" dirty="0">
+                <a:solidFill>
+                  <a:schemeClr val="tx1"/>
+                </a:solidFill>
+                <a:effectLst/>
+                <a:latin typeface="+mn-lt"/>
+                <a:ea typeface="+mn-ea"/>
+                <a:cs typeface="+mn-cs"/>
+              </a:rPr>
+              <a:t>Engineering - incident retros become action items, root causes, and recurring failure modes.</a:t>
+            </a:r>
+          </a:p>
+          <a:p>
+            <a:pPr marL="171450" lvl="0" indent="-171450">
+              <a:buFont typeface="Arial" panose="020B0604020202020204" pitchFamily="34" charset="0"/>
+              <a:buChar char="•"/>
+            </a:pPr>
+            <a:r>
+              <a:rPr lang="en-US" sz="1200" kern="1200" dirty="0">
+                <a:solidFill>
+                  <a:schemeClr val="tx1"/>
+                </a:solidFill>
+                <a:effectLst/>
+                <a:latin typeface="+mn-lt"/>
+                <a:ea typeface="+mn-ea"/>
+                <a:cs typeface="+mn-cs"/>
+              </a:rPr>
+              <a:t>Product - user research sessions become jobs-to-be-done and prioritized asks. Legal - contract reviews surface obligations and non-standard clauses. Operations - standups surface blockers and dependencies.</a:t>
+            </a:r>
+          </a:p>
+          <a:p>
+            <a:pPr marL="171450" lvl="0" indent="-171450">
+              <a:buFont typeface="Arial" panose="020B0604020202020204" pitchFamily="34" charset="0"/>
+              <a:buChar char="•"/>
+            </a:pPr>
+            <a:r>
+              <a:rPr lang="en-US" sz="1200" kern="1200" dirty="0">
+                <a:solidFill>
+                  <a:schemeClr val="tx1"/>
+                </a:solidFill>
+                <a:effectLst/>
+                <a:latin typeface="+mn-lt"/>
+                <a:ea typeface="+mn-ea"/>
+                <a:cs typeface="+mn-cs"/>
+              </a:rPr>
+              <a:t>And the line at the bottom is key: everything that makes this safe and useful stays the same - the ingestion, the draft-only guardrails, the human review, the trend reporting, and the Azure DevOps loop. You're only swapping the domain knowledge, not rebuilding the machine.</a:t>
+            </a:r>
+          </a:p>
+          <a:p>
+            <a:pPr marL="171450" lvl="0" indent="-171450">
+              <a:buFont typeface="Arial" panose="020B0604020202020204" pitchFamily="34" charset="0"/>
+              <a:buChar char="•"/>
+            </a:pPr>
+            <a:endParaRPr lang="en-US" sz="1200" kern="1200" dirty="0">
+              <a:solidFill>
+                <a:schemeClr val="tx1"/>
+              </a:solidFill>
+              <a:effectLst/>
+              <a:latin typeface="+mn-lt"/>
+              <a:ea typeface="+mn-ea"/>
+              <a:cs typeface="+mn-cs"/>
+            </a:endParaRPr>
+          </a:p>
+          <a:p>
+            <a:pPr marL="0" marR="0" lvl="0" indent="0" algn="l" defTabSz="914400" rtl="0" eaLnBrk="1" fontAlgn="auto" latinLnBrk="0" hangingPunct="1">
+              <a:lnSpc>
+                <a:spcPct val="100000"/>
+              </a:lnSpc>
+              <a:spcBef>
+                <a:spcPts val="0"/>
+              </a:spcBef>
+              <a:spcAft>
+                <a:spcPts val="0"/>
+              </a:spcAft>
+              <a:buClrTx/>
+              <a:buSzTx/>
+              <a:buFont typeface="Arial" panose="020B0604020202020204" pitchFamily="34" charset="0"/>
+              <a:buNone/>
+              <a:tabLst/>
+              <a:defRPr/>
+            </a:pPr>
+            <a:r>
+              <a:rPr lang="en-US" sz="1200" b="1" i="1" kern="1200" dirty="0">
+                <a:solidFill>
+                  <a:schemeClr val="tx1"/>
+                </a:solidFill>
+                <a:effectLst/>
+                <a:latin typeface="+mn-lt"/>
+                <a:ea typeface="+mn-ea"/>
+                <a:cs typeface="+mn-cs"/>
+              </a:rPr>
+              <a:t>Transition:  </a:t>
+            </a:r>
+            <a:r>
+              <a:rPr lang="en-US" sz="1200" i="1" kern="1200" dirty="0">
+                <a:solidFill>
+                  <a:schemeClr val="tx1"/>
+                </a:solidFill>
+                <a:effectLst/>
+                <a:latin typeface="+mn-lt"/>
+                <a:ea typeface="+mn-ea"/>
+                <a:cs typeface="+mn-cs"/>
+              </a:rPr>
+              <a:t>So if you're thinking 'I want this,' here's what it takes.</a:t>
+            </a:r>
+            <a:endParaRPr lang="en-US" sz="1200" kern="1200" dirty="0">
+              <a:solidFill>
+                <a:schemeClr val="tx1"/>
+              </a:solidFill>
+              <a:effectLst/>
+              <a:latin typeface="+mn-lt"/>
+              <a:ea typeface="+mn-ea"/>
+              <a:cs typeface="+mn-cs"/>
+            </a:endParaRPr>
+          </a:p>
+          <a:p>
+            <a:pPr marL="171450" lvl="0" indent="-171450">
+              <a:buFont typeface="Arial" panose="020B0604020202020204" pitchFamily="34" charset="0"/>
+              <a:buChar char="•"/>
+            </a:pPr>
+            <a:endParaRPr lang="en-US" sz="1200" kern="1200" dirty="0">
+              <a:solidFill>
+                <a:schemeClr val="tx1"/>
+              </a:solidFill>
+              <a:effectLst/>
+              <a:latin typeface="+mn-lt"/>
+              <a:ea typeface="+mn-ea"/>
+              <a:cs typeface="+mn-cs"/>
+            </a:endParaRPr>
+          </a:p>
+          <a:p>
+            <a:endParaRPr lang="en-US" dirty="0"/>
+          </a:p>
+        </p:txBody>
+      </p:sp>
+      <p:sp>
+        <p:nvSpPr>
+          <p:cNvPr id="4" name="Slide Number Placeholder 3"/>
+          <p:cNvSpPr>
+            <a:spLocks noGrp="1"/>
+          </p:cNvSpPr>
+          <p:nvPr>
+            <p:ph type="sldNum" sz="quarter" idx="5"/>
+          </p:nvPr>
+        </p:nvSpPr>
+        <p:spPr/>
+        <p:txBody>
+          <a:bodyPr/>
+          <a:lstStyle/>
+          <a:p>
+            <a:fld id="{1173F729-9B69-4F7A-B335-A85BBAD54984}" type="slidenum">
+              <a:rPr lang="en-US" smtClean="0"/>
+              <a:t>16</a:t>
+            </a:fld>
+            <a:endParaRPr lang="en-US"/>
+          </a:p>
+        </p:txBody>
+      </p:sp>
+    </p:spTree>
+    <p:extLst>
+      <p:ext uri="{BB962C8B-B14F-4D97-AF65-F5344CB8AC3E}">
+        <p14:creationId xmlns:p14="http://schemas.microsoft.com/office/powerpoint/2010/main" val="1721711859"/>
+      </p:ext>
+    </p:extLst>
+  </p:cSld>
+  <p:clrMapOvr>
+    <a:masterClrMapping/>
+  </p:clrMapOvr>
+</p:notes>
+</file>
+
+<file path=ppt/notesSlides/notesSlide12.xml><?xml version="1.0" encoding="utf-8"?>
+<p:notes xmlns:a="http://schemas.openxmlformats.org/drawingml/2006/main" xmlns:r="http://schemas.openxmlformats.org/officeDocument/2006/relationships" xmlns:p="http://schemas.openxmlformats.org/presentationml/2006/main">
+  <p:cSld>
+    <p:spTree>
+      <p:nvGrpSpPr>
+        <p:cNvPr id="1" name=""/>
+        <p:cNvGrpSpPr/>
+        <p:nvPr/>
+      </p:nvGrpSpPr>
+      <p:grpSpPr>
+        <a:xfrm>
+          <a:off x="0" y="0"/>
+          <a:ext cx="0" cy="0"/>
+          <a:chOff x="0" y="0"/>
+          <a:chExt cx="0" cy="0"/>
+        </a:xfrm>
+      </p:grpSpPr>
+      <p:sp>
+        <p:nvSpPr>
+          <p:cNvPr id="2" name="Slide Image Placeholder 1"/>
+          <p:cNvSpPr>
+            <a:spLocks noGrp="1" noRot="1" noChangeAspect="1"/>
+          </p:cNvSpPr>
+          <p:nvPr>
+            <p:ph type="sldImg"/>
+          </p:nvPr>
+        </p:nvSpPr>
+        <p:spPr/>
+      </p:sp>
+      <p:sp>
+        <p:nvSpPr>
+          <p:cNvPr id="3" name="Notes Placeholder 2"/>
+          <p:cNvSpPr>
+            <a:spLocks noGrp="1"/>
+          </p:cNvSpPr>
+          <p:nvPr>
+            <p:ph type="body" idx="1"/>
+          </p:nvPr>
+        </p:nvSpPr>
+        <p:spPr/>
+        <p:txBody>
+          <a:bodyPr/>
+          <a:lstStyle/>
+          <a:p>
+            <a:pPr marL="171450" lvl="0" indent="-171450">
+              <a:buFont typeface="Arial" panose="020B0604020202020204" pitchFamily="34" charset="0"/>
+              <a:buChar char="•"/>
+            </a:pPr>
+            <a:r>
+              <a:rPr lang="en-US" sz="1200" kern="1200" dirty="0">
+                <a:solidFill>
+                  <a:schemeClr val="tx1"/>
+                </a:solidFill>
+                <a:effectLst/>
+                <a:latin typeface="+mn-lt"/>
+                <a:ea typeface="+mn-ea"/>
+                <a:cs typeface="+mn-cs"/>
+              </a:rPr>
+              <a:t>Five steps to stand up a new instance. One - define your framework: the dimensions and choice values for your domain, in a config file. Two - write the extraction prompt: one short file describing what an 'opportunity' looks like for you.</a:t>
+            </a:r>
+          </a:p>
+          <a:p>
+            <a:pPr marL="171450" lvl="0" indent="-171450">
+              <a:buFont typeface="Arial" panose="020B0604020202020204" pitchFamily="34" charset="0"/>
+              <a:buChar char="•"/>
+            </a:pPr>
+            <a:r>
+              <a:rPr lang="en-US" sz="1200" kern="1200" dirty="0">
+                <a:solidFill>
+                  <a:schemeClr val="tx1"/>
+                </a:solidFill>
+                <a:effectLst/>
+                <a:latin typeface="+mn-lt"/>
+                <a:ea typeface="+mn-ea"/>
+                <a:cs typeface="+mn-cs"/>
+              </a:rPr>
+              <a:t>Three - point it at your sources: drop your transcripts, notes, or documents into the input folder. Four - run and review: the same pipeline produces drafts, and a human reviews them. Five - wire your tracker: map the outputs to Azure DevOps, Jira, SharePoint - whatever closes your loop.</a:t>
+            </a:r>
+          </a:p>
+          <a:p>
+            <a:pPr marL="171450" lvl="0" indent="-171450">
+              <a:buFont typeface="Arial" panose="020B0604020202020204" pitchFamily="34" charset="0"/>
+              <a:buChar char="•"/>
+            </a:pPr>
+            <a:r>
+              <a:rPr lang="en-US" sz="1200" kern="1200" dirty="0">
+                <a:solidFill>
+                  <a:schemeClr val="tx1"/>
+                </a:solidFill>
+                <a:effectLst/>
+                <a:latin typeface="+mn-lt"/>
+                <a:ea typeface="+mn-ea"/>
+                <a:cs typeface="+mn-cs"/>
+              </a:rPr>
+              <a:t>The bottom line in green: no new infrastructure. It runs locally on an existing Copilot subscription, and it's governed by human review end to end. The barrier to try it is genuinely low.</a:t>
+            </a:r>
+          </a:p>
+          <a:p>
+            <a:pPr marL="171450" lvl="0" indent="-171450">
+              <a:buFont typeface="Arial" panose="020B0604020202020204" pitchFamily="34" charset="0"/>
+              <a:buChar char="•"/>
+            </a:pPr>
+            <a:endParaRPr lang="en-US" sz="1200" kern="1200" dirty="0">
+              <a:solidFill>
+                <a:schemeClr val="tx1"/>
+              </a:solidFill>
+              <a:effectLst/>
+              <a:latin typeface="+mn-lt"/>
+              <a:ea typeface="+mn-ea"/>
+              <a:cs typeface="+mn-cs"/>
+            </a:endParaRPr>
+          </a:p>
+          <a:p>
+            <a:pPr marL="0" marR="0" lvl="0" indent="0" algn="l" defTabSz="914400" rtl="0" eaLnBrk="1" fontAlgn="auto" latinLnBrk="0" hangingPunct="1">
+              <a:lnSpc>
+                <a:spcPct val="100000"/>
+              </a:lnSpc>
+              <a:spcBef>
+                <a:spcPts val="0"/>
+              </a:spcBef>
+              <a:spcAft>
+                <a:spcPts val="0"/>
+              </a:spcAft>
+              <a:buClrTx/>
+              <a:buSzTx/>
+              <a:buFont typeface="Arial" panose="020B0604020202020204" pitchFamily="34" charset="0"/>
+              <a:buNone/>
+              <a:tabLst/>
+              <a:defRPr/>
+            </a:pPr>
+            <a:r>
+              <a:rPr lang="en-US" sz="1200" b="1" i="1" kern="1200" dirty="0">
+                <a:solidFill>
+                  <a:schemeClr val="tx1"/>
+                </a:solidFill>
+                <a:effectLst/>
+                <a:latin typeface="+mn-lt"/>
+                <a:ea typeface="+mn-ea"/>
+                <a:cs typeface="+mn-cs"/>
+              </a:rPr>
+              <a:t>Transition:  </a:t>
+            </a:r>
+            <a:r>
+              <a:rPr lang="en-US" sz="1200" i="1" kern="1200" dirty="0">
+                <a:solidFill>
+                  <a:schemeClr val="tx1"/>
+                </a:solidFill>
+                <a:effectLst/>
+                <a:latin typeface="+mn-lt"/>
+                <a:ea typeface="+mn-ea"/>
+                <a:cs typeface="+mn-cs"/>
+              </a:rPr>
+              <a:t>Let me wrap up.</a:t>
+            </a:r>
+            <a:endParaRPr lang="en-US" sz="1200" kern="1200" dirty="0">
+              <a:solidFill>
+                <a:schemeClr val="tx1"/>
+              </a:solidFill>
+              <a:effectLst/>
+              <a:latin typeface="+mn-lt"/>
+              <a:ea typeface="+mn-ea"/>
+              <a:cs typeface="+mn-cs"/>
+            </a:endParaRPr>
+          </a:p>
+          <a:p>
+            <a:pPr marL="171450" lvl="0" indent="-171450">
+              <a:buFont typeface="Arial" panose="020B0604020202020204" pitchFamily="34" charset="0"/>
+              <a:buChar char="•"/>
+            </a:pPr>
+            <a:endParaRPr lang="en-US" sz="1200" kern="1200" dirty="0">
+              <a:solidFill>
+                <a:schemeClr val="tx1"/>
+              </a:solidFill>
+              <a:effectLst/>
+              <a:latin typeface="+mn-lt"/>
+              <a:ea typeface="+mn-ea"/>
+              <a:cs typeface="+mn-cs"/>
+            </a:endParaRPr>
+          </a:p>
+          <a:p>
+            <a:endParaRPr lang="en-US" dirty="0"/>
+          </a:p>
+        </p:txBody>
+      </p:sp>
+      <p:sp>
+        <p:nvSpPr>
+          <p:cNvPr id="4" name="Slide Number Placeholder 3"/>
+          <p:cNvSpPr>
+            <a:spLocks noGrp="1"/>
+          </p:cNvSpPr>
+          <p:nvPr>
+            <p:ph type="sldNum" sz="quarter" idx="5"/>
+          </p:nvPr>
+        </p:nvSpPr>
+        <p:spPr/>
+        <p:txBody>
+          <a:bodyPr/>
+          <a:lstStyle/>
+          <a:p>
+            <a:fld id="{1173F729-9B69-4F7A-B335-A85BBAD54984}" type="slidenum">
+              <a:rPr lang="en-US" smtClean="0"/>
+              <a:t>17</a:t>
+            </a:fld>
+            <a:endParaRPr lang="en-US"/>
+          </a:p>
+        </p:txBody>
+      </p:sp>
+    </p:spTree>
+    <p:extLst>
+      <p:ext uri="{BB962C8B-B14F-4D97-AF65-F5344CB8AC3E}">
+        <p14:creationId xmlns:p14="http://schemas.microsoft.com/office/powerpoint/2010/main" val="1884636689"/>
+      </p:ext>
+    </p:extLst>
+  </p:cSld>
+  <p:clrMapOvr>
+    <a:masterClrMapping/>
+  </p:clrMapOvr>
+</p:notes>
+</file>
+
+<file path=ppt/notesSlides/notesSlide13.xml><?xml version="1.0" encoding="utf-8"?>
+<p:notes xmlns:a="http://schemas.openxmlformats.org/drawingml/2006/main" xmlns:r="http://schemas.openxmlformats.org/officeDocument/2006/relationships" xmlns:p="http://schemas.openxmlformats.org/presentationml/2006/main">
+  <p:cSld>
+    <p:spTree>
+      <p:nvGrpSpPr>
+        <p:cNvPr id="1" name=""/>
+        <p:cNvGrpSpPr/>
+        <p:nvPr/>
+      </p:nvGrpSpPr>
+      <p:grpSpPr>
+        <a:xfrm>
+          <a:off x="0" y="0"/>
+          <a:ext cx="0" cy="0"/>
+          <a:chOff x="0" y="0"/>
+          <a:chExt cx="0" cy="0"/>
+        </a:xfrm>
+      </p:grpSpPr>
+      <p:sp>
+        <p:nvSpPr>
+          <p:cNvPr id="2" name="Slide Image Placeholder 1"/>
+          <p:cNvSpPr>
+            <a:spLocks noGrp="1" noRot="1" noChangeAspect="1"/>
+          </p:cNvSpPr>
+          <p:nvPr>
+            <p:ph type="sldImg"/>
+          </p:nvPr>
+        </p:nvSpPr>
+        <p:spPr/>
+      </p:sp>
+      <p:sp>
+        <p:nvSpPr>
+          <p:cNvPr id="3" name="Notes Placeholder 2"/>
+          <p:cNvSpPr>
+            <a:spLocks noGrp="1"/>
+          </p:cNvSpPr>
+          <p:nvPr>
+            <p:ph type="body" idx="1"/>
+          </p:nvPr>
+        </p:nvSpPr>
+        <p:spPr/>
+        <p:txBody>
+          <a:bodyPr/>
+          <a:lstStyle/>
+          <a:p>
+            <a:pPr marL="171450" lvl="0" indent="-171450">
+              <a:buFont typeface="Arial" panose="020B0604020202020204" pitchFamily="34" charset="0"/>
+              <a:buChar char="•"/>
+            </a:pPr>
+            <a:r>
+              <a:rPr lang="en-US" sz="1200" kern="1200" dirty="0">
+                <a:solidFill>
+                  <a:schemeClr val="tx1"/>
+                </a:solidFill>
+                <a:effectLst/>
+                <a:latin typeface="+mn-lt"/>
+                <a:ea typeface="+mn-ea"/>
+                <a:cs typeface="+mn-cs"/>
+              </a:rPr>
+              <a:t>Quick recap. It turns weekly meeting talk into structured, classified, reviewable opportunities. It saves roughly 7.5 hours a week. It closes the loop with Azure DevOps, so discussion becomes tracked execution. It's human-in-the-loop and draft-only at every step - safe by design. And it's domain-agnostic - swap the config and it serves any team.</a:t>
+            </a:r>
+          </a:p>
+          <a:p>
+            <a:pPr marL="171450" lvl="0" indent="-171450">
+              <a:buFont typeface="Arial" panose="020B0604020202020204" pitchFamily="34" charset="0"/>
+              <a:buChar char="•"/>
+            </a:pPr>
+            <a:r>
+              <a:rPr lang="en-US" sz="1200" kern="1200" dirty="0">
+                <a:solidFill>
+                  <a:schemeClr val="tx1"/>
+                </a:solidFill>
+                <a:effectLst/>
+                <a:latin typeface="+mn-lt"/>
+                <a:ea typeface="+mn-ea"/>
+                <a:cs typeface="+mn-cs"/>
+              </a:rPr>
+              <a:t>The ask: if any of this resonated for your team's workflow, come find me. I'd love to help you stand up an instance - the engine already exists; we just point it at your world.</a:t>
+            </a:r>
+          </a:p>
+          <a:p>
+            <a:pPr marL="171450" lvl="0" indent="-171450">
+              <a:buFont typeface="Arial" panose="020B0604020202020204" pitchFamily="34" charset="0"/>
+              <a:buChar char="•"/>
+            </a:pPr>
+            <a:endParaRPr lang="en-US" sz="1200" kern="1200" dirty="0">
+              <a:solidFill>
+                <a:schemeClr val="tx1"/>
+              </a:solidFill>
+              <a:effectLst/>
+              <a:latin typeface="+mn-lt"/>
+              <a:ea typeface="+mn-ea"/>
+              <a:cs typeface="+mn-cs"/>
+            </a:endParaRPr>
+          </a:p>
+          <a:p>
+            <a:pPr marL="0" marR="0" lvl="0" indent="0" algn="l" defTabSz="914400" rtl="0" eaLnBrk="1" fontAlgn="auto" latinLnBrk="0" hangingPunct="1">
+              <a:lnSpc>
+                <a:spcPct val="100000"/>
+              </a:lnSpc>
+              <a:spcBef>
+                <a:spcPts val="0"/>
+              </a:spcBef>
+              <a:spcAft>
+                <a:spcPts val="0"/>
+              </a:spcAft>
+              <a:buClrTx/>
+              <a:buSzTx/>
+              <a:buFont typeface="Arial" panose="020B0604020202020204" pitchFamily="34" charset="0"/>
+              <a:buNone/>
+              <a:tabLst/>
+              <a:defRPr/>
+            </a:pPr>
+            <a:r>
+              <a:rPr lang="en-US" sz="1200" b="1" i="1" kern="1200">
+                <a:solidFill>
+                  <a:schemeClr val="tx1"/>
+                </a:solidFill>
+                <a:effectLst/>
+                <a:latin typeface="+mn-lt"/>
+                <a:ea typeface="+mn-ea"/>
+                <a:cs typeface="+mn-cs"/>
+              </a:rPr>
+              <a:t>Transition:  </a:t>
+            </a:r>
+            <a:r>
+              <a:rPr lang="en-US" sz="1200" i="1" kern="1200">
+                <a:solidFill>
+                  <a:schemeClr val="tx1"/>
+                </a:solidFill>
+                <a:effectLst/>
+                <a:latin typeface="+mn-lt"/>
+                <a:ea typeface="+mn-ea"/>
+                <a:cs typeface="+mn-cs"/>
+              </a:rPr>
+              <a:t>And with that - thank you.</a:t>
+            </a:r>
+            <a:endParaRPr lang="en-US" sz="1200" kern="1200">
+              <a:solidFill>
+                <a:schemeClr val="tx1"/>
+              </a:solidFill>
+              <a:effectLst/>
+              <a:latin typeface="+mn-lt"/>
+              <a:ea typeface="+mn-ea"/>
+              <a:cs typeface="+mn-cs"/>
+            </a:endParaRPr>
+          </a:p>
+          <a:p>
+            <a:pPr marL="171450" lvl="0" indent="-171450">
+              <a:buFont typeface="Arial" panose="020B0604020202020204" pitchFamily="34" charset="0"/>
+              <a:buChar char="•"/>
+            </a:pPr>
+            <a:endParaRPr lang="en-US" sz="1200" kern="1200" dirty="0">
+              <a:solidFill>
+                <a:schemeClr val="tx1"/>
+              </a:solidFill>
+              <a:effectLst/>
+              <a:latin typeface="+mn-lt"/>
+              <a:ea typeface="+mn-ea"/>
+              <a:cs typeface="+mn-cs"/>
+            </a:endParaRPr>
+          </a:p>
+          <a:p>
+            <a:endParaRPr lang="en-US" dirty="0"/>
+          </a:p>
+        </p:txBody>
+      </p:sp>
+      <p:sp>
+        <p:nvSpPr>
+          <p:cNvPr id="4" name="Slide Number Placeholder 3"/>
+          <p:cNvSpPr>
+            <a:spLocks noGrp="1"/>
+          </p:cNvSpPr>
+          <p:nvPr>
+            <p:ph type="sldNum" sz="quarter" idx="5"/>
+          </p:nvPr>
+        </p:nvSpPr>
+        <p:spPr/>
+        <p:txBody>
+          <a:bodyPr/>
+          <a:lstStyle/>
+          <a:p>
+            <a:fld id="{1173F729-9B69-4F7A-B335-A85BBAD54984}" type="slidenum">
+              <a:rPr lang="en-US" smtClean="0"/>
+              <a:t>18</a:t>
+            </a:fld>
+            <a:endParaRPr lang="en-US"/>
+          </a:p>
+        </p:txBody>
+      </p:sp>
+    </p:spTree>
+    <p:extLst>
+      <p:ext uri="{BB962C8B-B14F-4D97-AF65-F5344CB8AC3E}">
+        <p14:creationId xmlns:p14="http://schemas.microsoft.com/office/powerpoint/2010/main" val="2096319198"/>
+      </p:ext>
+    </p:extLst>
+  </p:cSld>
+  <p:clrMapOvr>
+    <a:masterClrMapping/>
+  </p:clrMapOvr>
+</p:notes>
+</file>
+
+<file path=ppt/notesSlides/notesSlide2.xml><?xml version="1.0" encoding="utf-8"?>
+<p:notes xmlns:a="http://schemas.openxmlformats.org/drawingml/2006/main" xmlns:r="http://schemas.openxmlformats.org/officeDocument/2006/relationships" xmlns:p="http://schemas.openxmlformats.org/presentationml/2006/main">
+  <p:cSld>
+    <p:spTree>
+      <p:nvGrpSpPr>
+        <p:cNvPr id="1" name=""/>
+        <p:cNvGrpSpPr/>
+        <p:nvPr/>
+      </p:nvGrpSpPr>
+      <p:grpSpPr>
+        <a:xfrm>
+          <a:off x="0" y="0"/>
+          <a:ext cx="0" cy="0"/>
+          <a:chOff x="0" y="0"/>
+          <a:chExt cx="0" cy="0"/>
+        </a:xfrm>
+      </p:grpSpPr>
+      <p:sp>
+        <p:nvSpPr>
+          <p:cNvPr id="2" name="Slide Image Placeholder 1"/>
+          <p:cNvSpPr>
+            <a:spLocks noGrp="1" noRot="1" noChangeAspect="1"/>
+          </p:cNvSpPr>
+          <p:nvPr>
+            <p:ph type="sldImg"/>
+          </p:nvPr>
+        </p:nvSpPr>
+        <p:spPr/>
+      </p:sp>
+      <p:sp>
+        <p:nvSpPr>
+          <p:cNvPr id="3" name="Notes Placeholder 2"/>
+          <p:cNvSpPr>
+            <a:spLocks noGrp="1"/>
+          </p:cNvSpPr>
+          <p:nvPr>
+            <p:ph type="body" idx="1"/>
+          </p:nvPr>
+        </p:nvSpPr>
+        <p:spPr/>
+        <p:txBody>
+          <a:bodyPr/>
+          <a:lstStyle/>
+          <a:p>
+            <a:pPr marL="171450" lvl="0" indent="-171450">
+              <a:buFont typeface="Arial" panose="020B0604020202020204" pitchFamily="34" charset="0"/>
+              <a:buChar char="•"/>
+            </a:pPr>
+            <a:r>
+              <a:rPr lang="en-US" sz="1200" kern="1200" dirty="0">
+                <a:solidFill>
+                  <a:schemeClr val="tx1"/>
+                </a:solidFill>
+                <a:effectLst/>
+                <a:latin typeface="+mn-lt"/>
+                <a:ea typeface="+mn-ea"/>
+                <a:cs typeface="+mn-cs"/>
+              </a:rPr>
+              <a:t>Four parts. First, the problem - why this exists. Second, how it actually works under the hood. Third, a live demo. Fourth, the benefits and how it scales to other teams.</a:t>
+            </a:r>
+          </a:p>
+          <a:p>
+            <a:pPr marL="171450" lvl="0" indent="-171450">
+              <a:buFont typeface="Arial" panose="020B0604020202020204" pitchFamily="34" charset="0"/>
+              <a:buChar char="•"/>
+            </a:pPr>
+            <a:r>
+              <a:rPr lang="en-US" sz="1200" kern="1200" dirty="0">
+                <a:solidFill>
+                  <a:schemeClr val="tx1"/>
+                </a:solidFill>
+                <a:effectLst/>
+                <a:latin typeface="+mn-lt"/>
+                <a:ea typeface="+mn-ea"/>
+                <a:cs typeface="+mn-cs"/>
+              </a:rPr>
+              <a:t>Hold your questions if you can until the demo and the scale section - most things will get answered along the way, but I'll leave plenty of time at the end.</a:t>
+            </a:r>
+          </a:p>
+          <a:p>
+            <a:pPr marL="171450" lvl="0" indent="-171450">
+              <a:buFont typeface="Arial" panose="020B0604020202020204" pitchFamily="34" charset="0"/>
+              <a:buChar char="•"/>
+            </a:pPr>
+            <a:endParaRPr lang="en-US" sz="1200" kern="1200" dirty="0">
+              <a:solidFill>
+                <a:schemeClr val="tx1"/>
+              </a:solidFill>
+              <a:effectLst/>
+              <a:latin typeface="+mn-lt"/>
+              <a:ea typeface="+mn-ea"/>
+              <a:cs typeface="+mn-cs"/>
+            </a:endParaRPr>
+          </a:p>
+          <a:p>
+            <a:pPr marL="0" marR="0" lvl="0" indent="0" algn="l" defTabSz="914400" rtl="0" eaLnBrk="1" fontAlgn="auto" latinLnBrk="0" hangingPunct="1">
+              <a:lnSpc>
+                <a:spcPct val="100000"/>
+              </a:lnSpc>
+              <a:spcBef>
+                <a:spcPts val="0"/>
+              </a:spcBef>
+              <a:spcAft>
+                <a:spcPts val="0"/>
+              </a:spcAft>
+              <a:buClrTx/>
+              <a:buSzTx/>
+              <a:buFont typeface="Arial" panose="020B0604020202020204" pitchFamily="34" charset="0"/>
+              <a:buNone/>
+              <a:tabLst/>
+              <a:defRPr/>
+            </a:pPr>
+            <a:r>
+              <a:rPr lang="en-US" sz="1200" b="1" i="1" kern="1200" dirty="0">
+                <a:solidFill>
+                  <a:schemeClr val="tx1"/>
+                </a:solidFill>
+                <a:effectLst/>
+                <a:latin typeface="+mn-lt"/>
+                <a:ea typeface="+mn-ea"/>
+                <a:cs typeface="+mn-cs"/>
+              </a:rPr>
+              <a:t>Transition:  </a:t>
+            </a:r>
+            <a:r>
+              <a:rPr lang="en-US" sz="1200" i="1" kern="1200" dirty="0">
+                <a:solidFill>
+                  <a:schemeClr val="tx1"/>
+                </a:solidFill>
+                <a:effectLst/>
+                <a:latin typeface="+mn-lt"/>
+                <a:ea typeface="+mn-ea"/>
+                <a:cs typeface="+mn-cs"/>
+              </a:rPr>
+              <a:t>Let's start with the problem it solves.</a:t>
+            </a:r>
+            <a:endParaRPr lang="en-US" sz="1200" kern="1200" dirty="0">
+              <a:solidFill>
+                <a:schemeClr val="tx1"/>
+              </a:solidFill>
+              <a:effectLst/>
+              <a:latin typeface="+mn-lt"/>
+              <a:ea typeface="+mn-ea"/>
+              <a:cs typeface="+mn-cs"/>
+            </a:endParaRPr>
+          </a:p>
+          <a:p>
+            <a:pPr marL="171450" lvl="0" indent="-171450">
+              <a:buFont typeface="Arial" panose="020B0604020202020204" pitchFamily="34" charset="0"/>
+              <a:buChar char="•"/>
+            </a:pPr>
+            <a:endParaRPr lang="en-US" sz="1200" kern="1200" dirty="0">
+              <a:solidFill>
+                <a:schemeClr val="tx1"/>
+              </a:solidFill>
+              <a:effectLst/>
+              <a:latin typeface="+mn-lt"/>
+              <a:ea typeface="+mn-ea"/>
+              <a:cs typeface="+mn-cs"/>
+            </a:endParaRPr>
+          </a:p>
+          <a:p>
+            <a:endParaRPr lang="en-US" dirty="0"/>
+          </a:p>
+        </p:txBody>
+      </p:sp>
+      <p:sp>
+        <p:nvSpPr>
+          <p:cNvPr id="4" name="Slide Number Placeholder 3"/>
+          <p:cNvSpPr>
+            <a:spLocks noGrp="1"/>
+          </p:cNvSpPr>
+          <p:nvPr>
+            <p:ph type="sldNum" sz="quarter" idx="5"/>
+          </p:nvPr>
+        </p:nvSpPr>
+        <p:spPr/>
+        <p:txBody>
+          <a:bodyPr/>
+          <a:lstStyle/>
+          <a:p>
+            <a:fld id="{1173F729-9B69-4F7A-B335-A85BBAD54984}" type="slidenum">
+              <a:rPr lang="en-US" smtClean="0"/>
+              <a:t>2</a:t>
+            </a:fld>
+            <a:endParaRPr lang="en-US"/>
+          </a:p>
+        </p:txBody>
+      </p:sp>
+    </p:spTree>
+    <p:extLst>
+      <p:ext uri="{BB962C8B-B14F-4D97-AF65-F5344CB8AC3E}">
+        <p14:creationId xmlns:p14="http://schemas.microsoft.com/office/powerpoint/2010/main" val="2762968260"/>
+      </p:ext>
+    </p:extLst>
+  </p:cSld>
+  <p:clrMapOvr>
+    <a:masterClrMapping/>
+  </p:clrMapOvr>
+</p:notes>
+</file>
+
+<file path=ppt/notesSlides/notesSlide3.xml><?xml version="1.0" encoding="utf-8"?>
+<p:notes xmlns:a="http://schemas.openxmlformats.org/drawingml/2006/main" xmlns:r="http://schemas.openxmlformats.org/officeDocument/2006/relationships" xmlns:p="http://schemas.openxmlformats.org/presentationml/2006/main">
+  <p:cSld>
+    <p:spTree>
+      <p:nvGrpSpPr>
+        <p:cNvPr id="1" name=""/>
+        <p:cNvGrpSpPr/>
+        <p:nvPr/>
+      </p:nvGrpSpPr>
+      <p:grpSpPr>
+        <a:xfrm>
+          <a:off x="0" y="0"/>
+          <a:ext cx="0" cy="0"/>
+          <a:chOff x="0" y="0"/>
+          <a:chExt cx="0" cy="0"/>
+        </a:xfrm>
+      </p:grpSpPr>
+      <p:sp>
+        <p:nvSpPr>
+          <p:cNvPr id="2" name="Slide Image Placeholder 1"/>
+          <p:cNvSpPr>
+            <a:spLocks noGrp="1" noRot="1" noChangeAspect="1"/>
+          </p:cNvSpPr>
+          <p:nvPr>
+            <p:ph type="sldImg"/>
+          </p:nvPr>
+        </p:nvSpPr>
+        <p:spPr/>
+      </p:sp>
+      <p:sp>
+        <p:nvSpPr>
+          <p:cNvPr id="3" name="Notes Placeholder 2"/>
+          <p:cNvSpPr>
+            <a:spLocks noGrp="1"/>
+          </p:cNvSpPr>
+          <p:nvPr>
+            <p:ph type="body" idx="1"/>
+          </p:nvPr>
+        </p:nvSpPr>
+        <p:spPr/>
+        <p:txBody>
+          <a:bodyPr/>
+          <a:lstStyle/>
+          <a:p>
+            <a:pPr marL="171450" lvl="0" indent="-171450">
+              <a:buFont typeface="Arial" panose="020B0604020202020204" pitchFamily="34" charset="0"/>
+              <a:buChar char="•"/>
+            </a:pPr>
+            <a:r>
+              <a:rPr lang="en-US" sz="1200" kern="1200" dirty="0">
+                <a:solidFill>
+                  <a:schemeClr val="tx1"/>
+                </a:solidFill>
+                <a:effectLst/>
+                <a:latin typeface="+mn-lt"/>
+                <a:ea typeface="+mn-ea"/>
+                <a:cs typeface="+mn-cs"/>
+              </a:rPr>
+              <a:t>Every week our group meets and talks about ways the business could use AI. Great conversations - but the ideas were getting lost.</a:t>
+            </a:r>
+          </a:p>
+          <a:p>
+            <a:pPr marL="171450" lvl="0" indent="-171450">
+              <a:buFont typeface="Arial" panose="020B0604020202020204" pitchFamily="34" charset="0"/>
+              <a:buChar char="•"/>
+            </a:pPr>
+            <a:r>
+              <a:rPr lang="en-US" sz="1200" kern="1200" dirty="0">
+                <a:solidFill>
+                  <a:schemeClr val="tx1"/>
+                </a:solidFill>
+                <a:effectLst/>
+                <a:latin typeface="+mn-lt"/>
+                <a:ea typeface="+mn-ea"/>
+                <a:cs typeface="+mn-cs"/>
+              </a:rPr>
+              <a:t>Three problems. ONE - it was manual and slow. Someone had to read the entire transcript, pull out the real opportunities by hand, and fill in about 40 fields per idea in a spreadsheet. That was roughly seven hours of work, every single week.</a:t>
+            </a:r>
+          </a:p>
+          <a:p>
+            <a:pPr marL="171450" lvl="0" indent="-171450">
+              <a:buFont typeface="Arial" panose="020B0604020202020204" pitchFamily="34" charset="0"/>
+              <a:buChar char="•"/>
+            </a:pPr>
+            <a:r>
+              <a:rPr lang="en-US" sz="1200" kern="1200" dirty="0">
+                <a:solidFill>
+                  <a:schemeClr val="tx1"/>
+                </a:solidFill>
+                <a:effectLst/>
+                <a:latin typeface="+mn-lt"/>
+                <a:ea typeface="+mn-ea"/>
+                <a:cs typeface="+mn-cs"/>
+              </a:rPr>
+              <a:t>TWO - it was inconsistent. Different people captured different things, used different language, and there was no shared way to classify or compare ideas week over week.</a:t>
+            </a:r>
+          </a:p>
+          <a:p>
+            <a:pPr marL="171450" lvl="0" indent="-171450">
+              <a:buFont typeface="Arial" panose="020B0604020202020204" pitchFamily="34" charset="0"/>
+              <a:buChar char="•"/>
+            </a:pPr>
+            <a:r>
+              <a:rPr lang="en-US" sz="1200" kern="1200" dirty="0">
+                <a:solidFill>
+                  <a:schemeClr val="tx1"/>
+                </a:solidFill>
+                <a:effectLst/>
+                <a:latin typeface="+mn-lt"/>
+                <a:ea typeface="+mn-ea"/>
+                <a:cs typeface="+mn-cs"/>
+              </a:rPr>
+              <a:t>THREE - and this is the big one - there was no follow-through. We'd capture an idea, and then it would just... sit there. Nobody knew if anyone had picked it up. 'Whatever happened to that invoice-automation idea from three weeks ago?' - blank stares.</a:t>
+            </a:r>
+          </a:p>
+          <a:p>
+            <a:pPr marL="171450" lvl="0" indent="-171450">
+              <a:buFont typeface="Arial" panose="020B0604020202020204" pitchFamily="34" charset="0"/>
+              <a:buChar char="•"/>
+            </a:pPr>
+            <a:r>
+              <a:rPr lang="en-US" sz="1200" kern="1200" dirty="0">
+                <a:solidFill>
+                  <a:schemeClr val="tx1"/>
+                </a:solidFill>
+                <a:effectLst/>
+                <a:latin typeface="+mn-lt"/>
+                <a:ea typeface="+mn-ea"/>
+                <a:cs typeface="+mn-cs"/>
+              </a:rPr>
+              <a:t>The core insight that drove the whole design is at the bottom: a transcript is the BEGINNING of the work, not the end of it. Capturing the idea is step one, not the finish line.</a:t>
+            </a:r>
+          </a:p>
+          <a:p>
+            <a:endParaRPr lang="en-US" dirty="0"/>
+          </a:p>
+          <a:p>
+            <a:pPr marL="0" marR="0" lvl="0" indent="0" algn="l" defTabSz="914400" rtl="0" eaLnBrk="1" fontAlgn="auto" latinLnBrk="0" hangingPunct="1">
+              <a:lnSpc>
+                <a:spcPct val="100000"/>
+              </a:lnSpc>
+              <a:spcBef>
+                <a:spcPts val="0"/>
+              </a:spcBef>
+              <a:spcAft>
+                <a:spcPts val="0"/>
+              </a:spcAft>
+              <a:buClrTx/>
+              <a:buSzTx/>
+              <a:buFontTx/>
+              <a:buNone/>
+              <a:tabLst/>
+              <a:defRPr/>
+            </a:pPr>
+            <a:r>
+              <a:rPr lang="en-US" sz="1200" b="1" i="1" kern="1200" dirty="0">
+                <a:solidFill>
+                  <a:schemeClr val="tx1"/>
+                </a:solidFill>
+                <a:effectLst/>
+                <a:latin typeface="+mn-lt"/>
+                <a:ea typeface="+mn-ea"/>
+                <a:cs typeface="+mn-cs"/>
+              </a:rPr>
+              <a:t>Transition:  </a:t>
+            </a:r>
+            <a:r>
+              <a:rPr lang="en-US" sz="1200" i="1" kern="1200" dirty="0">
+                <a:solidFill>
+                  <a:schemeClr val="tx1"/>
+                </a:solidFill>
+                <a:effectLst/>
+                <a:latin typeface="+mn-lt"/>
+                <a:ea typeface="+mn-ea"/>
+                <a:cs typeface="+mn-cs"/>
+              </a:rPr>
+              <a:t>So here's what I built to fix that.</a:t>
+            </a:r>
+            <a:endParaRPr lang="en-US" sz="1200" kern="1200" dirty="0">
+              <a:solidFill>
+                <a:schemeClr val="tx1"/>
+              </a:solidFill>
+              <a:effectLst/>
+              <a:latin typeface="+mn-lt"/>
+              <a:ea typeface="+mn-ea"/>
+              <a:cs typeface="+mn-cs"/>
+            </a:endParaRPr>
+          </a:p>
+          <a:p>
+            <a:endParaRPr lang="en-US" dirty="0"/>
+          </a:p>
+        </p:txBody>
+      </p:sp>
+      <p:sp>
+        <p:nvSpPr>
+          <p:cNvPr id="4" name="Slide Number Placeholder 3"/>
+          <p:cNvSpPr>
+            <a:spLocks noGrp="1"/>
+          </p:cNvSpPr>
+          <p:nvPr>
+            <p:ph type="sldNum" sz="quarter" idx="5"/>
+          </p:nvPr>
+        </p:nvSpPr>
+        <p:spPr/>
+        <p:txBody>
+          <a:bodyPr/>
+          <a:lstStyle/>
+          <a:p>
+            <a:fld id="{1173F729-9B69-4F7A-B335-A85BBAD54984}" type="slidenum">
+              <a:rPr lang="en-US" smtClean="0"/>
+              <a:t>4</a:t>
+            </a:fld>
+            <a:endParaRPr lang="en-US"/>
+          </a:p>
+        </p:txBody>
+      </p:sp>
+    </p:spTree>
+    <p:extLst>
+      <p:ext uri="{BB962C8B-B14F-4D97-AF65-F5344CB8AC3E}">
+        <p14:creationId xmlns:p14="http://schemas.microsoft.com/office/powerpoint/2010/main" val="3199297998"/>
+      </p:ext>
+    </p:extLst>
+  </p:cSld>
+  <p:clrMapOvr>
+    <a:masterClrMapping/>
+  </p:clrMapOvr>
+</p:notes>
+</file>
+
+<file path=ppt/notesSlides/notesSlide4.xml><?xml version="1.0" encoding="utf-8"?>
+<p:notes xmlns:a="http://schemas.openxmlformats.org/drawingml/2006/main" xmlns:r="http://schemas.openxmlformats.org/officeDocument/2006/relationships" xmlns:p="http://schemas.openxmlformats.org/presentationml/2006/main">
+  <p:cSld>
+    <p:spTree>
+      <p:nvGrpSpPr>
+        <p:cNvPr id="1" name=""/>
+        <p:cNvGrpSpPr/>
+        <p:nvPr/>
+      </p:nvGrpSpPr>
+      <p:grpSpPr>
+        <a:xfrm>
+          <a:off x="0" y="0"/>
+          <a:ext cx="0" cy="0"/>
+          <a:chOff x="0" y="0"/>
+          <a:chExt cx="0" cy="0"/>
+        </a:xfrm>
+      </p:grpSpPr>
+      <p:sp>
+        <p:nvSpPr>
+          <p:cNvPr id="2" name="Slide Image Placeholder 1"/>
+          <p:cNvSpPr>
+            <a:spLocks noGrp="1" noRot="1" noChangeAspect="1"/>
+          </p:cNvSpPr>
+          <p:nvPr>
+            <p:ph type="sldImg"/>
+          </p:nvPr>
+        </p:nvSpPr>
+        <p:spPr/>
+      </p:sp>
+      <p:sp>
+        <p:nvSpPr>
+          <p:cNvPr id="3" name="Notes Placeholder 2"/>
+          <p:cNvSpPr>
+            <a:spLocks noGrp="1"/>
+          </p:cNvSpPr>
+          <p:nvPr>
+            <p:ph type="body" idx="1"/>
+          </p:nvPr>
+        </p:nvSpPr>
+        <p:spPr/>
+        <p:txBody>
+          <a:bodyPr/>
+          <a:lstStyle/>
+          <a:p>
+            <a:pPr marL="171450" lvl="0" indent="-171450">
+              <a:buFont typeface="Arial" panose="020B0604020202020204" pitchFamily="34" charset="0"/>
+              <a:buChar char="•"/>
+            </a:pPr>
+            <a:r>
+              <a:rPr lang="en-US" sz="1200" kern="1200" dirty="0">
+                <a:solidFill>
+                  <a:schemeClr val="tx1"/>
+                </a:solidFill>
+                <a:effectLst/>
+                <a:latin typeface="+mn-lt"/>
+                <a:ea typeface="+mn-ea"/>
+                <a:cs typeface="+mn-cs"/>
+              </a:rPr>
+              <a:t>The solution is a local agent. You drop in a meeting transcript, and you get back reviewable AI-opportunity records, trend reports, and tracked work items - with a human in the loop at every step.</a:t>
+            </a:r>
+          </a:p>
+          <a:p>
+            <a:pPr marL="171450" lvl="0" indent="-171450">
+              <a:buFont typeface="Arial" panose="020B0604020202020204" pitchFamily="34" charset="0"/>
+              <a:buChar char="•"/>
+            </a:pPr>
+            <a:r>
+              <a:rPr lang="en-US" sz="1200" kern="1200" dirty="0">
+                <a:solidFill>
+                  <a:schemeClr val="tx1"/>
+                </a:solidFill>
+                <a:effectLst/>
+                <a:latin typeface="+mn-lt"/>
+                <a:ea typeface="+mn-ea"/>
+                <a:cs typeface="+mn-cs"/>
+              </a:rPr>
+              <a:t>Across the top is the flow: Read the transcript, Extract the opportunities, Classify them against our framework, Report on them weekly and monthly, and Track them in Azure DevOps.</a:t>
+            </a:r>
+          </a:p>
+          <a:p>
+            <a:pPr marL="171450" lvl="0" indent="-171450">
+              <a:buFont typeface="Arial" panose="020B0604020202020204" pitchFamily="34" charset="0"/>
+              <a:buChar char="•"/>
+            </a:pPr>
+            <a:r>
+              <a:rPr lang="en-US" sz="1200" kern="1200" dirty="0">
+                <a:solidFill>
+                  <a:schemeClr val="tx1"/>
+                </a:solidFill>
+                <a:effectLst/>
+                <a:latin typeface="+mn-lt"/>
+                <a:ea typeface="+mn-ea"/>
+                <a:cs typeface="+mn-cs"/>
+              </a:rPr>
+              <a:t>Two things make it trustworthy - left card. Full transcripts are NEVER sent to the AI model; only keyword-filtered chunks. And every AI output is draft-only - it defaults to 'Needs Review.' A human approves before anything goes anywhere official.</a:t>
+            </a:r>
+          </a:p>
+          <a:p>
+            <a:pPr marL="171450" lvl="0" indent="-171450">
+              <a:buFont typeface="Arial" panose="020B0604020202020204" pitchFamily="34" charset="0"/>
+              <a:buChar char="•"/>
+            </a:pPr>
+            <a:r>
+              <a:rPr lang="en-US" sz="1200" kern="1200" dirty="0">
+                <a:solidFill>
+                  <a:schemeClr val="tx1"/>
+                </a:solidFill>
+                <a:effectLst/>
+                <a:latin typeface="+mn-lt"/>
+                <a:ea typeface="+mn-ea"/>
+                <a:cs typeface="+mn-cs"/>
+              </a:rPr>
+              <a:t>Two things make it efficient - right card. Deterministic Python does all the heavy lifting, which is free and reproducible. The AI is used only for the two steps where judgement is actually needed. And it runs on our existing GitHub Copilot subscription - no new API key, no new spend.</a:t>
+            </a:r>
+          </a:p>
+          <a:p>
+            <a:endParaRPr lang="en-US" sz="1200" kern="1200" dirty="0">
+              <a:solidFill>
+                <a:schemeClr val="tx1"/>
+              </a:solidFill>
+              <a:effectLst/>
+              <a:latin typeface="+mn-lt"/>
+              <a:ea typeface="+mn-ea"/>
+              <a:cs typeface="+mn-cs"/>
+            </a:endParaRPr>
+          </a:p>
+          <a:p>
+            <a:pPr marL="0" marR="0" lvl="0" indent="0" algn="l" defTabSz="914400" rtl="0" eaLnBrk="1" fontAlgn="auto" latinLnBrk="0" hangingPunct="1">
+              <a:lnSpc>
+                <a:spcPct val="100000"/>
+              </a:lnSpc>
+              <a:spcBef>
+                <a:spcPts val="0"/>
+              </a:spcBef>
+              <a:spcAft>
+                <a:spcPts val="0"/>
+              </a:spcAft>
+              <a:buClrTx/>
+              <a:buSzTx/>
+              <a:buFontTx/>
+              <a:buNone/>
+              <a:tabLst/>
+              <a:defRPr/>
+            </a:pPr>
+            <a:r>
+              <a:rPr lang="en-US" sz="1200" b="1" i="1" kern="1200" dirty="0">
+                <a:solidFill>
+                  <a:schemeClr val="tx1"/>
+                </a:solidFill>
+                <a:effectLst/>
+                <a:latin typeface="+mn-lt"/>
+                <a:ea typeface="+mn-ea"/>
+                <a:cs typeface="+mn-cs"/>
+              </a:rPr>
+              <a:t>Transition:  </a:t>
+            </a:r>
+            <a:r>
+              <a:rPr lang="en-US" sz="1200" i="1" kern="1200" dirty="0">
+                <a:solidFill>
+                  <a:schemeClr val="tx1"/>
+                </a:solidFill>
+                <a:effectLst/>
+                <a:latin typeface="+mn-lt"/>
+                <a:ea typeface="+mn-ea"/>
+                <a:cs typeface="+mn-cs"/>
+              </a:rPr>
+              <a:t>Let me open the hood and show you how it actually works.</a:t>
+            </a:r>
+            <a:endParaRPr lang="en-US" sz="1200" kern="1200" dirty="0">
+              <a:solidFill>
+                <a:schemeClr val="tx1"/>
+              </a:solidFill>
+              <a:effectLst/>
+              <a:latin typeface="+mn-lt"/>
+              <a:ea typeface="+mn-ea"/>
+              <a:cs typeface="+mn-cs"/>
+            </a:endParaRPr>
+          </a:p>
+          <a:p>
+            <a:endParaRPr lang="en-US" dirty="0"/>
+          </a:p>
+        </p:txBody>
+      </p:sp>
+      <p:sp>
+        <p:nvSpPr>
+          <p:cNvPr id="4" name="Slide Number Placeholder 3"/>
+          <p:cNvSpPr>
+            <a:spLocks noGrp="1"/>
+          </p:cNvSpPr>
+          <p:nvPr>
+            <p:ph type="sldNum" sz="quarter" idx="5"/>
+          </p:nvPr>
+        </p:nvSpPr>
+        <p:spPr/>
+        <p:txBody>
+          <a:bodyPr/>
+          <a:lstStyle/>
+          <a:p>
+            <a:fld id="{1173F729-9B69-4F7A-B335-A85BBAD54984}" type="slidenum">
+              <a:rPr lang="en-US" smtClean="0"/>
+              <a:t>5</a:t>
+            </a:fld>
+            <a:endParaRPr lang="en-US"/>
+          </a:p>
+        </p:txBody>
+      </p:sp>
+    </p:spTree>
+    <p:extLst>
+      <p:ext uri="{BB962C8B-B14F-4D97-AF65-F5344CB8AC3E}">
+        <p14:creationId xmlns:p14="http://schemas.microsoft.com/office/powerpoint/2010/main" val="2301884128"/>
+      </p:ext>
+    </p:extLst>
+  </p:cSld>
+  <p:clrMapOvr>
+    <a:masterClrMapping/>
+  </p:clrMapOvr>
+</p:notes>
+</file>
+
+<file path=ppt/notesSlides/notesSlide5.xml><?xml version="1.0" encoding="utf-8"?>
+<p:notes xmlns:a="http://schemas.openxmlformats.org/drawingml/2006/main" xmlns:r="http://schemas.openxmlformats.org/officeDocument/2006/relationships" xmlns:p="http://schemas.openxmlformats.org/presentationml/2006/main">
+  <p:cSld>
+    <p:spTree>
+      <p:nvGrpSpPr>
+        <p:cNvPr id="1" name=""/>
+        <p:cNvGrpSpPr/>
+        <p:nvPr/>
+      </p:nvGrpSpPr>
+      <p:grpSpPr>
+        <a:xfrm>
+          <a:off x="0" y="0"/>
+          <a:ext cx="0" cy="0"/>
+          <a:chOff x="0" y="0"/>
+          <a:chExt cx="0" cy="0"/>
+        </a:xfrm>
+      </p:grpSpPr>
+      <p:sp>
+        <p:nvSpPr>
+          <p:cNvPr id="2" name="Slide Image Placeholder 1"/>
+          <p:cNvSpPr>
+            <a:spLocks noGrp="1" noRot="1" noChangeAspect="1"/>
+          </p:cNvSpPr>
+          <p:nvPr>
+            <p:ph type="sldImg"/>
+          </p:nvPr>
+        </p:nvSpPr>
+        <p:spPr/>
+      </p:sp>
+      <p:sp>
+        <p:nvSpPr>
+          <p:cNvPr id="3" name="Notes Placeholder 2"/>
+          <p:cNvSpPr>
+            <a:spLocks noGrp="1"/>
+          </p:cNvSpPr>
+          <p:nvPr>
+            <p:ph type="body" idx="1"/>
+          </p:nvPr>
+        </p:nvSpPr>
+        <p:spPr/>
+        <p:txBody>
+          <a:bodyPr/>
+          <a:lstStyle/>
+          <a:p>
+            <a:pPr marL="171450" lvl="0" indent="-171450">
+              <a:buFont typeface="Arial" panose="020B0604020202020204" pitchFamily="34" charset="0"/>
+              <a:buChar char="•"/>
+            </a:pPr>
+            <a:r>
+              <a:rPr lang="en-US" sz="1200" kern="1200" dirty="0">
+                <a:solidFill>
+                  <a:schemeClr val="tx1"/>
+                </a:solidFill>
+                <a:effectLst/>
+                <a:latin typeface="+mn-lt"/>
+                <a:ea typeface="+mn-ea"/>
+                <a:cs typeface="+mn-cs"/>
+              </a:rPr>
+              <a:t>This is the whole pipeline, top to bottom. The key thing to notice is the 'Type' column on the right - most steps are plain Python, and only two are AI.</a:t>
+            </a:r>
+          </a:p>
+          <a:p>
+            <a:pPr marL="171450" lvl="0" indent="-171450">
+              <a:buFont typeface="Arial" panose="020B0604020202020204" pitchFamily="34" charset="0"/>
+              <a:buChar char="•"/>
+            </a:pPr>
+            <a:r>
+              <a:rPr lang="en-US" sz="1200" kern="1200" dirty="0">
+                <a:solidFill>
+                  <a:schemeClr val="tx1"/>
+                </a:solidFill>
+                <a:effectLst/>
+                <a:latin typeface="+mn-lt"/>
+                <a:ea typeface="+mn-ea"/>
+                <a:cs typeface="+mn-cs"/>
+              </a:rPr>
+              <a:t>Step 0 - before anything else, it syncs live status from Azure DevOps so the reports always reflect reality. I'll come back to that.</a:t>
+            </a:r>
+          </a:p>
+          <a:p>
+            <a:pPr marL="171450" lvl="0" indent="-171450">
+              <a:buFont typeface="Arial" panose="020B0604020202020204" pitchFamily="34" charset="0"/>
+              <a:buChar char="•"/>
+            </a:pPr>
+            <a:r>
+              <a:rPr lang="en-US" sz="1200" kern="1200" dirty="0">
+                <a:solidFill>
+                  <a:schemeClr val="tx1"/>
+                </a:solidFill>
+                <a:effectLst/>
+                <a:latin typeface="+mn-lt"/>
+                <a:ea typeface="+mn-ea"/>
+                <a:cs typeface="+mn-cs"/>
+              </a:rPr>
+              <a:t>Steps 1 to 3 - read the Word doc, clean it, split it into speaker turns, and keyword-filter down to just the relevant chunks. All deterministic.</a:t>
+            </a:r>
+          </a:p>
+          <a:p>
+            <a:pPr marL="171450" lvl="0" indent="-171450">
+              <a:buFont typeface="Arial" panose="020B0604020202020204" pitchFamily="34" charset="0"/>
+              <a:buChar char="•"/>
+            </a:pPr>
+            <a:r>
+              <a:rPr lang="en-US" sz="1200" kern="1200" dirty="0">
+                <a:solidFill>
+                  <a:schemeClr val="tx1"/>
+                </a:solidFill>
+                <a:effectLst/>
+                <a:latin typeface="+mn-lt"/>
+                <a:ea typeface="+mn-ea"/>
+                <a:cs typeface="+mn-cs"/>
+              </a:rPr>
+              <a:t>Steps 4 and 5 - the gold rows - are the AI. Four extracts the actual opportunities from the filtered chunks. Five classifies each one against our 40-field framework.</a:t>
+            </a:r>
+          </a:p>
+          <a:p>
+            <a:pPr marL="171450" lvl="0" indent="-171450">
+              <a:buFont typeface="Arial" panose="020B0604020202020204" pitchFamily="34" charset="0"/>
+              <a:buChar char="•"/>
+            </a:pPr>
+            <a:r>
+              <a:rPr lang="en-US" sz="1200" kern="1200" dirty="0">
+                <a:solidFill>
+                  <a:schemeClr val="tx1"/>
+                </a:solidFill>
+                <a:effectLst/>
+                <a:latin typeface="+mn-lt"/>
+                <a:ea typeface="+mn-ea"/>
+                <a:cs typeface="+mn-cs"/>
+              </a:rPr>
+              <a:t>Step 5b validates everything against allowed values. Steps 6 through 11 export the workbook, the payload, the HTML reports, archive the week, and update history.</a:t>
+            </a:r>
+          </a:p>
+          <a:p>
+            <a:pPr marL="171450" lvl="0" indent="-171450">
+              <a:buFont typeface="Arial" panose="020B0604020202020204" pitchFamily="34" charset="0"/>
+              <a:buChar char="•"/>
+            </a:pPr>
+            <a:r>
+              <a:rPr lang="en-US" sz="1200" kern="1200" dirty="0">
+                <a:solidFill>
+                  <a:schemeClr val="tx1"/>
+                </a:solidFill>
+                <a:effectLst/>
+                <a:latin typeface="+mn-lt"/>
+                <a:ea typeface="+mn-ea"/>
+                <a:cs typeface="+mn-cs"/>
+              </a:rPr>
+              <a:t>And Step 9c - opt-in - pushes approved opportunities into Azure DevOps as tracked work items. That only runs when I explicitly ask for it.</a:t>
+            </a:r>
+          </a:p>
+          <a:p>
+            <a:pPr marL="171450" lvl="0" indent="-171450">
+              <a:buFont typeface="Arial" panose="020B0604020202020204" pitchFamily="34" charset="0"/>
+              <a:buChar char="•"/>
+            </a:pPr>
+            <a:r>
+              <a:rPr lang="en-US" sz="1200" kern="1200" dirty="0">
+                <a:solidFill>
+                  <a:schemeClr val="tx1"/>
+                </a:solidFill>
+                <a:effectLst/>
+                <a:latin typeface="+mn-lt"/>
+                <a:ea typeface="+mn-ea"/>
+                <a:cs typeface="+mn-cs"/>
+              </a:rPr>
+              <a:t>The takeaway: the AI footprint is small and controlled. Everything around it is testable, reproducible code.</a:t>
+            </a:r>
+          </a:p>
+          <a:p>
+            <a:pPr marL="171450" lvl="0" indent="-171450">
+              <a:buFont typeface="Arial" panose="020B0604020202020204" pitchFamily="34" charset="0"/>
+              <a:buChar char="•"/>
+            </a:pPr>
+            <a:endParaRPr lang="en-US" sz="1200" kern="1200" dirty="0">
+              <a:solidFill>
+                <a:schemeClr val="tx1"/>
+              </a:solidFill>
+              <a:effectLst/>
+              <a:latin typeface="+mn-lt"/>
+              <a:ea typeface="+mn-ea"/>
+              <a:cs typeface="+mn-cs"/>
+            </a:endParaRPr>
+          </a:p>
+          <a:p>
+            <a:pPr marL="0" marR="0" lvl="0" indent="0" algn="l" defTabSz="914400" rtl="0" eaLnBrk="1" fontAlgn="auto" latinLnBrk="0" hangingPunct="1">
+              <a:lnSpc>
+                <a:spcPct val="100000"/>
+              </a:lnSpc>
+              <a:spcBef>
+                <a:spcPts val="0"/>
+              </a:spcBef>
+              <a:spcAft>
+                <a:spcPts val="0"/>
+              </a:spcAft>
+              <a:buClrTx/>
+              <a:buSzTx/>
+              <a:buFont typeface="Arial" panose="020B0604020202020204" pitchFamily="34" charset="0"/>
+              <a:buNone/>
+              <a:tabLst/>
+              <a:defRPr/>
+            </a:pPr>
+            <a:r>
+              <a:rPr lang="en-US" sz="1200" b="1" i="1" kern="1200" dirty="0">
+                <a:solidFill>
+                  <a:schemeClr val="tx1"/>
+                </a:solidFill>
+                <a:effectLst/>
+                <a:latin typeface="+mn-lt"/>
+                <a:ea typeface="+mn-ea"/>
+                <a:cs typeface="+mn-cs"/>
+              </a:rPr>
+              <a:t>Transition:  </a:t>
+            </a:r>
+            <a:r>
+              <a:rPr lang="en-US" sz="1200" i="1" kern="1200" dirty="0">
+                <a:solidFill>
+                  <a:schemeClr val="tx1"/>
+                </a:solidFill>
+                <a:effectLst/>
+                <a:latin typeface="+mn-lt"/>
+                <a:ea typeface="+mn-ea"/>
+                <a:cs typeface="+mn-cs"/>
+              </a:rPr>
+              <a:t>Let me make that AI-versus-code split crystal clear.</a:t>
+            </a:r>
+            <a:endParaRPr lang="en-US" sz="1200" kern="1200" dirty="0">
+              <a:solidFill>
+                <a:schemeClr val="tx1"/>
+              </a:solidFill>
+              <a:effectLst/>
+              <a:latin typeface="+mn-lt"/>
+              <a:ea typeface="+mn-ea"/>
+              <a:cs typeface="+mn-cs"/>
+            </a:endParaRPr>
+          </a:p>
+          <a:p>
+            <a:pPr marL="171450" lvl="0" indent="-171450">
+              <a:buFont typeface="Arial" panose="020B0604020202020204" pitchFamily="34" charset="0"/>
+              <a:buChar char="•"/>
+            </a:pPr>
+            <a:endParaRPr lang="en-US" sz="1200" kern="1200" dirty="0">
+              <a:solidFill>
+                <a:schemeClr val="tx1"/>
+              </a:solidFill>
+              <a:effectLst/>
+              <a:latin typeface="+mn-lt"/>
+              <a:ea typeface="+mn-ea"/>
+              <a:cs typeface="+mn-cs"/>
+            </a:endParaRPr>
+          </a:p>
+          <a:p>
+            <a:endParaRPr lang="en-US" dirty="0"/>
+          </a:p>
+        </p:txBody>
+      </p:sp>
+      <p:sp>
+        <p:nvSpPr>
+          <p:cNvPr id="4" name="Slide Number Placeholder 3"/>
+          <p:cNvSpPr>
+            <a:spLocks noGrp="1"/>
+          </p:cNvSpPr>
+          <p:nvPr>
+            <p:ph type="sldNum" sz="quarter" idx="5"/>
+          </p:nvPr>
+        </p:nvSpPr>
+        <p:spPr/>
+        <p:txBody>
+          <a:bodyPr/>
+          <a:lstStyle/>
+          <a:p>
+            <a:fld id="{1173F729-9B69-4F7A-B335-A85BBAD54984}" type="slidenum">
+              <a:rPr lang="en-US" smtClean="0"/>
+              <a:t>7</a:t>
+            </a:fld>
+            <a:endParaRPr lang="en-US"/>
+          </a:p>
+        </p:txBody>
+      </p:sp>
+    </p:spTree>
+    <p:extLst>
+      <p:ext uri="{BB962C8B-B14F-4D97-AF65-F5344CB8AC3E}">
+        <p14:creationId xmlns:p14="http://schemas.microsoft.com/office/powerpoint/2010/main" val="1037809910"/>
+      </p:ext>
+    </p:extLst>
+  </p:cSld>
+  <p:clrMapOvr>
+    <a:masterClrMapping/>
+  </p:clrMapOvr>
+</p:notes>
+</file>
+
+<file path=ppt/notesSlides/notesSlide6.xml><?xml version="1.0" encoding="utf-8"?>
+<p:notes xmlns:a="http://schemas.openxmlformats.org/drawingml/2006/main" xmlns:r="http://schemas.openxmlformats.org/officeDocument/2006/relationships" xmlns:p="http://schemas.openxmlformats.org/presentationml/2006/main">
+  <p:cSld>
+    <p:spTree>
+      <p:nvGrpSpPr>
+        <p:cNvPr id="1" name=""/>
+        <p:cNvGrpSpPr/>
+        <p:nvPr/>
+      </p:nvGrpSpPr>
+      <p:grpSpPr>
+        <a:xfrm>
+          <a:off x="0" y="0"/>
+          <a:ext cx="0" cy="0"/>
+          <a:chOff x="0" y="0"/>
+          <a:chExt cx="0" cy="0"/>
+        </a:xfrm>
+      </p:grpSpPr>
+      <p:sp>
+        <p:nvSpPr>
+          <p:cNvPr id="2" name="Slide Image Placeholder 1"/>
+          <p:cNvSpPr>
+            <a:spLocks noGrp="1" noRot="1" noChangeAspect="1"/>
+          </p:cNvSpPr>
+          <p:nvPr>
+            <p:ph type="sldImg"/>
+          </p:nvPr>
+        </p:nvSpPr>
+        <p:spPr/>
+      </p:sp>
+      <p:sp>
+        <p:nvSpPr>
+          <p:cNvPr id="3" name="Notes Placeholder 2"/>
+          <p:cNvSpPr>
+            <a:spLocks noGrp="1"/>
+          </p:cNvSpPr>
+          <p:nvPr>
+            <p:ph type="body" idx="1"/>
+          </p:nvPr>
+        </p:nvSpPr>
+        <p:spPr/>
+        <p:txBody>
+          <a:bodyPr/>
+          <a:lstStyle/>
+          <a:p>
+            <a:pPr marL="171450" lvl="0" indent="-171450">
+              <a:buFont typeface="Arial" panose="020B0604020202020204" pitchFamily="34" charset="0"/>
+              <a:buChar char="•"/>
+            </a:pPr>
+            <a:r>
+              <a:rPr lang="en-US" sz="1200" kern="1200" dirty="0">
+                <a:solidFill>
+                  <a:schemeClr val="tx1"/>
+                </a:solidFill>
+                <a:effectLst/>
+                <a:latin typeface="+mn-lt"/>
+                <a:ea typeface="+mn-ea"/>
+                <a:cs typeface="+mn-cs"/>
+              </a:rPr>
+              <a:t>Left side - what the AI does. Just two things. It reads the filtered chunks and asks 'is this a real AI opportunity?' Then for each one it fills in the framework fields. Small, cheap prompts - one call per chunk or per candidate. Why AI here? Because this needs judgement and language understanding that rules simply can't capture.</a:t>
+            </a:r>
+          </a:p>
+          <a:p>
+            <a:pPr marL="171450" lvl="0" indent="-171450">
+              <a:buFont typeface="Arial" panose="020B0604020202020204" pitchFamily="34" charset="0"/>
+              <a:buChar char="•"/>
+            </a:pPr>
+            <a:r>
+              <a:rPr lang="en-US" sz="1200" kern="1200" dirty="0">
+                <a:solidFill>
+                  <a:schemeClr val="tx1"/>
+                </a:solidFill>
+                <a:effectLst/>
+                <a:latin typeface="+mn-lt"/>
+                <a:ea typeface="+mn-ea"/>
+                <a:cs typeface="+mn-cs"/>
+              </a:rPr>
+              <a:t>Right side - what Python does. Everything else: reading the document, cleaning, chunking, validation, Excel, HTML reports, history, trend analysis, deduplication, and the Azure DevOps API calls. Why Python here? Because it's reproducible, free, fast, and testable.</a:t>
+            </a:r>
+          </a:p>
+          <a:p>
+            <a:pPr marL="171450" lvl="0" indent="-171450">
+              <a:buFont typeface="Arial" panose="020B0604020202020204" pitchFamily="34" charset="0"/>
+              <a:buChar char="•"/>
+            </a:pPr>
+            <a:r>
+              <a:rPr lang="en-US" sz="1200" kern="1200" dirty="0">
+                <a:solidFill>
+                  <a:schemeClr val="tx1"/>
+                </a:solidFill>
+                <a:effectLst/>
+                <a:latin typeface="+mn-lt"/>
+                <a:ea typeface="+mn-ea"/>
+                <a:cs typeface="+mn-cs"/>
+              </a:rPr>
+              <a:t>This split is deliberate. It keeps cost down, keeps behavior predictable, and means the AI is only ever doing the part humans are worst at - reading hours of text consistently.</a:t>
+            </a:r>
+          </a:p>
+          <a:p>
+            <a:pPr marL="171450" lvl="0" indent="-171450">
+              <a:buFont typeface="Arial" panose="020B0604020202020204" pitchFamily="34" charset="0"/>
+              <a:buChar char="•"/>
+            </a:pPr>
+            <a:endParaRPr lang="en-US" sz="1200" kern="1200" dirty="0">
+              <a:solidFill>
+                <a:schemeClr val="tx1"/>
+              </a:solidFill>
+              <a:effectLst/>
+              <a:latin typeface="+mn-lt"/>
+              <a:ea typeface="+mn-ea"/>
+              <a:cs typeface="+mn-cs"/>
+            </a:endParaRPr>
+          </a:p>
+          <a:p>
+            <a:pPr marL="0" marR="0" lvl="0" indent="0" algn="l" defTabSz="914400" rtl="0" eaLnBrk="1" fontAlgn="auto" latinLnBrk="0" hangingPunct="1">
+              <a:lnSpc>
+                <a:spcPct val="100000"/>
+              </a:lnSpc>
+              <a:spcBef>
+                <a:spcPts val="0"/>
+              </a:spcBef>
+              <a:spcAft>
+                <a:spcPts val="0"/>
+              </a:spcAft>
+              <a:buClrTx/>
+              <a:buSzTx/>
+              <a:buFont typeface="Arial" panose="020B0604020202020204" pitchFamily="34" charset="0"/>
+              <a:buNone/>
+              <a:tabLst/>
+              <a:defRPr/>
+            </a:pPr>
+            <a:r>
+              <a:rPr lang="en-US" sz="1200" b="1" i="1" kern="1200" dirty="0">
+                <a:solidFill>
+                  <a:schemeClr val="tx1"/>
+                </a:solidFill>
+                <a:effectLst/>
+                <a:latin typeface="+mn-lt"/>
+                <a:ea typeface="+mn-ea"/>
+                <a:cs typeface="+mn-cs"/>
+              </a:rPr>
+              <a:t>Transition:  </a:t>
+            </a:r>
+            <a:r>
+              <a:rPr lang="en-US" sz="1200" i="1" kern="1200" dirty="0">
+                <a:solidFill>
+                  <a:schemeClr val="tx1"/>
+                </a:solidFill>
+                <a:effectLst/>
+                <a:latin typeface="+mn-lt"/>
+                <a:ea typeface="+mn-ea"/>
+                <a:cs typeface="+mn-cs"/>
+              </a:rPr>
+              <a:t>Now, what is that framework the AI classifies against?</a:t>
+            </a:r>
+            <a:endParaRPr lang="en-US" sz="1200" kern="1200" dirty="0">
+              <a:solidFill>
+                <a:schemeClr val="tx1"/>
+              </a:solidFill>
+              <a:effectLst/>
+              <a:latin typeface="+mn-lt"/>
+              <a:ea typeface="+mn-ea"/>
+              <a:cs typeface="+mn-cs"/>
+            </a:endParaRPr>
+          </a:p>
+          <a:p>
+            <a:pPr marL="171450" lvl="0" indent="-171450">
+              <a:buFont typeface="Arial" panose="020B0604020202020204" pitchFamily="34" charset="0"/>
+              <a:buChar char="•"/>
+            </a:pPr>
+            <a:endParaRPr lang="en-US" sz="1200" kern="1200" dirty="0">
+              <a:solidFill>
+                <a:schemeClr val="tx1"/>
+              </a:solidFill>
+              <a:effectLst/>
+              <a:latin typeface="+mn-lt"/>
+              <a:ea typeface="+mn-ea"/>
+              <a:cs typeface="+mn-cs"/>
+            </a:endParaRPr>
+          </a:p>
+          <a:p>
+            <a:endParaRPr lang="en-US" dirty="0"/>
+          </a:p>
+        </p:txBody>
+      </p:sp>
+      <p:sp>
+        <p:nvSpPr>
+          <p:cNvPr id="4" name="Slide Number Placeholder 3"/>
+          <p:cNvSpPr>
+            <a:spLocks noGrp="1"/>
+          </p:cNvSpPr>
+          <p:nvPr>
+            <p:ph type="sldNum" sz="quarter" idx="5"/>
+          </p:nvPr>
+        </p:nvSpPr>
+        <p:spPr/>
+        <p:txBody>
+          <a:bodyPr/>
+          <a:lstStyle/>
+          <a:p>
+            <a:fld id="{1173F729-9B69-4F7A-B335-A85BBAD54984}" type="slidenum">
+              <a:rPr lang="en-US" smtClean="0"/>
+              <a:t>8</a:t>
+            </a:fld>
+            <a:endParaRPr lang="en-US"/>
+          </a:p>
+        </p:txBody>
+      </p:sp>
+    </p:spTree>
+    <p:extLst>
+      <p:ext uri="{BB962C8B-B14F-4D97-AF65-F5344CB8AC3E}">
+        <p14:creationId xmlns:p14="http://schemas.microsoft.com/office/powerpoint/2010/main" val="435715492"/>
+      </p:ext>
+    </p:extLst>
+  </p:cSld>
+  <p:clrMapOvr>
+    <a:masterClrMapping/>
+  </p:clrMapOvr>
+</p:notes>
+</file>
+
+<file path=ppt/notesSlides/notesSlide7.xml><?xml version="1.0" encoding="utf-8"?>
+<p:notes xmlns:a="http://schemas.openxmlformats.org/drawingml/2006/main" xmlns:r="http://schemas.openxmlformats.org/officeDocument/2006/relationships" xmlns:p="http://schemas.openxmlformats.org/presentationml/2006/main">
+  <p:cSld>
+    <p:spTree>
+      <p:nvGrpSpPr>
+        <p:cNvPr id="1" name=""/>
+        <p:cNvGrpSpPr/>
+        <p:nvPr/>
+      </p:nvGrpSpPr>
+      <p:grpSpPr>
+        <a:xfrm>
+          <a:off x="0" y="0"/>
+          <a:ext cx="0" cy="0"/>
+          <a:chOff x="0" y="0"/>
+          <a:chExt cx="0" cy="0"/>
+        </a:xfrm>
+      </p:grpSpPr>
+      <p:sp>
+        <p:nvSpPr>
+          <p:cNvPr id="2" name="Slide Image Placeholder 1"/>
+          <p:cNvSpPr>
+            <a:spLocks noGrp="1" noRot="1" noChangeAspect="1"/>
+          </p:cNvSpPr>
+          <p:nvPr>
+            <p:ph type="sldImg"/>
+          </p:nvPr>
+        </p:nvSpPr>
+        <p:spPr/>
+      </p:sp>
+      <p:sp>
+        <p:nvSpPr>
+          <p:cNvPr id="3" name="Notes Placeholder 2"/>
+          <p:cNvSpPr>
+            <a:spLocks noGrp="1"/>
+          </p:cNvSpPr>
+          <p:nvPr>
+            <p:ph type="body" idx="1"/>
+          </p:nvPr>
+        </p:nvSpPr>
+        <p:spPr/>
+        <p:txBody>
+          <a:bodyPr/>
+          <a:lstStyle/>
+          <a:p>
+            <a:pPr marL="171450" lvl="0" indent="-171450">
+              <a:buFont typeface="Arial" panose="020B0604020202020204" pitchFamily="34" charset="0"/>
+              <a:buChar char="•"/>
+            </a:pPr>
+            <a:r>
+              <a:rPr lang="en-US" sz="1200" kern="1200" dirty="0">
+                <a:solidFill>
+                  <a:schemeClr val="tx1"/>
+                </a:solidFill>
+                <a:effectLst/>
+                <a:latin typeface="+mn-lt"/>
+                <a:ea typeface="+mn-ea"/>
+                <a:cs typeface="+mn-cs"/>
+              </a:rPr>
+              <a:t>Every opportunity gets mapped onto these consistent dimensions. This is what gives us a shared language.</a:t>
+            </a:r>
+          </a:p>
+          <a:p>
+            <a:pPr marL="171450" lvl="0" indent="-171450">
+              <a:buFont typeface="Arial" panose="020B0604020202020204" pitchFamily="34" charset="0"/>
+              <a:buChar char="•"/>
+            </a:pPr>
+            <a:r>
+              <a:rPr lang="en-US" sz="1200" kern="1200" dirty="0">
+                <a:solidFill>
+                  <a:schemeClr val="tx1"/>
+                </a:solidFill>
+                <a:effectLst/>
+                <a:latin typeface="+mn-lt"/>
+                <a:ea typeface="+mn-ea"/>
+                <a:cs typeface="+mn-cs"/>
+              </a:rPr>
+              <a:t>AI Use Case Type - is this AI to understand the work, or to act on it? Operating Bucket - which part of the business: pre-sale, manufacturing, post-shipment, governance. Level of Analysis - a maturity ladder from a raw signal up to a release candidate.</a:t>
+            </a:r>
+          </a:p>
+          <a:p>
+            <a:pPr marL="171450" lvl="0" indent="-171450">
+              <a:buFont typeface="Arial" panose="020B0604020202020204" pitchFamily="34" charset="0"/>
+              <a:buChar char="•"/>
+            </a:pPr>
+            <a:r>
+              <a:rPr lang="en-US" sz="1200" kern="1200" dirty="0">
+                <a:solidFill>
+                  <a:schemeClr val="tx1"/>
+                </a:solidFill>
+                <a:effectLst/>
+                <a:latin typeface="+mn-lt"/>
+                <a:ea typeface="+mn-ea"/>
+                <a:cs typeface="+mn-cs"/>
+              </a:rPr>
+              <a:t>Maturity Signal - is this aspirational, being explored, piloting, or already deployed? Signal Strength - is it one isolated example or a cross-functional, leadership-level priority? And Value, Effort, and Risk scores for prioritization.</a:t>
+            </a:r>
+          </a:p>
+          <a:p>
+            <a:pPr marL="171450" lvl="0" indent="-171450">
+              <a:buFont typeface="Arial" panose="020B0604020202020204" pitchFamily="34" charset="0"/>
+              <a:buChar char="•"/>
+            </a:pPr>
+            <a:r>
+              <a:rPr lang="en-US" sz="1200" kern="1200" dirty="0">
+                <a:solidFill>
+                  <a:schemeClr val="tx1"/>
+                </a:solidFill>
+                <a:effectLst/>
+                <a:latin typeface="+mn-lt"/>
+                <a:ea typeface="+mn-ea"/>
+                <a:cs typeface="+mn-cs"/>
+              </a:rPr>
+              <a:t>Here's the part that matters for scaling - and the line at the bottom: this framework is just configuration. It's a JSON file. Swap it out, and the exact same engine will classify a completely different domain. Hold that thought - I'll come back to it.</a:t>
+            </a:r>
+          </a:p>
+          <a:p>
+            <a:endParaRPr lang="en-US" dirty="0"/>
+          </a:p>
+          <a:p>
+            <a:pPr marL="0" marR="0" lvl="0" indent="0" algn="l" defTabSz="914400" rtl="0" eaLnBrk="1" fontAlgn="auto" latinLnBrk="0" hangingPunct="1">
+              <a:lnSpc>
+                <a:spcPct val="100000"/>
+              </a:lnSpc>
+              <a:spcBef>
+                <a:spcPts val="0"/>
+              </a:spcBef>
+              <a:spcAft>
+                <a:spcPts val="0"/>
+              </a:spcAft>
+              <a:buClrTx/>
+              <a:buSzTx/>
+              <a:buFontTx/>
+              <a:buNone/>
+              <a:tabLst/>
+              <a:defRPr/>
+            </a:pPr>
+            <a:r>
+              <a:rPr lang="en-US" sz="1200" b="1" i="1" kern="1200" dirty="0">
+                <a:solidFill>
+                  <a:schemeClr val="tx1"/>
+                </a:solidFill>
+                <a:effectLst/>
+                <a:latin typeface="+mn-lt"/>
+                <a:ea typeface="+mn-ea"/>
+                <a:cs typeface="+mn-cs"/>
+              </a:rPr>
+              <a:t>Transition:  </a:t>
+            </a:r>
+            <a:r>
+              <a:rPr lang="en-US" sz="1200" i="1" kern="1200" dirty="0">
+                <a:solidFill>
+                  <a:schemeClr val="tx1"/>
+                </a:solidFill>
+                <a:effectLst/>
+                <a:latin typeface="+mn-lt"/>
+                <a:ea typeface="+mn-ea"/>
+                <a:cs typeface="+mn-cs"/>
+              </a:rPr>
+              <a:t>So what do you actually get out of it?</a:t>
+            </a:r>
+            <a:endParaRPr lang="en-US" sz="1200" kern="1200" dirty="0">
+              <a:solidFill>
+                <a:schemeClr val="tx1"/>
+              </a:solidFill>
+              <a:effectLst/>
+              <a:latin typeface="+mn-lt"/>
+              <a:ea typeface="+mn-ea"/>
+              <a:cs typeface="+mn-cs"/>
+            </a:endParaRPr>
+          </a:p>
+          <a:p>
+            <a:endParaRPr lang="en-US" dirty="0"/>
+          </a:p>
+        </p:txBody>
+      </p:sp>
+      <p:sp>
+        <p:nvSpPr>
+          <p:cNvPr id="4" name="Slide Number Placeholder 3"/>
+          <p:cNvSpPr>
+            <a:spLocks noGrp="1"/>
+          </p:cNvSpPr>
+          <p:nvPr>
+            <p:ph type="sldNum" sz="quarter" idx="5"/>
+          </p:nvPr>
+        </p:nvSpPr>
+        <p:spPr/>
+        <p:txBody>
+          <a:bodyPr/>
+          <a:lstStyle/>
+          <a:p>
+            <a:fld id="{1173F729-9B69-4F7A-B335-A85BBAD54984}" type="slidenum">
+              <a:rPr lang="en-US" smtClean="0"/>
+              <a:t>9</a:t>
+            </a:fld>
+            <a:endParaRPr lang="en-US"/>
+          </a:p>
+        </p:txBody>
+      </p:sp>
+    </p:spTree>
+    <p:extLst>
+      <p:ext uri="{BB962C8B-B14F-4D97-AF65-F5344CB8AC3E}">
+        <p14:creationId xmlns:p14="http://schemas.microsoft.com/office/powerpoint/2010/main" val="405082829"/>
+      </p:ext>
+    </p:extLst>
+  </p:cSld>
+  <p:clrMapOvr>
+    <a:masterClrMapping/>
+  </p:clrMapOvr>
+</p:notes>
+</file>
+
+<file path=ppt/notesSlides/notesSlide8.xml><?xml version="1.0" encoding="utf-8"?>
+<p:notes xmlns:a="http://schemas.openxmlformats.org/drawingml/2006/main" xmlns:r="http://schemas.openxmlformats.org/officeDocument/2006/relationships" xmlns:p="http://schemas.openxmlformats.org/presentationml/2006/main">
+  <p:cSld>
+    <p:spTree>
+      <p:nvGrpSpPr>
+        <p:cNvPr id="1" name=""/>
+        <p:cNvGrpSpPr/>
+        <p:nvPr/>
+      </p:nvGrpSpPr>
+      <p:grpSpPr>
+        <a:xfrm>
+          <a:off x="0" y="0"/>
+          <a:ext cx="0" cy="0"/>
+          <a:chOff x="0" y="0"/>
+          <a:chExt cx="0" cy="0"/>
+        </a:xfrm>
+      </p:grpSpPr>
+      <p:sp>
+        <p:nvSpPr>
+          <p:cNvPr id="2" name="Slide Image Placeholder 1"/>
+          <p:cNvSpPr>
+            <a:spLocks noGrp="1" noRot="1" noChangeAspect="1"/>
+          </p:cNvSpPr>
+          <p:nvPr>
+            <p:ph type="sldImg"/>
+          </p:nvPr>
+        </p:nvSpPr>
+        <p:spPr/>
+      </p:sp>
+      <p:sp>
+        <p:nvSpPr>
+          <p:cNvPr id="3" name="Notes Placeholder 2"/>
+          <p:cNvSpPr>
+            <a:spLocks noGrp="1"/>
+          </p:cNvSpPr>
+          <p:nvPr>
+            <p:ph type="body" idx="1"/>
+          </p:nvPr>
+        </p:nvSpPr>
+        <p:spPr/>
+        <p:txBody>
+          <a:bodyPr/>
+          <a:lstStyle/>
+          <a:p>
+            <a:pPr marL="171450" lvl="0" indent="-171450">
+              <a:buFont typeface="Arial" panose="020B0604020202020204" pitchFamily="34" charset="0"/>
+              <a:buChar char="•"/>
+            </a:pPr>
+            <a:r>
+              <a:rPr lang="en-US" sz="1200" kern="1200" dirty="0">
+                <a:solidFill>
+                  <a:schemeClr val="tx1"/>
+                </a:solidFill>
+                <a:effectLst/>
+                <a:latin typeface="+mn-lt"/>
+                <a:ea typeface="+mn-ea"/>
+                <a:cs typeface="+mn-cs"/>
+              </a:rPr>
+              <a:t>Everything it produces is self-contained - HTML you open in a browser, no server needed.</a:t>
+            </a:r>
+          </a:p>
+          <a:p>
+            <a:pPr marL="171450" lvl="0" indent="-171450">
+              <a:buFont typeface="Arial" panose="020B0604020202020204" pitchFamily="34" charset="0"/>
+              <a:buChar char="•"/>
+            </a:pPr>
+            <a:r>
+              <a:rPr lang="en-US" sz="1200" kern="1200" dirty="0">
+                <a:solidFill>
+                  <a:schemeClr val="tx1"/>
+                </a:solidFill>
+                <a:effectLst/>
+                <a:latin typeface="+mn-lt"/>
+                <a:ea typeface="+mn-ea"/>
+                <a:cs typeface="+mn-cs"/>
+              </a:rPr>
+              <a:t>The weekly report has five tabs: Cards - one per opportunity with a live status chip; Analytics - charts; the Full Table - all 40 fields; Trends - what's new versus carried over; and Progress - live status from Azure DevOps. I'll show these live in a minute.</a:t>
+            </a:r>
+          </a:p>
+          <a:p>
+            <a:pPr marL="171450" lvl="0" indent="-171450">
+              <a:buFont typeface="Arial" panose="020B0604020202020204" pitchFamily="34" charset="0"/>
+              <a:buChar char="•"/>
+            </a:pPr>
+            <a:r>
+              <a:rPr lang="en-US" sz="1200" kern="1200" dirty="0">
+                <a:solidFill>
+                  <a:schemeClr val="tx1"/>
+                </a:solidFill>
+                <a:effectLst/>
+                <a:latin typeface="+mn-lt"/>
+                <a:ea typeface="+mn-ea"/>
+                <a:cs typeface="+mn-cs"/>
+              </a:rPr>
+              <a:t>The monthly rollup gives leadership the bigger picture - unique counts, what's new this month, momentum, escalations.</a:t>
+            </a:r>
+          </a:p>
+          <a:p>
+            <a:pPr marL="171450" lvl="0" indent="-171450">
+              <a:buFont typeface="Arial" panose="020B0604020202020204" pitchFamily="34" charset="0"/>
+              <a:buChar char="•"/>
+            </a:pPr>
+            <a:r>
+              <a:rPr lang="en-US" sz="1200" kern="1200" dirty="0">
+                <a:solidFill>
+                  <a:schemeClr val="tx1"/>
+                </a:solidFill>
+                <a:effectLst/>
+                <a:latin typeface="+mn-lt"/>
+                <a:ea typeface="+mn-ea"/>
+                <a:cs typeface="+mn-cs"/>
+              </a:rPr>
+              <a:t>For review and hand-off, there's an Excel workbook, a draft SharePoint payload, and a master file that feeds Power BI - including the Azure DevOps columns.</a:t>
+            </a:r>
+          </a:p>
+          <a:p>
+            <a:pPr marL="171450" lvl="0" indent="-171450">
+              <a:buFont typeface="Arial" panose="020B0604020202020204" pitchFamily="34" charset="0"/>
+              <a:buChar char="•"/>
+            </a:pPr>
+            <a:r>
+              <a:rPr lang="en-US" sz="1200" kern="1200" dirty="0">
+                <a:solidFill>
+                  <a:schemeClr val="tx1"/>
+                </a:solidFill>
+                <a:effectLst/>
+                <a:latin typeface="+mn-lt"/>
+                <a:ea typeface="+mn-ea"/>
+                <a:cs typeface="+mn-cs"/>
+              </a:rPr>
+              <a:t>And for the meeting itself, it even auto-generates the PowerPoint deck for the next session, built from the accumulated history rather than by hand.</a:t>
+            </a:r>
+          </a:p>
+          <a:p>
+            <a:pPr marL="171450" lvl="0" indent="-171450">
+              <a:buFont typeface="Arial" panose="020B0604020202020204" pitchFamily="34" charset="0"/>
+              <a:buChar char="•"/>
+            </a:pPr>
+            <a:endParaRPr lang="en-US" sz="1200" kern="1200" dirty="0">
+              <a:solidFill>
+                <a:schemeClr val="tx1"/>
+              </a:solidFill>
+              <a:effectLst/>
+              <a:latin typeface="+mn-lt"/>
+              <a:ea typeface="+mn-ea"/>
+              <a:cs typeface="+mn-cs"/>
+            </a:endParaRPr>
+          </a:p>
+          <a:p>
+            <a:pPr marL="0" lvl="0" indent="0">
+              <a:buFont typeface="Arial" panose="020B0604020202020204" pitchFamily="34" charset="0"/>
+              <a:buNone/>
+            </a:pPr>
+            <a:r>
+              <a:rPr lang="en-US" sz="1200" b="1" i="1" kern="1200" dirty="0">
+                <a:solidFill>
+                  <a:schemeClr val="tx1"/>
+                </a:solidFill>
+                <a:effectLst/>
+                <a:latin typeface="+mn-lt"/>
+                <a:ea typeface="+mn-ea"/>
+                <a:cs typeface="+mn-cs"/>
+              </a:rPr>
+              <a:t>Transition:  </a:t>
+            </a:r>
+            <a:r>
+              <a:rPr lang="en-US" sz="1200" i="1" kern="1200" dirty="0">
+                <a:solidFill>
+                  <a:schemeClr val="tx1"/>
+                </a:solidFill>
+                <a:effectLst/>
+                <a:latin typeface="+mn-lt"/>
+                <a:ea typeface="+mn-ea"/>
+                <a:cs typeface="+mn-cs"/>
+              </a:rPr>
+              <a:t>Now the newest and, honestly, the most important capability - closing the loop.</a:t>
+            </a:r>
+            <a:endParaRPr lang="en-US" sz="1200" kern="1200" dirty="0">
+              <a:solidFill>
+                <a:schemeClr val="tx1"/>
+              </a:solidFill>
+              <a:effectLst/>
+              <a:latin typeface="+mn-lt"/>
+              <a:ea typeface="+mn-ea"/>
+              <a:cs typeface="+mn-cs"/>
+            </a:endParaRPr>
+          </a:p>
+          <a:p>
+            <a:endParaRPr lang="en-US" dirty="0"/>
+          </a:p>
+        </p:txBody>
+      </p:sp>
+      <p:sp>
+        <p:nvSpPr>
+          <p:cNvPr id="4" name="Slide Number Placeholder 3"/>
+          <p:cNvSpPr>
+            <a:spLocks noGrp="1"/>
+          </p:cNvSpPr>
+          <p:nvPr>
+            <p:ph type="sldNum" sz="quarter" idx="5"/>
+          </p:nvPr>
+        </p:nvSpPr>
+        <p:spPr/>
+        <p:txBody>
+          <a:bodyPr/>
+          <a:lstStyle/>
+          <a:p>
+            <a:fld id="{1173F729-9B69-4F7A-B335-A85BBAD54984}" type="slidenum">
+              <a:rPr lang="en-US" smtClean="0"/>
+              <a:t>10</a:t>
+            </a:fld>
+            <a:endParaRPr lang="en-US"/>
+          </a:p>
+        </p:txBody>
+      </p:sp>
+    </p:spTree>
+    <p:extLst>
+      <p:ext uri="{BB962C8B-B14F-4D97-AF65-F5344CB8AC3E}">
+        <p14:creationId xmlns:p14="http://schemas.microsoft.com/office/powerpoint/2010/main" val="3852239244"/>
+      </p:ext>
+    </p:extLst>
+  </p:cSld>
+  <p:clrMapOvr>
+    <a:masterClrMapping/>
+  </p:clrMapOvr>
+</p:notes>
+</file>
+
+<file path=ppt/notesSlides/notesSlide9.xml><?xml version="1.0" encoding="utf-8"?>
+<p:notes xmlns:a="http://schemas.openxmlformats.org/drawingml/2006/main" xmlns:r="http://schemas.openxmlformats.org/officeDocument/2006/relationships" xmlns:p="http://schemas.openxmlformats.org/presentationml/2006/main">
+  <p:cSld>
+    <p:spTree>
+      <p:nvGrpSpPr>
+        <p:cNvPr id="1" name=""/>
+        <p:cNvGrpSpPr/>
+        <p:nvPr/>
+      </p:nvGrpSpPr>
+      <p:grpSpPr>
+        <a:xfrm>
+          <a:off x="0" y="0"/>
+          <a:ext cx="0" cy="0"/>
+          <a:chOff x="0" y="0"/>
+          <a:chExt cx="0" cy="0"/>
+        </a:xfrm>
+      </p:grpSpPr>
+      <p:sp>
+        <p:nvSpPr>
+          <p:cNvPr id="2" name="Slide Image Placeholder 1"/>
+          <p:cNvSpPr>
+            <a:spLocks noGrp="1" noRot="1" noChangeAspect="1"/>
+          </p:cNvSpPr>
+          <p:nvPr>
+            <p:ph type="sldImg"/>
+          </p:nvPr>
+        </p:nvSpPr>
+        <p:spPr/>
+      </p:sp>
+      <p:sp>
+        <p:nvSpPr>
+          <p:cNvPr id="3" name="Notes Placeholder 2"/>
+          <p:cNvSpPr>
+            <a:spLocks noGrp="1"/>
+          </p:cNvSpPr>
+          <p:nvPr>
+            <p:ph type="body" idx="1"/>
+          </p:nvPr>
+        </p:nvSpPr>
+        <p:spPr/>
+        <p:txBody>
+          <a:bodyPr/>
+          <a:lstStyle/>
+          <a:p>
+            <a:pPr marL="171450" lvl="0" indent="-171450">
+              <a:buFont typeface="Arial" panose="020B0604020202020204" pitchFamily="34" charset="0"/>
+              <a:buChar char="•"/>
+            </a:pPr>
+            <a:r>
+              <a:rPr lang="en-US" sz="1200" kern="1200" dirty="0">
+                <a:solidFill>
+                  <a:schemeClr val="tx1"/>
+                </a:solidFill>
+                <a:effectLst/>
+                <a:latin typeface="+mn-lt"/>
+                <a:ea typeface="+mn-ea"/>
+                <a:cs typeface="+mn-cs"/>
+              </a:rPr>
+              <a:t>This is the capability I'm most excited about, and it's the answer to that 'whatever happened to that idea?' problem.</a:t>
+            </a:r>
+          </a:p>
+          <a:p>
+            <a:pPr marL="171450" lvl="0" indent="-171450">
+              <a:buFont typeface="Arial" panose="020B0604020202020204" pitchFamily="34" charset="0"/>
+              <a:buChar char="•"/>
+            </a:pPr>
+            <a:r>
+              <a:rPr lang="en-US" sz="1200" kern="1200" dirty="0">
+                <a:solidFill>
+                  <a:schemeClr val="tx1"/>
+                </a:solidFill>
+                <a:effectLst/>
+                <a:latin typeface="+mn-lt"/>
+                <a:ea typeface="+mn-ea"/>
+                <a:cs typeface="+mn-cs"/>
+              </a:rPr>
+              <a:t>Three pieces. PUSH - opt-in. After review, I run it with a --push-ado flag, and each approved opportunity becomes a tracked Issue in Azure DevOps, with a full description - the problem, the evidence quote, the next step. It even de-duplicates by title, so it's safe to re-run.</a:t>
+            </a:r>
+          </a:p>
+          <a:p>
+            <a:pPr marL="171450" lvl="0" indent="-171450">
+              <a:buFont typeface="Arial" panose="020B0604020202020204" pitchFamily="34" charset="0"/>
+              <a:buChar char="•"/>
+            </a:pPr>
+            <a:r>
+              <a:rPr lang="en-US" sz="1200" kern="1200" dirty="0">
+                <a:solidFill>
+                  <a:schemeClr val="tx1"/>
+                </a:solidFill>
+                <a:effectLst/>
+                <a:latin typeface="+mn-lt"/>
+                <a:ea typeface="+mn-ea"/>
+                <a:cs typeface="+mn-cs"/>
+              </a:rPr>
+              <a:t>SYNC - automatic. Every weekly run starts by pulling live status back from Azure DevOps - To Do, Doing, Done, who it's assigned to. Important: this is read-only. It never creates or edits work items. It just reads.</a:t>
+            </a:r>
+          </a:p>
+          <a:p>
+            <a:pPr marL="171450" lvl="0" indent="-171450">
+              <a:buFont typeface="Arial" panose="020B0604020202020204" pitchFamily="34" charset="0"/>
+              <a:buChar char="•"/>
+            </a:pPr>
+            <a:r>
+              <a:rPr lang="en-US" sz="1200" kern="1200" dirty="0">
+                <a:solidFill>
+                  <a:schemeClr val="tx1"/>
+                </a:solidFill>
+                <a:effectLst/>
+                <a:latin typeface="+mn-lt"/>
+                <a:ea typeface="+mn-ea"/>
+                <a:cs typeface="+mn-cs"/>
+              </a:rPr>
+              <a:t>SEE IT - the Progress tab. Every opportunity grouped by its current state, with items that moved in the last seven days highlighted, and direct links into Azure DevOps. That tab answers 'where are we at with X?' in one glance.</a:t>
+            </a:r>
+          </a:p>
+          <a:p>
+            <a:pPr marL="171450" lvl="0" indent="-171450">
+              <a:buFont typeface="Arial" panose="020B0604020202020204" pitchFamily="34" charset="0"/>
+              <a:buChar char="•"/>
+            </a:pPr>
+            <a:r>
+              <a:rPr lang="en-US" sz="1200" kern="1200" dirty="0">
+                <a:solidFill>
+                  <a:schemeClr val="tx1"/>
+                </a:solidFill>
+                <a:effectLst/>
+                <a:latin typeface="+mn-lt"/>
+                <a:ea typeface="+mn-ea"/>
+                <a:cs typeface="+mn-cs"/>
+              </a:rPr>
+              <a:t>The line at the bottom is the whole point: this is the difference between a meeting note and a managed pipeline of work. We added this specifically to close the loop on where the work actually happens.</a:t>
+            </a:r>
+          </a:p>
+          <a:p>
+            <a:pPr marL="171450" lvl="0" indent="-171450">
+              <a:buFont typeface="Arial" panose="020B0604020202020204" pitchFamily="34" charset="0"/>
+              <a:buChar char="•"/>
+            </a:pPr>
+            <a:endParaRPr lang="en-US" sz="1200" kern="1200" dirty="0">
+              <a:solidFill>
+                <a:schemeClr val="tx1"/>
+              </a:solidFill>
+              <a:effectLst/>
+              <a:latin typeface="+mn-lt"/>
+              <a:ea typeface="+mn-ea"/>
+              <a:cs typeface="+mn-cs"/>
+            </a:endParaRPr>
+          </a:p>
+          <a:p>
+            <a:pPr marL="0" marR="0" lvl="0" indent="0" algn="l" defTabSz="914400" rtl="0" eaLnBrk="1" fontAlgn="auto" latinLnBrk="0" hangingPunct="1">
+              <a:lnSpc>
+                <a:spcPct val="100000"/>
+              </a:lnSpc>
+              <a:spcBef>
+                <a:spcPts val="0"/>
+              </a:spcBef>
+              <a:spcAft>
+                <a:spcPts val="0"/>
+              </a:spcAft>
+              <a:buClrTx/>
+              <a:buSzTx/>
+              <a:buFont typeface="Arial" panose="020B0604020202020204" pitchFamily="34" charset="0"/>
+              <a:buNone/>
+              <a:tabLst/>
+              <a:defRPr/>
+            </a:pPr>
+            <a:r>
+              <a:rPr lang="en-US" sz="1200" b="1" i="1" kern="1200" dirty="0">
+                <a:solidFill>
+                  <a:schemeClr val="tx1"/>
+                </a:solidFill>
+                <a:effectLst/>
+                <a:latin typeface="+mn-lt"/>
+                <a:ea typeface="+mn-ea"/>
+                <a:cs typeface="+mn-cs"/>
+              </a:rPr>
+              <a:t>Transition:  </a:t>
+            </a:r>
+            <a:r>
+              <a:rPr lang="en-US" sz="1200" i="1" kern="1200" dirty="0">
+                <a:solidFill>
+                  <a:schemeClr val="tx1"/>
+                </a:solidFill>
+                <a:effectLst/>
+                <a:latin typeface="+mn-lt"/>
+                <a:ea typeface="+mn-ea"/>
+                <a:cs typeface="+mn-cs"/>
+              </a:rPr>
+              <a:t>Enough slides - let me show you the real thing.</a:t>
+            </a:r>
+            <a:endParaRPr lang="en-US" sz="1200" kern="1200" dirty="0">
+              <a:solidFill>
+                <a:schemeClr val="tx1"/>
+              </a:solidFill>
+              <a:effectLst/>
+              <a:latin typeface="+mn-lt"/>
+              <a:ea typeface="+mn-ea"/>
+              <a:cs typeface="+mn-cs"/>
+            </a:endParaRPr>
+          </a:p>
+          <a:p>
+            <a:pPr marL="171450" lvl="0" indent="-171450">
+              <a:buFont typeface="Arial" panose="020B0604020202020204" pitchFamily="34" charset="0"/>
+              <a:buChar char="•"/>
+            </a:pPr>
+            <a:endParaRPr lang="en-US" sz="1200" kern="1200" dirty="0">
+              <a:solidFill>
+                <a:schemeClr val="tx1"/>
+              </a:solidFill>
+              <a:effectLst/>
+              <a:latin typeface="+mn-lt"/>
+              <a:ea typeface="+mn-ea"/>
+              <a:cs typeface="+mn-cs"/>
+            </a:endParaRPr>
+          </a:p>
+          <a:p>
+            <a:endParaRPr lang="en-US" dirty="0"/>
+          </a:p>
+        </p:txBody>
+      </p:sp>
+      <p:sp>
+        <p:nvSpPr>
+          <p:cNvPr id="4" name="Slide Number Placeholder 3"/>
+          <p:cNvSpPr>
+            <a:spLocks noGrp="1"/>
+          </p:cNvSpPr>
+          <p:nvPr>
+            <p:ph type="sldNum" sz="quarter" idx="5"/>
+          </p:nvPr>
+        </p:nvSpPr>
+        <p:spPr/>
+        <p:txBody>
+          <a:bodyPr/>
+          <a:lstStyle/>
+          <a:p>
+            <a:fld id="{1173F729-9B69-4F7A-B335-A85BBAD54984}" type="slidenum">
+              <a:rPr lang="en-US" smtClean="0"/>
+              <a:t>11</a:t>
+            </a:fld>
+            <a:endParaRPr lang="en-US"/>
+          </a:p>
+        </p:txBody>
+      </p:sp>
+    </p:spTree>
+    <p:extLst>
+      <p:ext uri="{BB962C8B-B14F-4D97-AF65-F5344CB8AC3E}">
+        <p14:creationId xmlns:p14="http://schemas.microsoft.com/office/powerpoint/2010/main" val="1069133893"/>
+      </p:ext>
+    </p:extLst>
+  </p:cSld>
+  <p:clrMapOvr>
+    <a:masterClrMapping/>
+  </p:clrMapOvr>
+</p:notes>
 </file>
 
 <file path=ppt/slideLayouts/slideLayout1.xml><?xml version="1.0" encoding="utf-8"?>
@@ -163,10 +3690,9 @@
           <a:lstStyle/>
           <a:p>
             <a:r>
-              <a:rPr lang="en-US" smtClean="0"/>
+              <a:rPr lang="en-US"/>
               <a:t>Click to edit Master title style</a:t>
             </a:r>
-            <a:endParaRPr lang="en-US"/>
           </a:p>
         </p:txBody>
       </p:sp>
@@ -282,10 +3808,9 @@
           </a:lstStyle>
           <a:p>
             <a:r>
-              <a:rPr lang="en-US" smtClean="0"/>
+              <a:rPr lang="en-US"/>
               <a:t>Click to edit Master subtitle style</a:t>
             </a:r>
-            <a:endParaRPr lang="en-US"/>
           </a:p>
         </p:txBody>
       </p:sp>
@@ -306,7 +3831,7 @@
           <a:p>
             <a:fld id="{5BCAD085-E8A6-8845-BD4E-CB4CCA059FC4}" type="datetimeFigureOut">
               <a:rPr lang="en-US" smtClean="0"/>
-              <a:t>1/27/13</a:t>
+              <a:t>6/23/2026</a:t>
             </a:fld>
             <a:endParaRPr lang="en-US"/>
           </a:p>
@@ -400,10 +3925,9 @@
           <a:lstStyle/>
           <a:p>
             <a:r>
-              <a:rPr lang="en-US" smtClean="0"/>
+              <a:rPr lang="en-US"/>
               <a:t>Click to edit Master title style</a:t>
             </a:r>
-            <a:endParaRPr lang="en-US"/>
           </a:p>
         </p:txBody>
       </p:sp>
@@ -424,38 +3948,37 @@
           <a:p>
             <a:pPr lvl="0"/>
             <a:r>
-              <a:rPr lang="en-US" smtClean="0"/>
+              <a:rPr lang="en-US"/>
               <a:t>Click to edit Master text styles</a:t>
             </a:r>
           </a:p>
           <a:p>
             <a:pPr lvl="1"/>
             <a:r>
-              <a:rPr lang="en-US" smtClean="0"/>
+              <a:rPr lang="en-US"/>
               <a:t>Second level</a:t>
             </a:r>
           </a:p>
           <a:p>
             <a:pPr lvl="2"/>
             <a:r>
-              <a:rPr lang="en-US" smtClean="0"/>
+              <a:rPr lang="en-US"/>
               <a:t>Third level</a:t>
             </a:r>
           </a:p>
           <a:p>
             <a:pPr lvl="3"/>
             <a:r>
-              <a:rPr lang="en-US" smtClean="0"/>
+              <a:rPr lang="en-US"/>
               <a:t>Fourth level</a:t>
             </a:r>
           </a:p>
           <a:p>
             <a:pPr lvl="4"/>
             <a:r>
-              <a:rPr lang="en-US" smtClean="0"/>
+              <a:rPr lang="en-US"/>
               <a:t>Fifth level</a:t>
             </a:r>
-            <a:endParaRPr lang="en-US"/>
           </a:p>
         </p:txBody>
       </p:sp>
@@ -476,7 +3999,7 @@
           <a:p>
             <a:fld id="{5BCAD085-E8A6-8845-BD4E-CB4CCA059FC4}" type="datetimeFigureOut">
               <a:rPr lang="en-US" smtClean="0"/>
-              <a:t>1/27/13</a:t>
+              <a:t>6/23/2026</a:t>
             </a:fld>
             <a:endParaRPr lang="en-US"/>
           </a:p>
@@ -575,10 +4098,9 @@
           <a:lstStyle/>
           <a:p>
             <a:r>
-              <a:rPr lang="en-US" smtClean="0"/>
+              <a:rPr lang="en-US"/>
               <a:t>Click to edit Master title style</a:t>
             </a:r>
-            <a:endParaRPr lang="en-US"/>
           </a:p>
         </p:txBody>
       </p:sp>
@@ -604,38 +4126,37 @@
           <a:p>
             <a:pPr lvl="0"/>
             <a:r>
-              <a:rPr lang="en-US" smtClean="0"/>
+              <a:rPr lang="en-US"/>
               <a:t>Click to edit Master text styles</a:t>
             </a:r>
           </a:p>
           <a:p>
             <a:pPr lvl="1"/>
             <a:r>
-              <a:rPr lang="en-US" smtClean="0"/>
+              <a:rPr lang="en-US"/>
               <a:t>Second level</a:t>
             </a:r>
           </a:p>
           <a:p>
             <a:pPr lvl="2"/>
             <a:r>
-              <a:rPr lang="en-US" smtClean="0"/>
+              <a:rPr lang="en-US"/>
               <a:t>Third level</a:t>
             </a:r>
           </a:p>
           <a:p>
             <a:pPr lvl="3"/>
             <a:r>
-              <a:rPr lang="en-US" smtClean="0"/>
+              <a:rPr lang="en-US"/>
               <a:t>Fourth level</a:t>
             </a:r>
           </a:p>
           <a:p>
             <a:pPr lvl="4"/>
             <a:r>
-              <a:rPr lang="en-US" smtClean="0"/>
+              <a:rPr lang="en-US"/>
               <a:t>Fifth level</a:t>
             </a:r>
-            <a:endParaRPr lang="en-US"/>
           </a:p>
         </p:txBody>
       </p:sp>
@@ -656,7 +4177,7 @@
           <a:p>
             <a:fld id="{5BCAD085-E8A6-8845-BD4E-CB4CCA059FC4}" type="datetimeFigureOut">
               <a:rPr lang="en-US" smtClean="0"/>
-              <a:t>1/27/13</a:t>
+              <a:t>6/23/2026</a:t>
             </a:fld>
             <a:endParaRPr lang="en-US"/>
           </a:p>
@@ -750,10 +4271,9 @@
           <a:lstStyle/>
           <a:p>
             <a:r>
-              <a:rPr lang="en-US" smtClean="0"/>
+              <a:rPr lang="en-US"/>
               <a:t>Click to edit Master title style</a:t>
             </a:r>
-            <a:endParaRPr lang="en-US"/>
           </a:p>
         </p:txBody>
       </p:sp>
@@ -774,38 +4294,37 @@
           <a:p>
             <a:pPr lvl="0"/>
             <a:r>
-              <a:rPr lang="en-US" smtClean="0"/>
+              <a:rPr lang="en-US"/>
               <a:t>Click to edit Master text styles</a:t>
             </a:r>
           </a:p>
           <a:p>
             <a:pPr lvl="1"/>
             <a:r>
-              <a:rPr lang="en-US" smtClean="0"/>
+              <a:rPr lang="en-US"/>
               <a:t>Second level</a:t>
             </a:r>
           </a:p>
           <a:p>
             <a:pPr lvl="2"/>
             <a:r>
-              <a:rPr lang="en-US" smtClean="0"/>
+              <a:rPr lang="en-US"/>
               <a:t>Third level</a:t>
             </a:r>
           </a:p>
           <a:p>
             <a:pPr lvl="3"/>
             <a:r>
-              <a:rPr lang="en-US" smtClean="0"/>
+              <a:rPr lang="en-US"/>
               <a:t>Fourth level</a:t>
             </a:r>
           </a:p>
           <a:p>
             <a:pPr lvl="4"/>
             <a:r>
-              <a:rPr lang="en-US" smtClean="0"/>
+              <a:rPr lang="en-US"/>
               <a:t>Fifth level</a:t>
             </a:r>
-            <a:endParaRPr lang="en-US"/>
           </a:p>
         </p:txBody>
       </p:sp>
@@ -826,7 +4345,7 @@
           <a:p>
             <a:fld id="{5BCAD085-E8A6-8845-BD4E-CB4CCA059FC4}" type="datetimeFigureOut">
               <a:rPr lang="en-US" smtClean="0"/>
-              <a:t>1/27/13</a:t>
+              <a:t>6/23/2026</a:t>
             </a:fld>
             <a:endParaRPr lang="en-US"/>
           </a:p>
@@ -929,10 +4448,9 @@
           </a:lstStyle>
           <a:p>
             <a:r>
-              <a:rPr lang="en-US" smtClean="0"/>
+              <a:rPr lang="en-US"/>
               <a:t>Click to edit Master title style</a:t>
             </a:r>
-            <a:endParaRPr lang="en-US"/>
           </a:p>
         </p:txBody>
       </p:sp>
@@ -1049,7 +4567,7 @@
           <a:p>
             <a:pPr lvl="0"/>
             <a:r>
-              <a:rPr lang="en-US" smtClean="0"/>
+              <a:rPr lang="en-US"/>
               <a:t>Click to edit Master text styles</a:t>
             </a:r>
           </a:p>
@@ -1072,7 +4590,7 @@
           <a:p>
             <a:fld id="{5BCAD085-E8A6-8845-BD4E-CB4CCA059FC4}" type="datetimeFigureOut">
               <a:rPr lang="en-US" smtClean="0"/>
-              <a:t>1/27/13</a:t>
+              <a:t>6/23/2026</a:t>
             </a:fld>
             <a:endParaRPr lang="en-US"/>
           </a:p>
@@ -1166,10 +4684,9 @@
           <a:lstStyle/>
           <a:p>
             <a:r>
-              <a:rPr lang="en-US" smtClean="0"/>
+              <a:rPr lang="en-US"/>
               <a:t>Click to edit Master title style</a:t>
             </a:r>
-            <a:endParaRPr lang="en-US"/>
           </a:p>
         </p:txBody>
       </p:sp>
@@ -1223,38 +4740,37 @@
           <a:p>
             <a:pPr lvl="0"/>
             <a:r>
-              <a:rPr lang="en-US" smtClean="0"/>
+              <a:rPr lang="en-US"/>
               <a:t>Click to edit Master text styles</a:t>
             </a:r>
           </a:p>
           <a:p>
             <a:pPr lvl="1"/>
             <a:r>
-              <a:rPr lang="en-US" smtClean="0"/>
+              <a:rPr lang="en-US"/>
               <a:t>Second level</a:t>
             </a:r>
           </a:p>
           <a:p>
             <a:pPr lvl="2"/>
             <a:r>
-              <a:rPr lang="en-US" smtClean="0"/>
+              <a:rPr lang="en-US"/>
               <a:t>Third level</a:t>
             </a:r>
           </a:p>
           <a:p>
             <a:pPr lvl="3"/>
             <a:r>
-              <a:rPr lang="en-US" smtClean="0"/>
+              <a:rPr lang="en-US"/>
               <a:t>Fourth level</a:t>
             </a:r>
           </a:p>
           <a:p>
             <a:pPr lvl="4"/>
             <a:r>
-              <a:rPr lang="en-US" smtClean="0"/>
+              <a:rPr lang="en-US"/>
               <a:t>Fifth level</a:t>
             </a:r>
-            <a:endParaRPr lang="en-US"/>
           </a:p>
         </p:txBody>
       </p:sp>
@@ -1308,38 +4824,37 @@
           <a:p>
             <a:pPr lvl="0"/>
             <a:r>
-              <a:rPr lang="en-US" smtClean="0"/>
+              <a:rPr lang="en-US"/>
               <a:t>Click to edit Master text styles</a:t>
             </a:r>
           </a:p>
           <a:p>
             <a:pPr lvl="1"/>
             <a:r>
-              <a:rPr lang="en-US" smtClean="0"/>
+              <a:rPr lang="en-US"/>
               <a:t>Second level</a:t>
             </a:r>
           </a:p>
           <a:p>
             <a:pPr lvl="2"/>
             <a:r>
-              <a:rPr lang="en-US" smtClean="0"/>
+              <a:rPr lang="en-US"/>
               <a:t>Third level</a:t>
             </a:r>
           </a:p>
           <a:p>
             <a:pPr lvl="3"/>
             <a:r>
-              <a:rPr lang="en-US" smtClean="0"/>
+              <a:rPr lang="en-US"/>
               <a:t>Fourth level</a:t>
             </a:r>
           </a:p>
           <a:p>
             <a:pPr lvl="4"/>
             <a:r>
-              <a:rPr lang="en-US" smtClean="0"/>
+              <a:rPr lang="en-US"/>
               <a:t>Fifth level</a:t>
             </a:r>
-            <a:endParaRPr lang="en-US"/>
           </a:p>
         </p:txBody>
       </p:sp>
@@ -1360,7 +4875,7 @@
           <a:p>
             <a:fld id="{5BCAD085-E8A6-8845-BD4E-CB4CCA059FC4}" type="datetimeFigureOut">
               <a:rPr lang="en-US" smtClean="0"/>
-              <a:t>1/27/13</a:t>
+              <a:t>6/23/2026</a:t>
             </a:fld>
             <a:endParaRPr lang="en-US"/>
           </a:p>
@@ -1458,10 +4973,9 @@
           </a:lstStyle>
           <a:p>
             <a:r>
-              <a:rPr lang="en-US" smtClean="0"/>
+              <a:rPr lang="en-US"/>
               <a:t>Click to edit Master title style</a:t>
             </a:r>
-            <a:endParaRPr lang="en-US"/>
           </a:p>
         </p:txBody>
       </p:sp>
@@ -1524,7 +5038,7 @@
           <a:p>
             <a:pPr lvl="0"/>
             <a:r>
-              <a:rPr lang="en-US" smtClean="0"/>
+              <a:rPr lang="en-US"/>
               <a:t>Click to edit Master text styles</a:t>
             </a:r>
           </a:p>
@@ -1580,38 +5094,37 @@
           <a:p>
             <a:pPr lvl="0"/>
             <a:r>
-              <a:rPr lang="en-US" smtClean="0"/>
+              <a:rPr lang="en-US"/>
               <a:t>Click to edit Master text styles</a:t>
             </a:r>
           </a:p>
           <a:p>
             <a:pPr lvl="1"/>
             <a:r>
-              <a:rPr lang="en-US" smtClean="0"/>
+              <a:rPr lang="en-US"/>
               <a:t>Second level</a:t>
             </a:r>
           </a:p>
           <a:p>
             <a:pPr lvl="2"/>
             <a:r>
-              <a:rPr lang="en-US" smtClean="0"/>
+              <a:rPr lang="en-US"/>
               <a:t>Third level</a:t>
             </a:r>
           </a:p>
           <a:p>
             <a:pPr lvl="3"/>
             <a:r>
-              <a:rPr lang="en-US" smtClean="0"/>
+              <a:rPr lang="en-US"/>
               <a:t>Fourth level</a:t>
             </a:r>
           </a:p>
           <a:p>
             <a:pPr lvl="4"/>
             <a:r>
-              <a:rPr lang="en-US" smtClean="0"/>
+              <a:rPr lang="en-US"/>
               <a:t>Fifth level</a:t>
             </a:r>
-            <a:endParaRPr lang="en-US"/>
           </a:p>
         </p:txBody>
       </p:sp>
@@ -1674,7 +5187,7 @@
           <a:p>
             <a:pPr lvl="0"/>
             <a:r>
-              <a:rPr lang="en-US" smtClean="0"/>
+              <a:rPr lang="en-US"/>
               <a:t>Click to edit Master text styles</a:t>
             </a:r>
           </a:p>
@@ -1730,38 +5243,37 @@
           <a:p>
             <a:pPr lvl="0"/>
             <a:r>
-              <a:rPr lang="en-US" smtClean="0"/>
+              <a:rPr lang="en-US"/>
               <a:t>Click to edit Master text styles</a:t>
             </a:r>
           </a:p>
           <a:p>
             <a:pPr lvl="1"/>
             <a:r>
-              <a:rPr lang="en-US" smtClean="0"/>
+              <a:rPr lang="en-US"/>
               <a:t>Second level</a:t>
             </a:r>
           </a:p>
           <a:p>
             <a:pPr lvl="2"/>
             <a:r>
-              <a:rPr lang="en-US" smtClean="0"/>
+              <a:rPr lang="en-US"/>
               <a:t>Third level</a:t>
             </a:r>
           </a:p>
           <a:p>
             <a:pPr lvl="3"/>
             <a:r>
-              <a:rPr lang="en-US" smtClean="0"/>
+              <a:rPr lang="en-US"/>
               <a:t>Fourth level</a:t>
             </a:r>
           </a:p>
           <a:p>
             <a:pPr lvl="4"/>
             <a:r>
-              <a:rPr lang="en-US" smtClean="0"/>
+              <a:rPr lang="en-US"/>
               <a:t>Fifth level</a:t>
             </a:r>
-            <a:endParaRPr lang="en-US"/>
           </a:p>
         </p:txBody>
       </p:sp>
@@ -1782,7 +5294,7 @@
           <a:p>
             <a:fld id="{5BCAD085-E8A6-8845-BD4E-CB4CCA059FC4}" type="datetimeFigureOut">
               <a:rPr lang="en-US" smtClean="0"/>
-              <a:t>1/27/13</a:t>
+              <a:t>6/23/2026</a:t>
             </a:fld>
             <a:endParaRPr lang="en-US"/>
           </a:p>
@@ -1876,10 +5388,9 @@
           <a:lstStyle/>
           <a:p>
             <a:r>
-              <a:rPr lang="en-US" smtClean="0"/>
+              <a:rPr lang="en-US"/>
               <a:t>Click to edit Master title style</a:t>
             </a:r>
-            <a:endParaRPr lang="en-US"/>
           </a:p>
         </p:txBody>
       </p:sp>
@@ -1900,7 +5411,7 @@
           <a:p>
             <a:fld id="{5BCAD085-E8A6-8845-BD4E-CB4CCA059FC4}" type="datetimeFigureOut">
               <a:rPr lang="en-US" smtClean="0"/>
-              <a:t>1/27/13</a:t>
+              <a:t>6/23/2026</a:t>
             </a:fld>
             <a:endParaRPr lang="en-US"/>
           </a:p>
@@ -1995,7 +5506,7 @@
           <a:p>
             <a:fld id="{5BCAD085-E8A6-8845-BD4E-CB4CCA059FC4}" type="datetimeFigureOut">
               <a:rPr lang="en-US" smtClean="0"/>
-              <a:t>1/27/13</a:t>
+              <a:t>6/23/2026</a:t>
             </a:fld>
             <a:endParaRPr lang="en-US"/>
           </a:p>
@@ -2098,10 +5609,9 @@
           </a:lstStyle>
           <a:p>
             <a:r>
-              <a:rPr lang="en-US" smtClean="0"/>
+              <a:rPr lang="en-US"/>
               <a:t>Click to edit Master title style</a:t>
             </a:r>
-            <a:endParaRPr lang="en-US"/>
           </a:p>
         </p:txBody>
       </p:sp>
@@ -2155,38 +5665,37 @@
           <a:p>
             <a:pPr lvl="0"/>
             <a:r>
-              <a:rPr lang="en-US" smtClean="0"/>
+              <a:rPr lang="en-US"/>
               <a:t>Click to edit Master text styles</a:t>
             </a:r>
           </a:p>
           <a:p>
             <a:pPr lvl="1"/>
             <a:r>
-              <a:rPr lang="en-US" smtClean="0"/>
+              <a:rPr lang="en-US"/>
               <a:t>Second level</a:t>
             </a:r>
           </a:p>
           <a:p>
             <a:pPr lvl="2"/>
             <a:r>
-              <a:rPr lang="en-US" smtClean="0"/>
+              <a:rPr lang="en-US"/>
               <a:t>Third level</a:t>
             </a:r>
           </a:p>
           <a:p>
             <a:pPr lvl="3"/>
             <a:r>
-              <a:rPr lang="en-US" smtClean="0"/>
+              <a:rPr lang="en-US"/>
               <a:t>Fourth level</a:t>
             </a:r>
           </a:p>
           <a:p>
             <a:pPr lvl="4"/>
             <a:r>
-              <a:rPr lang="en-US" smtClean="0"/>
+              <a:rPr lang="en-US"/>
               <a:t>Fifth level</a:t>
             </a:r>
-            <a:endParaRPr lang="en-US"/>
           </a:p>
         </p:txBody>
       </p:sp>
@@ -2249,7 +5758,7 @@
           <a:p>
             <a:pPr lvl="0"/>
             <a:r>
-              <a:rPr lang="en-US" smtClean="0"/>
+              <a:rPr lang="en-US"/>
               <a:t>Click to edit Master text styles</a:t>
             </a:r>
           </a:p>
@@ -2272,7 +5781,7 @@
           <a:p>
             <a:fld id="{5BCAD085-E8A6-8845-BD4E-CB4CCA059FC4}" type="datetimeFigureOut">
               <a:rPr lang="en-US" smtClean="0"/>
-              <a:t>1/27/13</a:t>
+              <a:t>6/23/2026</a:t>
             </a:fld>
             <a:endParaRPr lang="en-US"/>
           </a:p>
@@ -2375,10 +5884,9 @@
           </a:lstStyle>
           <a:p>
             <a:r>
-              <a:rPr lang="en-US" smtClean="0"/>
+              <a:rPr lang="en-US"/>
               <a:t>Click to edit Master title style</a:t>
             </a:r>
-            <a:endParaRPr lang="en-US"/>
           </a:p>
         </p:txBody>
       </p:sp>
@@ -2502,7 +6010,7 @@
           <a:p>
             <a:pPr lvl="0"/>
             <a:r>
-              <a:rPr lang="en-US" smtClean="0"/>
+              <a:rPr lang="en-US"/>
               <a:t>Click to edit Master text styles</a:t>
             </a:r>
           </a:p>
@@ -2525,7 +6033,7 @@
           <a:p>
             <a:fld id="{5BCAD085-E8A6-8845-BD4E-CB4CCA059FC4}" type="datetimeFigureOut">
               <a:rPr lang="en-US" smtClean="0"/>
-              <a:t>1/27/13</a:t>
+              <a:t>6/23/2026</a:t>
             </a:fld>
             <a:endParaRPr lang="en-US"/>
           </a:p>
@@ -2634,10 +6142,9 @@
           <a:lstStyle/>
           <a:p>
             <a:r>
-              <a:rPr lang="en-US" smtClean="0"/>
+              <a:rPr lang="en-US"/>
               <a:t>Click to edit Master title style</a:t>
             </a:r>
-            <a:endParaRPr lang="en-US"/>
           </a:p>
         </p:txBody>
       </p:sp>
@@ -2668,38 +6175,37 @@
           <a:p>
             <a:pPr lvl="0"/>
             <a:r>
-              <a:rPr lang="en-US" smtClean="0"/>
+              <a:rPr lang="en-US"/>
               <a:t>Click to edit Master text styles</a:t>
             </a:r>
           </a:p>
           <a:p>
             <a:pPr lvl="1"/>
             <a:r>
-              <a:rPr lang="en-US" smtClean="0"/>
+              <a:rPr lang="en-US"/>
               <a:t>Second level</a:t>
             </a:r>
           </a:p>
           <a:p>
             <a:pPr lvl="2"/>
             <a:r>
-              <a:rPr lang="en-US" smtClean="0"/>
+              <a:rPr lang="en-US"/>
               <a:t>Third level</a:t>
             </a:r>
           </a:p>
           <a:p>
             <a:pPr lvl="3"/>
             <a:r>
-              <a:rPr lang="en-US" smtClean="0"/>
+              <a:rPr lang="en-US"/>
               <a:t>Fourth level</a:t>
             </a:r>
           </a:p>
           <a:p>
             <a:pPr lvl="4"/>
             <a:r>
-              <a:rPr lang="en-US" smtClean="0"/>
+              <a:rPr lang="en-US"/>
               <a:t>Fifth level</a:t>
             </a:r>
-            <a:endParaRPr lang="en-US"/>
           </a:p>
         </p:txBody>
       </p:sp>
@@ -2738,7 +6244,7 @@
           <a:p>
             <a:fld id="{5BCAD085-E8A6-8845-BD4E-CB4CCA059FC4}" type="datetimeFigureOut">
               <a:rPr lang="en-US" smtClean="0"/>
-              <a:t>1/27/13</a:t>
+              <a:t>6/23/2026</a:t>
             </a:fld>
             <a:endParaRPr lang="en-US"/>
           </a:p>
@@ -3097,7 +6603,7 @@
 </file>
 
 <file path=ppt/slides/slide1.xml><?xml version="1.0" encoding="utf-8"?>
-<p:sld xmlns:a="http://schemas.openxmlformats.org/drawingml/2006/main" xmlns:p="http://schemas.openxmlformats.org/presentationml/2006/main" xmlns:r="http://schemas.openxmlformats.org/officeDocument/2006/relationships">
+<p:sld xmlns:a="http://schemas.openxmlformats.org/drawingml/2006/main" xmlns:r="http://schemas.openxmlformats.org/officeDocument/2006/relationships" xmlns:p="http://schemas.openxmlformats.org/presentationml/2006/main">
   <p:cSld>
     <p:bg>
       <p:bgPr>
@@ -3113,7 +6619,14 @@
         <p:cNvGrpSpPr/>
         <p:nvPr/>
       </p:nvGrpSpPr>
-      <p:grpSpPr/>
+      <p:grpSpPr>
+        <a:xfrm>
+          <a:off x="0" y="0"/>
+          <a:ext cx="0" cy="0"/>
+          <a:chOff x="0" y="0"/>
+          <a:chExt cx="0" cy="0"/>
+        </a:xfrm>
+      </p:grpSpPr>
       <p:sp>
         <p:nvSpPr>
           <p:cNvPr id="2" name="Rectangle 1"/>
@@ -3154,6 +6667,7 @@
           <a:lstStyle/>
           <a:p>
             <a:pPr algn="ctr"/>
+            <a:endParaRPr/>
           </a:p>
         </p:txBody>
       </p:sp>
@@ -3197,6 +6711,7 @@
           <a:lstStyle/>
           <a:p>
             <a:pPr algn="ctr"/>
+            <a:endParaRPr/>
           </a:p>
         </p:txBody>
       </p:sp>
@@ -3234,7 +6749,7 @@
           </a:fontRef>
         </p:style>
         <p:txBody>
-          <a:bodyPr rtlCol="0" anchor="ctr" wrap="square"/>
+          <a:bodyPr wrap="square" rtlCol="0" anchor="ctr"/>
           <a:lstStyle/>
           <a:p>
             <a:pPr algn="l"/>
@@ -3283,7 +6798,7 @@
           </a:fontRef>
         </p:style>
         <p:txBody>
-          <a:bodyPr rtlCol="0" anchor="ctr" wrap="square"/>
+          <a:bodyPr wrap="square" rtlCol="0" anchor="ctr"/>
           <a:lstStyle/>
           <a:p>
             <a:pPr algn="l"/>
@@ -3332,7 +6847,7 @@
           </a:fontRef>
         </p:style>
         <p:txBody>
-          <a:bodyPr rtlCol="0" anchor="ctr" wrap="square"/>
+          <a:bodyPr wrap="square" rtlCol="0" anchor="ctr"/>
           <a:lstStyle/>
           <a:p>
             <a:pPr algn="l"/>
@@ -3392,7 +6907,7 @@
           </a:fontRef>
         </p:style>
         <p:txBody>
-          <a:bodyPr rtlCol="0" anchor="t" wrap="square"/>
+          <a:bodyPr wrap="square" rtlCol="0" anchor="t"/>
           <a:lstStyle/>
           <a:p>
             <a:pPr algn="l"/>
@@ -3406,14 +6921,11 @@
             </a:r>
           </a:p>
           <a:p>
-            <a:r>
-              <a:rPr sz="600">
-                <a:solidFill>
-                  <a:srgbClr val="B9C4D1"/>
-                </a:solidFill>
-              </a:rPr>
-              <a:t/>
-            </a:r>
+            <a:endParaRPr sz="1400">
+              <a:solidFill>
+                <a:srgbClr val="B9C4D1"/>
+              </a:solidFill>
+            </a:endParaRPr>
           </a:p>
           <a:p>
             <a:pPr algn="l"/>
@@ -3462,7 +6974,7 @@
           </a:fontRef>
         </p:style>
         <p:txBody>
-          <a:bodyPr rtlCol="0" anchor="ctr" wrap="square"/>
+          <a:bodyPr wrap="square" rtlCol="0" anchor="ctr"/>
           <a:lstStyle/>
           <a:p>
             <a:pPr algn="l"/>
@@ -3486,7 +6998,7 @@
 </file>
 
 <file path=ppt/slides/slide10.xml><?xml version="1.0" encoding="utf-8"?>
-<p:sld xmlns:a="http://schemas.openxmlformats.org/drawingml/2006/main" xmlns:p="http://schemas.openxmlformats.org/presentationml/2006/main" xmlns:r="http://schemas.openxmlformats.org/officeDocument/2006/relationships">
+<p:sld xmlns:a="http://schemas.openxmlformats.org/drawingml/2006/main" xmlns:r="http://schemas.openxmlformats.org/officeDocument/2006/relationships" xmlns:p="http://schemas.openxmlformats.org/presentationml/2006/main">
   <p:cSld>
     <p:bg>
       <p:bgPr>
@@ -3502,7 +7014,14 @@
         <p:cNvGrpSpPr/>
         <p:nvPr/>
       </p:nvGrpSpPr>
-      <p:grpSpPr/>
+      <p:grpSpPr>
+        <a:xfrm>
+          <a:off x="0" y="0"/>
+          <a:ext cx="0" cy="0"/>
+          <a:chOff x="0" y="0"/>
+          <a:chExt cx="0" cy="0"/>
+        </a:xfrm>
+      </p:grpSpPr>
       <p:sp>
         <p:nvSpPr>
           <p:cNvPr id="2" name="Rectangle 1"/>
@@ -3543,6 +7062,7 @@
           <a:lstStyle/>
           <a:p>
             <a:pPr algn="ctr"/>
+            <a:endParaRPr/>
           </a:p>
         </p:txBody>
       </p:sp>
@@ -3580,7 +7100,7 @@
           </a:fontRef>
         </p:style>
         <p:txBody>
-          <a:bodyPr rtlCol="0" anchor="ctr" wrap="square"/>
+          <a:bodyPr wrap="square" rtlCol="0" anchor="ctr"/>
           <a:lstStyle/>
           <a:p>
             <a:pPr algn="l"/>
@@ -3648,6 +7168,7 @@
           <a:lstStyle/>
           <a:p>
             <a:pPr algn="ctr"/>
+            <a:endParaRPr/>
           </a:p>
         </p:txBody>
       </p:sp>
@@ -3691,6 +7212,7 @@
           <a:lstStyle/>
           <a:p>
             <a:pPr algn="ctr"/>
+            <a:endParaRPr/>
           </a:p>
         </p:txBody>
       </p:sp>
@@ -3728,7 +7250,7 @@
           </a:fontRef>
         </p:style>
         <p:txBody>
-          <a:bodyPr rtlCol="0" anchor="ctr" wrap="square"/>
+          <a:bodyPr wrap="square" rtlCol="0" anchor="ctr"/>
           <a:lstStyle/>
           <a:p>
             <a:pPr algn="l"/>
@@ -3777,7 +7299,7 @@
           </a:fontRef>
         </p:style>
         <p:txBody>
-          <a:bodyPr rtlCol="0" anchor="t" wrap="square"/>
+          <a:bodyPr wrap="square" rtlCol="0" anchor="t"/>
           <a:lstStyle/>
           <a:p>
             <a:pPr algn="l"/>
@@ -3791,14 +7313,29 @@
             </a:r>
           </a:p>
           <a:p>
-            <a:r>
-              <a:rPr sz="300">
+            <a:endParaRPr sz="1100">
+              <a:solidFill>
+                <a:srgbClr val="2C3E50"/>
+              </a:solidFill>
+            </a:endParaRPr>
+          </a:p>
+          <a:p>
+            <a:pPr algn="l"/>
+            <a:r>
+              <a:rPr sz="1100">
                 <a:solidFill>
                   <a:srgbClr val="2C3E50"/>
                 </a:solidFill>
               </a:rPr>
-              <a:t/>
-            </a:r>
+              <a:t>•  Analytics - charts by bucket, type, level, maturity</a:t>
+            </a:r>
+          </a:p>
+          <a:p>
+            <a:endParaRPr sz="1100">
+              <a:solidFill>
+                <a:srgbClr val="2C3E50"/>
+              </a:solidFill>
+            </a:endParaRPr>
           </a:p>
           <a:p>
             <a:pPr algn="l"/>
@@ -3808,60 +7345,33 @@
                   <a:srgbClr val="2C3E50"/>
                 </a:solidFill>
               </a:rPr>
-              <a:t>•  Analytics - charts by bucket, type, level, maturity</a:t>
-            </a:r>
-          </a:p>
-          <a:p>
-            <a:r>
-              <a:rPr sz="300">
+              <a:t>•  Full Table - all 40 fields, sortable</a:t>
+            </a:r>
+          </a:p>
+          <a:p>
+            <a:endParaRPr sz="1100">
+              <a:solidFill>
+                <a:srgbClr val="2C3E50"/>
+              </a:solidFill>
+            </a:endParaRPr>
+          </a:p>
+          <a:p>
+            <a:pPr algn="l"/>
+            <a:r>
+              <a:rPr sz="1100">
                 <a:solidFill>
                   <a:srgbClr val="2C3E50"/>
                 </a:solidFill>
               </a:rPr>
-              <a:t/>
-            </a:r>
-          </a:p>
-          <a:p>
-            <a:pPr algn="l"/>
-            <a:r>
-              <a:rPr sz="1100">
-                <a:solidFill>
-                  <a:srgbClr val="2C3E50"/>
-                </a:solidFill>
-              </a:rPr>
-              <a:t>•  Full Table - all 40 fields, sortable</a:t>
-            </a:r>
-          </a:p>
-          <a:p>
-            <a:r>
-              <a:rPr sz="300">
-                <a:solidFill>
-                  <a:srgbClr val="2C3E50"/>
-                </a:solidFill>
-              </a:rPr>
-              <a:t/>
-            </a:r>
-          </a:p>
-          <a:p>
-            <a:pPr algn="l"/>
-            <a:r>
-              <a:rPr sz="1100">
-                <a:solidFill>
-                  <a:srgbClr val="2C3E50"/>
-                </a:solidFill>
-              </a:rPr>
               <a:t>•  Trends - new vs. carried-over, week-over-week movement</a:t>
             </a:r>
           </a:p>
           <a:p>
-            <a:r>
-              <a:rPr sz="300">
-                <a:solidFill>
-                  <a:srgbClr val="2C3E50"/>
-                </a:solidFill>
-              </a:rPr>
-              <a:t/>
-            </a:r>
+            <a:endParaRPr sz="1100">
+              <a:solidFill>
+                <a:srgbClr val="2C3E50"/>
+              </a:solidFill>
+            </a:endParaRPr>
           </a:p>
           <a:p>
             <a:pPr algn="l"/>
@@ -3918,6 +7428,7 @@
           <a:lstStyle/>
           <a:p>
             <a:pPr algn="ctr"/>
+            <a:endParaRPr/>
           </a:p>
         </p:txBody>
       </p:sp>
@@ -3961,6 +7472,7 @@
           <a:lstStyle/>
           <a:p>
             <a:pPr algn="ctr"/>
+            <a:endParaRPr/>
           </a:p>
         </p:txBody>
       </p:sp>
@@ -3998,7 +7510,7 @@
           </a:fontRef>
         </p:style>
         <p:txBody>
-          <a:bodyPr rtlCol="0" anchor="ctr" wrap="square"/>
+          <a:bodyPr wrap="square" rtlCol="0" anchor="ctr"/>
           <a:lstStyle/>
           <a:p>
             <a:pPr algn="l"/>
@@ -4047,7 +7559,7 @@
           </a:fontRef>
         </p:style>
         <p:txBody>
-          <a:bodyPr rtlCol="0" anchor="t" wrap="square"/>
+          <a:bodyPr wrap="square" rtlCol="0" anchor="t"/>
           <a:lstStyle/>
           <a:p>
             <a:pPr algn="l"/>
@@ -4061,14 +7573,29 @@
             </a:r>
           </a:p>
           <a:p>
-            <a:r>
-              <a:rPr sz="300">
+            <a:endParaRPr sz="1100">
+              <a:solidFill>
+                <a:srgbClr val="2C3E50"/>
+              </a:solidFill>
+            </a:endParaRPr>
+          </a:p>
+          <a:p>
+            <a:pPr algn="l"/>
+            <a:r>
+              <a:rPr sz="1100">
                 <a:solidFill>
                   <a:srgbClr val="2C3E50"/>
                 </a:solidFill>
               </a:rPr>
-              <a:t/>
-            </a:r>
+              <a:t>•  New vs. carried-from-prior month</a:t>
+            </a:r>
+          </a:p>
+          <a:p>
+            <a:endParaRPr sz="1100">
+              <a:solidFill>
+                <a:srgbClr val="2C3E50"/>
+              </a:solidFill>
+            </a:endParaRPr>
           </a:p>
           <a:p>
             <a:pPr algn="l"/>
@@ -4078,60 +7605,33 @@
                   <a:srgbClr val="2C3E50"/>
                 </a:solidFill>
               </a:rPr>
-              <a:t>•  New vs. carried-from-prior month</a:t>
-            </a:r>
-          </a:p>
-          <a:p>
-            <a:r>
-              <a:rPr sz="300">
+              <a:t>•  Per-week bucket distribution</a:t>
+            </a:r>
+          </a:p>
+          <a:p>
+            <a:endParaRPr sz="1100">
+              <a:solidFill>
+                <a:srgbClr val="2C3E50"/>
+              </a:solidFill>
+            </a:endParaRPr>
+          </a:p>
+          <a:p>
+            <a:pPr algn="l"/>
+            <a:r>
+              <a:rPr sz="1100">
                 <a:solidFill>
                   <a:srgbClr val="2C3E50"/>
                 </a:solidFill>
               </a:rPr>
-              <a:t/>
-            </a:r>
-          </a:p>
-          <a:p>
-            <a:pPr algn="l"/>
-            <a:r>
-              <a:rPr sz="1100">
-                <a:solidFill>
-                  <a:srgbClr val="2C3E50"/>
-                </a:solidFill>
-              </a:rPr>
-              <a:t>•  Per-week bucket distribution</a:t>
-            </a:r>
-          </a:p>
-          <a:p>
-            <a:r>
-              <a:rPr sz="300">
-                <a:solidFill>
-                  <a:srgbClr val="2C3E50"/>
-                </a:solidFill>
-              </a:rPr>
-              <a:t/>
-            </a:r>
-          </a:p>
-          <a:p>
-            <a:pPr algn="l"/>
-            <a:r>
-              <a:rPr sz="1100">
-                <a:solidFill>
-                  <a:srgbClr val="2C3E50"/>
-                </a:solidFill>
-              </a:rPr>
               <a:t>•  Signal / level momentum (escalations)</a:t>
             </a:r>
           </a:p>
           <a:p>
-            <a:r>
-              <a:rPr sz="300">
-                <a:solidFill>
-                  <a:srgbClr val="2C3E50"/>
-                </a:solidFill>
-              </a:rPr>
-              <a:t/>
-            </a:r>
+            <a:endParaRPr sz="1100">
+              <a:solidFill>
+                <a:srgbClr val="2C3E50"/>
+              </a:solidFill>
+            </a:endParaRPr>
           </a:p>
           <a:p>
             <a:pPr algn="l"/>
@@ -4188,6 +7688,7 @@
           <a:lstStyle/>
           <a:p>
             <a:pPr algn="ctr"/>
+            <a:endParaRPr/>
           </a:p>
         </p:txBody>
       </p:sp>
@@ -4231,6 +7732,7 @@
           <a:lstStyle/>
           <a:p>
             <a:pPr algn="ctr"/>
+            <a:endParaRPr/>
           </a:p>
         </p:txBody>
       </p:sp>
@@ -4268,7 +7770,7 @@
           </a:fontRef>
         </p:style>
         <p:txBody>
-          <a:bodyPr rtlCol="0" anchor="ctr" wrap="square"/>
+          <a:bodyPr wrap="square" rtlCol="0" anchor="ctr"/>
           <a:lstStyle/>
           <a:p>
             <a:pPr algn="l"/>
@@ -4317,7 +7819,7 @@
           </a:fontRef>
         </p:style>
         <p:txBody>
-          <a:bodyPr rtlCol="0" anchor="t" wrap="square"/>
+          <a:bodyPr wrap="square" rtlCol="0" anchor="t"/>
           <a:lstStyle/>
           <a:p>
             <a:pPr algn="l"/>
@@ -4331,35 +7833,29 @@
             </a:r>
           </a:p>
           <a:p>
-            <a:r>
-              <a:rPr sz="300">
+            <a:endParaRPr sz="1100">
+              <a:solidFill>
+                <a:srgbClr val="2C3E50"/>
+              </a:solidFill>
+            </a:endParaRPr>
+          </a:p>
+          <a:p>
+            <a:pPr algn="l"/>
+            <a:r>
+              <a:rPr sz="1100">
                 <a:solidFill>
                   <a:srgbClr val="2C3E50"/>
                 </a:solidFill>
               </a:rPr>
-              <a:t/>
-            </a:r>
-          </a:p>
-          <a:p>
-            <a:pPr algn="l"/>
-            <a:r>
-              <a:rPr sz="1100">
-                <a:solidFill>
-                  <a:srgbClr val="2C3E50"/>
-                </a:solidFill>
-              </a:rPr>
               <a:t>•  sharepoint_payload.json - draft SharePoint rows</a:t>
             </a:r>
           </a:p>
           <a:p>
-            <a:r>
-              <a:rPr sz="300">
-                <a:solidFill>
-                  <a:srgbClr val="2C3E50"/>
-                </a:solidFill>
-              </a:rPr>
-              <a:t/>
-            </a:r>
+            <a:endParaRPr sz="1100">
+              <a:solidFill>
+                <a:srgbClr val="2C3E50"/>
+              </a:solidFill>
+            </a:endParaRPr>
           </a:p>
           <a:p>
             <a:pPr algn="l"/>
@@ -4416,6 +7912,7 @@
           <a:lstStyle/>
           <a:p>
             <a:pPr algn="ctr"/>
+            <a:endParaRPr/>
           </a:p>
         </p:txBody>
       </p:sp>
@@ -4459,6 +7956,7 @@
           <a:lstStyle/>
           <a:p>
             <a:pPr algn="ctr"/>
+            <a:endParaRPr/>
           </a:p>
         </p:txBody>
       </p:sp>
@@ -4496,7 +7994,7 @@
           </a:fontRef>
         </p:style>
         <p:txBody>
-          <a:bodyPr rtlCol="0" anchor="ctr" wrap="square"/>
+          <a:bodyPr wrap="square" rtlCol="0" anchor="ctr"/>
           <a:lstStyle/>
           <a:p>
             <a:pPr algn="l"/>
@@ -4545,7 +8043,7 @@
           </a:fontRef>
         </p:style>
         <p:txBody>
-          <a:bodyPr rtlCol="0" anchor="t" wrap="square"/>
+          <a:bodyPr wrap="square" rtlCol="0" anchor="t"/>
           <a:lstStyle/>
           <a:p>
             <a:pPr algn="l"/>
@@ -4559,35 +8057,29 @@
             </a:r>
           </a:p>
           <a:p>
-            <a:r>
-              <a:rPr sz="300">
+            <a:endParaRPr sz="1100">
+              <a:solidFill>
+                <a:srgbClr val="2C3E50"/>
+              </a:solidFill>
+            </a:endParaRPr>
+          </a:p>
+          <a:p>
+            <a:pPr algn="l"/>
+            <a:r>
+              <a:rPr sz="1100">
                 <a:solidFill>
                   <a:srgbClr val="2C3E50"/>
                 </a:solidFill>
               </a:rPr>
-              <a:t/>
-            </a:r>
-          </a:p>
-          <a:p>
-            <a:pPr algn="l"/>
-            <a:r>
-              <a:rPr sz="1100">
-                <a:solidFill>
-                  <a:srgbClr val="2C3E50"/>
-                </a:solidFill>
-              </a:rPr>
               <a:t>•  Demo backlog, KB candidates, next steps</a:t>
             </a:r>
           </a:p>
           <a:p>
-            <a:r>
-              <a:rPr sz="300">
-                <a:solidFill>
-                  <a:srgbClr val="2C3E50"/>
-                </a:solidFill>
-              </a:rPr>
-              <a:t/>
-            </a:r>
+            <a:endParaRPr sz="1100">
+              <a:solidFill>
+                <a:srgbClr val="2C3E50"/>
+              </a:solidFill>
+            </a:endParaRPr>
           </a:p>
           <a:p>
             <a:pPr algn="l"/>
@@ -4636,7 +8128,7 @@
           </a:fontRef>
         </p:style>
         <p:txBody>
-          <a:bodyPr rtlCol="0" anchor="ctr" wrap="square"/>
+          <a:bodyPr wrap="square" rtlCol="0" anchor="ctr"/>
           <a:lstStyle/>
           <a:p>
             <a:pPr algn="l"/>
@@ -4660,7 +8152,7 @@
 </file>
 
 <file path=ppt/slides/slide11.xml><?xml version="1.0" encoding="utf-8"?>
-<p:sld xmlns:a="http://schemas.openxmlformats.org/drawingml/2006/main" xmlns:p="http://schemas.openxmlformats.org/presentationml/2006/main" xmlns:r="http://schemas.openxmlformats.org/officeDocument/2006/relationships">
+<p:sld xmlns:a="http://schemas.openxmlformats.org/drawingml/2006/main" xmlns:r="http://schemas.openxmlformats.org/officeDocument/2006/relationships" xmlns:p="http://schemas.openxmlformats.org/presentationml/2006/main">
   <p:cSld>
     <p:bg>
       <p:bgPr>
@@ -4676,7 +8168,14 @@
         <p:cNvGrpSpPr/>
         <p:nvPr/>
       </p:nvGrpSpPr>
-      <p:grpSpPr/>
+      <p:grpSpPr>
+        <a:xfrm>
+          <a:off x="0" y="0"/>
+          <a:ext cx="0" cy="0"/>
+          <a:chOff x="0" y="0"/>
+          <a:chExt cx="0" cy="0"/>
+        </a:xfrm>
+      </p:grpSpPr>
       <p:sp>
         <p:nvSpPr>
           <p:cNvPr id="2" name="Rectangle 1"/>
@@ -4717,6 +8216,7 @@
           <a:lstStyle/>
           <a:p>
             <a:pPr algn="ctr"/>
+            <a:endParaRPr/>
           </a:p>
         </p:txBody>
       </p:sp>
@@ -4754,7 +8254,7 @@
           </a:fontRef>
         </p:style>
         <p:txBody>
-          <a:bodyPr rtlCol="0" anchor="ctr" wrap="square"/>
+          <a:bodyPr wrap="square" rtlCol="0" anchor="ctr"/>
           <a:lstStyle/>
           <a:p>
             <a:pPr algn="l"/>
@@ -4814,7 +8314,7 @@
           </a:fontRef>
         </p:style>
         <p:txBody>
-          <a:bodyPr rtlCol="0" anchor="ctr" wrap="square"/>
+          <a:bodyPr wrap="square" rtlCol="0" anchor="ctr"/>
           <a:lstStyle/>
           <a:p>
             <a:pPr algn="l"/>
@@ -4871,6 +8371,7 @@
           <a:lstStyle/>
           <a:p>
             <a:pPr algn="ctr"/>
+            <a:endParaRPr/>
           </a:p>
         </p:txBody>
       </p:sp>
@@ -4914,6 +8415,7 @@
           <a:lstStyle/>
           <a:p>
             <a:pPr algn="ctr"/>
+            <a:endParaRPr/>
           </a:p>
         </p:txBody>
       </p:sp>
@@ -4951,7 +8453,7 @@
           </a:fontRef>
         </p:style>
         <p:txBody>
-          <a:bodyPr rtlCol="0" anchor="ctr" wrap="square"/>
+          <a:bodyPr wrap="square" rtlCol="0" anchor="ctr"/>
           <a:lstStyle/>
           <a:p>
             <a:pPr algn="l"/>
@@ -5000,7 +8502,7 @@
           </a:fontRef>
         </p:style>
         <p:txBody>
-          <a:bodyPr rtlCol="0" anchor="t" wrap="square"/>
+          <a:bodyPr wrap="square" rtlCol="0" anchor="t"/>
           <a:lstStyle/>
           <a:p>
             <a:pPr algn="l"/>
@@ -5014,14 +8516,29 @@
             </a:r>
           </a:p>
           <a:p>
-            <a:r>
-              <a:rPr sz="300">
+            <a:endParaRPr sz="1100">
+              <a:solidFill>
+                <a:srgbClr val="2C3E50"/>
+              </a:solidFill>
+            </a:endParaRPr>
+          </a:p>
+          <a:p>
+            <a:pPr algn="l"/>
+            <a:r>
+              <a:rPr sz="1100">
                 <a:solidFill>
                   <a:srgbClr val="2C3E50"/>
                 </a:solidFill>
               </a:rPr>
-              <a:t/>
-            </a:r>
+              <a:t>•  Each approved opportunity becomes a tracked ADO Issue</a:t>
+            </a:r>
+          </a:p>
+          <a:p>
+            <a:endParaRPr sz="1100">
+              <a:solidFill>
+                <a:srgbClr val="2C3E50"/>
+              </a:solidFill>
+            </a:endParaRPr>
           </a:p>
           <a:p>
             <a:pPr algn="l"/>
@@ -5031,39 +8548,15 @@
                   <a:srgbClr val="2C3E50"/>
                 </a:solidFill>
               </a:rPr>
-              <a:t>•  Each approved opportunity becomes a tracked ADO Issue</a:t>
-            </a:r>
-          </a:p>
-          <a:p>
-            <a:r>
-              <a:rPr sz="300">
-                <a:solidFill>
-                  <a:srgbClr val="2C3E50"/>
-                </a:solidFill>
-              </a:rPr>
-              <a:t/>
-            </a:r>
-          </a:p>
-          <a:p>
-            <a:pPr algn="l"/>
-            <a:r>
-              <a:rPr sz="1100">
-                <a:solidFill>
-                  <a:srgbClr val="2C3E50"/>
-                </a:solidFill>
-              </a:rPr>
               <a:t>•  Rich description: problem, evidence, next step, metadata</a:t>
             </a:r>
           </a:p>
           <a:p>
-            <a:r>
-              <a:rPr sz="300">
-                <a:solidFill>
-                  <a:srgbClr val="2C3E50"/>
-                </a:solidFill>
-              </a:rPr>
-              <a:t/>
-            </a:r>
+            <a:endParaRPr sz="1100">
+              <a:solidFill>
+                <a:srgbClr val="2C3E50"/>
+              </a:solidFill>
+            </a:endParaRPr>
           </a:p>
           <a:p>
             <a:pPr algn="l"/>
@@ -5120,6 +8613,7 @@
           <a:lstStyle/>
           <a:p>
             <a:pPr algn="ctr"/>
+            <a:endParaRPr/>
           </a:p>
         </p:txBody>
       </p:sp>
@@ -5163,6 +8657,7 @@
           <a:lstStyle/>
           <a:p>
             <a:pPr algn="ctr"/>
+            <a:endParaRPr/>
           </a:p>
         </p:txBody>
       </p:sp>
@@ -5200,7 +8695,7 @@
           </a:fontRef>
         </p:style>
         <p:txBody>
-          <a:bodyPr rtlCol="0" anchor="ctr" wrap="square"/>
+          <a:bodyPr wrap="square" rtlCol="0" anchor="ctr"/>
           <a:lstStyle/>
           <a:p>
             <a:pPr algn="l"/>
@@ -5249,7 +8744,7 @@
           </a:fontRef>
         </p:style>
         <p:txBody>
-          <a:bodyPr rtlCol="0" anchor="t" wrap="square"/>
+          <a:bodyPr wrap="square" rtlCol="0" anchor="t"/>
           <a:lstStyle/>
           <a:p>
             <a:pPr algn="l"/>
@@ -5263,14 +8758,29 @@
             </a:r>
           </a:p>
           <a:p>
-            <a:r>
-              <a:rPr sz="300">
+            <a:endParaRPr sz="1100">
+              <a:solidFill>
+                <a:srgbClr val="2C3E50"/>
+              </a:solidFill>
+            </a:endParaRPr>
+          </a:p>
+          <a:p>
+            <a:pPr algn="l"/>
+            <a:r>
+              <a:rPr sz="1100">
                 <a:solidFill>
                   <a:srgbClr val="2C3E50"/>
                 </a:solidFill>
               </a:rPr>
-              <a:t/>
-            </a:r>
+              <a:t>•  To Do / Doing / Done, assignee, iteration</a:t>
+            </a:r>
+          </a:p>
+          <a:p>
+            <a:endParaRPr sz="1100">
+              <a:solidFill>
+                <a:srgbClr val="2C3E50"/>
+              </a:solidFill>
+            </a:endParaRPr>
           </a:p>
           <a:p>
             <a:pPr algn="l"/>
@@ -5280,39 +8790,15 @@
                   <a:srgbClr val="2C3E50"/>
                 </a:solidFill>
               </a:rPr>
-              <a:t>•  To Do / Doing / Done, assignee, iteration</a:t>
-            </a:r>
-          </a:p>
-          <a:p>
-            <a:r>
-              <a:rPr sz="300">
-                <a:solidFill>
-                  <a:srgbClr val="2C3E50"/>
-                </a:solidFill>
-              </a:rPr>
-              <a:t/>
-            </a:r>
-          </a:p>
-          <a:p>
-            <a:pPr algn="l"/>
-            <a:r>
-              <a:rPr sz="1100">
-                <a:solidFill>
-                  <a:srgbClr val="2C3E50"/>
-                </a:solidFill>
-              </a:rPr>
               <a:t>•  Read-only - never creates or edits items</a:t>
             </a:r>
           </a:p>
           <a:p>
-            <a:r>
-              <a:rPr sz="300">
-                <a:solidFill>
-                  <a:srgbClr val="2C3E50"/>
-                </a:solidFill>
-              </a:rPr>
-              <a:t/>
-            </a:r>
+            <a:endParaRPr sz="1100">
+              <a:solidFill>
+                <a:srgbClr val="2C3E50"/>
+              </a:solidFill>
+            </a:endParaRPr>
           </a:p>
           <a:p>
             <a:pPr algn="l"/>
@@ -5369,6 +8855,7 @@
           <a:lstStyle/>
           <a:p>
             <a:pPr algn="ctr"/>
+            <a:endParaRPr/>
           </a:p>
         </p:txBody>
       </p:sp>
@@ -5412,6 +8899,7 @@
           <a:lstStyle/>
           <a:p>
             <a:pPr algn="ctr"/>
+            <a:endParaRPr/>
           </a:p>
         </p:txBody>
       </p:sp>
@@ -5449,7 +8937,7 @@
           </a:fontRef>
         </p:style>
         <p:txBody>
-          <a:bodyPr rtlCol="0" anchor="ctr" wrap="square"/>
+          <a:bodyPr wrap="square" rtlCol="0" anchor="ctr"/>
           <a:lstStyle/>
           <a:p>
             <a:pPr algn="l"/>
@@ -5498,7 +8986,7 @@
           </a:fontRef>
         </p:style>
         <p:txBody>
-          <a:bodyPr rtlCol="0" anchor="t" wrap="square"/>
+          <a:bodyPr wrap="square" rtlCol="0" anchor="t"/>
           <a:lstStyle/>
           <a:p>
             <a:pPr algn="l"/>
@@ -5512,14 +9000,29 @@
             </a:r>
           </a:p>
           <a:p>
-            <a:r>
-              <a:rPr sz="300">
+            <a:endParaRPr sz="1100">
+              <a:solidFill>
+                <a:srgbClr val="2C3E50"/>
+              </a:solidFill>
+            </a:endParaRPr>
+          </a:p>
+          <a:p>
+            <a:pPr algn="l"/>
+            <a:r>
+              <a:rPr sz="1100">
                 <a:solidFill>
                   <a:srgbClr val="2C3E50"/>
                 </a:solidFill>
               </a:rPr>
-              <a:t/>
-            </a:r>
+              <a:t>•  Highlights items that moved in last 7 days</a:t>
+            </a:r>
+          </a:p>
+          <a:p>
+            <a:endParaRPr sz="1100">
+              <a:solidFill>
+                <a:srgbClr val="2C3E50"/>
+              </a:solidFill>
+            </a:endParaRPr>
           </a:p>
           <a:p>
             <a:pPr algn="l"/>
@@ -5529,39 +9032,15 @@
                   <a:srgbClr val="2C3E50"/>
                 </a:solidFill>
               </a:rPr>
-              <a:t>•  Highlights items that moved in last 7 days</a:t>
-            </a:r>
-          </a:p>
-          <a:p>
-            <a:r>
-              <a:rPr sz="300">
-                <a:solidFill>
-                  <a:srgbClr val="2C3E50"/>
-                </a:solidFill>
-              </a:rPr>
-              <a:t/>
-            </a:r>
-          </a:p>
-          <a:p>
-            <a:pPr algn="l"/>
-            <a:r>
-              <a:rPr sz="1100">
-                <a:solidFill>
-                  <a:srgbClr val="2C3E50"/>
-                </a:solidFill>
-              </a:rPr>
               <a:t>•  Direct links to the ADO work items</a:t>
             </a:r>
           </a:p>
           <a:p>
-            <a:r>
-              <a:rPr sz="300">
-                <a:solidFill>
-                  <a:srgbClr val="2C3E50"/>
-                </a:solidFill>
-              </a:rPr>
-              <a:t/>
-            </a:r>
+            <a:endParaRPr sz="1100">
+              <a:solidFill>
+                <a:srgbClr val="2C3E50"/>
+              </a:solidFill>
+            </a:endParaRPr>
           </a:p>
           <a:p>
             <a:pPr algn="l"/>
@@ -5612,7 +9091,7 @@
           </a:fontRef>
         </p:style>
         <p:txBody>
-          <a:bodyPr rtlCol="0" anchor="ctr" wrap="square"/>
+          <a:bodyPr wrap="square" rtlCol="0" anchor="ctr"/>
           <a:lstStyle/>
           <a:p>
             <a:pPr algn="ctr"/>
@@ -5661,7 +9140,7 @@
           </a:fontRef>
         </p:style>
         <p:txBody>
-          <a:bodyPr rtlCol="0" anchor="ctr" wrap="square"/>
+          <a:bodyPr wrap="square" rtlCol="0" anchor="ctr"/>
           <a:lstStyle/>
           <a:p>
             <a:pPr algn="l"/>
@@ -5685,7 +9164,7 @@
 </file>
 
 <file path=ppt/slides/slide12.xml><?xml version="1.0" encoding="utf-8"?>
-<p:sld xmlns:a="http://schemas.openxmlformats.org/drawingml/2006/main" xmlns:p="http://schemas.openxmlformats.org/presentationml/2006/main" xmlns:r="http://schemas.openxmlformats.org/officeDocument/2006/relationships">
+<p:sld xmlns:a="http://schemas.openxmlformats.org/drawingml/2006/main" xmlns:r="http://schemas.openxmlformats.org/officeDocument/2006/relationships" xmlns:p="http://schemas.openxmlformats.org/presentationml/2006/main">
   <p:cSld>
     <p:bg>
       <p:bgPr>
@@ -5701,7 +9180,14 @@
         <p:cNvGrpSpPr/>
         <p:nvPr/>
       </p:nvGrpSpPr>
-      <p:grpSpPr/>
+      <p:grpSpPr>
+        <a:xfrm>
+          <a:off x="0" y="0"/>
+          <a:ext cx="0" cy="0"/>
+          <a:chOff x="0" y="0"/>
+          <a:chExt cx="0" cy="0"/>
+        </a:xfrm>
+      </p:grpSpPr>
       <p:sp>
         <p:nvSpPr>
           <p:cNvPr id="2" name="Rectangle 1"/>
@@ -5742,6 +9228,7 @@
           <a:lstStyle/>
           <a:p>
             <a:pPr algn="ctr"/>
+            <a:endParaRPr/>
           </a:p>
         </p:txBody>
       </p:sp>
@@ -5779,7 +9266,7 @@
           </a:fontRef>
         </p:style>
         <p:txBody>
-          <a:bodyPr rtlCol="0" anchor="ctr" wrap="square"/>
+          <a:bodyPr wrap="square" rtlCol="0" anchor="ctr"/>
           <a:lstStyle/>
           <a:p>
             <a:pPr algn="l"/>
@@ -5828,7 +9315,7 @@
           </a:fontRef>
         </p:style>
         <p:txBody>
-          <a:bodyPr rtlCol="0" anchor="ctr" wrap="square"/>
+          <a:bodyPr wrap="square" rtlCol="0" anchor="ctr"/>
           <a:lstStyle/>
           <a:p>
             <a:pPr algn="l"/>
@@ -5877,7 +9364,7 @@
           </a:fontRef>
         </p:style>
         <p:txBody>
-          <a:bodyPr rtlCol="0" anchor="ctr" wrap="square"/>
+          <a:bodyPr wrap="square" rtlCol="0" anchor="ctr"/>
           <a:lstStyle/>
           <a:p>
             <a:pPr algn="l"/>
@@ -5901,7 +9388,7 @@
 </file>
 
 <file path=ppt/slides/slide13.xml><?xml version="1.0" encoding="utf-8"?>
-<p:sld xmlns:a="http://schemas.openxmlformats.org/drawingml/2006/main" xmlns:p="http://schemas.openxmlformats.org/presentationml/2006/main" xmlns:r="http://schemas.openxmlformats.org/officeDocument/2006/relationships">
+<p:sld xmlns:a="http://schemas.openxmlformats.org/drawingml/2006/main" xmlns:r="http://schemas.openxmlformats.org/officeDocument/2006/relationships" xmlns:p="http://schemas.openxmlformats.org/presentationml/2006/main">
   <p:cSld>
     <p:bg>
       <p:bgPr>
@@ -5917,7 +9404,14 @@
         <p:cNvGrpSpPr/>
         <p:nvPr/>
       </p:nvGrpSpPr>
-      <p:grpSpPr/>
+      <p:grpSpPr>
+        <a:xfrm>
+          <a:off x="0" y="0"/>
+          <a:ext cx="0" cy="0"/>
+          <a:chOff x="0" y="0"/>
+          <a:chExt cx="0" cy="0"/>
+        </a:xfrm>
+      </p:grpSpPr>
       <p:sp>
         <p:nvSpPr>
           <p:cNvPr id="2" name="Rectangle 1"/>
@@ -5958,6 +9452,7 @@
           <a:lstStyle/>
           <a:p>
             <a:pPr algn="ctr"/>
+            <a:endParaRPr/>
           </a:p>
         </p:txBody>
       </p:sp>
@@ -5995,7 +9490,7 @@
           </a:fontRef>
         </p:style>
         <p:txBody>
-          <a:bodyPr rtlCol="0" anchor="ctr" wrap="square"/>
+          <a:bodyPr wrap="square" rtlCol="0" anchor="ctr"/>
           <a:lstStyle/>
           <a:p>
             <a:pPr algn="l"/>
@@ -6044,7 +9539,7 @@
           </a:fontRef>
         </p:style>
         <p:txBody>
-          <a:bodyPr rtlCol="0" anchor="ctr" wrap="square"/>
+          <a:bodyPr wrap="square" rtlCol="0" anchor="ctr"/>
           <a:lstStyle/>
           <a:p>
             <a:pPr algn="l"/>
@@ -6093,7 +9588,7 @@
           </a:fontRef>
         </p:style>
         <p:txBody>
-          <a:bodyPr rtlCol="0" anchor="t" wrap="square"/>
+          <a:bodyPr wrap="square" rtlCol="0" anchor="t"/>
           <a:lstStyle/>
           <a:p>
             <a:pPr algn="l"/>
@@ -6107,14 +9602,29 @@
             </a:r>
           </a:p>
           <a:p>
-            <a:r>
-              <a:rPr sz="800">
+            <a:endParaRPr sz="1600">
+              <a:solidFill>
+                <a:srgbClr val="B9C4D1"/>
+              </a:solidFill>
+            </a:endParaRPr>
+          </a:p>
+          <a:p>
+            <a:pPr algn="l"/>
+            <a:r>
+              <a:rPr sz="1600">
                 <a:solidFill>
                   <a:srgbClr val="B9C4D1"/>
                 </a:solidFill>
               </a:rPr>
-              <a:t/>
-            </a:r>
+              <a:t>2.  Run:  python src/main.py --input "..." --mode weekly</a:t>
+            </a:r>
+          </a:p>
+          <a:p>
+            <a:endParaRPr sz="1600">
+              <a:solidFill>
+                <a:srgbClr val="B9C4D1"/>
+              </a:solidFill>
+            </a:endParaRPr>
           </a:p>
           <a:p>
             <a:pPr algn="l"/>
@@ -6124,18 +9634,33 @@
                   <a:srgbClr val="B9C4D1"/>
                 </a:solidFill>
               </a:rPr>
-              <a:t>2.  Run:  python src/main.py --input "..." --mode weekly</a:t>
-            </a:r>
-          </a:p>
-          <a:p>
-            <a:r>
-              <a:rPr sz="800">
+              <a:t>3.  Open the weekly report - walk the 5 tabs</a:t>
+            </a:r>
+          </a:p>
+          <a:p>
+            <a:endParaRPr sz="1600">
+              <a:solidFill>
+                <a:srgbClr val="B9C4D1"/>
+              </a:solidFill>
+            </a:endParaRPr>
+          </a:p>
+          <a:p>
+            <a:pPr algn="l"/>
+            <a:r>
+              <a:rPr sz="1600">
                 <a:solidFill>
                   <a:srgbClr val="B9C4D1"/>
                 </a:solidFill>
               </a:rPr>
-              <a:t/>
-            </a:r>
+              <a:t>4.  Review a few cards (everything is 'Needs Review')</a:t>
+            </a:r>
+          </a:p>
+          <a:p>
+            <a:endParaRPr sz="1600">
+              <a:solidFill>
+                <a:srgbClr val="B9C4D1"/>
+              </a:solidFill>
+            </a:endParaRPr>
           </a:p>
           <a:p>
             <a:pPr algn="l"/>
@@ -6145,60 +9670,15 @@
                   <a:srgbClr val="B9C4D1"/>
                 </a:solidFill>
               </a:rPr>
-              <a:t>3.  Open the weekly report - walk the 5 tabs</a:t>
-            </a:r>
-          </a:p>
-          <a:p>
-            <a:r>
-              <a:rPr sz="800">
-                <a:solidFill>
-                  <a:srgbClr val="B9C4D1"/>
-                </a:solidFill>
-              </a:rPr>
-              <a:t/>
-            </a:r>
-          </a:p>
-          <a:p>
-            <a:pPr algn="l"/>
-            <a:r>
-              <a:rPr sz="1600">
-                <a:solidFill>
-                  <a:srgbClr val="B9C4D1"/>
-                </a:solidFill>
-              </a:rPr>
-              <a:t>4.  Review a few cards (everything is 'Needs Review')</a:t>
-            </a:r>
-          </a:p>
-          <a:p>
-            <a:r>
-              <a:rPr sz="800">
-                <a:solidFill>
-                  <a:srgbClr val="B9C4D1"/>
-                </a:solidFill>
-              </a:rPr>
-              <a:t/>
-            </a:r>
-          </a:p>
-          <a:p>
-            <a:pPr algn="l"/>
-            <a:r>
-              <a:rPr sz="1600">
-                <a:solidFill>
-                  <a:srgbClr val="B9C4D1"/>
-                </a:solidFill>
-              </a:rPr>
               <a:t>5.  Re-run with --push-ado  -&gt;  watch ADO Issues get created</a:t>
             </a:r>
           </a:p>
           <a:p>
-            <a:r>
-              <a:rPr sz="800">
-                <a:solidFill>
-                  <a:srgbClr val="B9C4D1"/>
-                </a:solidFill>
-              </a:rPr>
-              <a:t/>
-            </a:r>
+            <a:endParaRPr sz="1600">
+              <a:solidFill>
+                <a:srgbClr val="B9C4D1"/>
+              </a:solidFill>
+            </a:endParaRPr>
           </a:p>
           <a:p>
             <a:pPr algn="l"/>
@@ -6247,7 +9727,7 @@
           </a:fontRef>
         </p:style>
         <p:txBody>
-          <a:bodyPr rtlCol="0" anchor="ctr" wrap="square"/>
+          <a:bodyPr wrap="square" rtlCol="0" anchor="ctr"/>
           <a:lstStyle/>
           <a:p>
             <a:pPr algn="l"/>
@@ -6271,7 +9751,7 @@
 </file>
 
 <file path=ppt/slides/slide14.xml><?xml version="1.0" encoding="utf-8"?>
-<p:sld xmlns:a="http://schemas.openxmlformats.org/drawingml/2006/main" xmlns:p="http://schemas.openxmlformats.org/presentationml/2006/main" xmlns:r="http://schemas.openxmlformats.org/officeDocument/2006/relationships">
+<p:sld xmlns:a="http://schemas.openxmlformats.org/drawingml/2006/main" xmlns:r="http://schemas.openxmlformats.org/officeDocument/2006/relationships" xmlns:p="http://schemas.openxmlformats.org/presentationml/2006/main">
   <p:cSld>
     <p:bg>
       <p:bgPr>
@@ -6287,7 +9767,14 @@
         <p:cNvGrpSpPr/>
         <p:nvPr/>
       </p:nvGrpSpPr>
-      <p:grpSpPr/>
+      <p:grpSpPr>
+        <a:xfrm>
+          <a:off x="0" y="0"/>
+          <a:ext cx="0" cy="0"/>
+          <a:chOff x="0" y="0"/>
+          <a:chExt cx="0" cy="0"/>
+        </a:xfrm>
+      </p:grpSpPr>
       <p:sp>
         <p:nvSpPr>
           <p:cNvPr id="2" name="Rectangle 1"/>
@@ -6328,6 +9815,7 @@
           <a:lstStyle/>
           <a:p>
             <a:pPr algn="ctr"/>
+            <a:endParaRPr/>
           </a:p>
         </p:txBody>
       </p:sp>
@@ -6365,7 +9853,7 @@
           </a:fontRef>
         </p:style>
         <p:txBody>
-          <a:bodyPr rtlCol="0" anchor="ctr" wrap="square"/>
+          <a:bodyPr wrap="square" rtlCol="0" anchor="ctr"/>
           <a:lstStyle/>
           <a:p>
             <a:pPr algn="l"/>
@@ -6414,7 +9902,7 @@
           </a:fontRef>
         </p:style>
         <p:txBody>
-          <a:bodyPr rtlCol="0" anchor="ctr" wrap="square"/>
+          <a:bodyPr wrap="square" rtlCol="0" anchor="ctr"/>
           <a:lstStyle/>
           <a:p>
             <a:pPr algn="l"/>
@@ -6463,7 +9951,7 @@
           </a:fontRef>
         </p:style>
         <p:txBody>
-          <a:bodyPr rtlCol="0" anchor="ctr" wrap="square"/>
+          <a:bodyPr wrap="square" rtlCol="0" anchor="ctr"/>
           <a:lstStyle/>
           <a:p>
             <a:pPr algn="l"/>
@@ -6487,7 +9975,7 @@
 </file>
 
 <file path=ppt/slides/slide15.xml><?xml version="1.0" encoding="utf-8"?>
-<p:sld xmlns:a="http://schemas.openxmlformats.org/drawingml/2006/main" xmlns:p="http://schemas.openxmlformats.org/presentationml/2006/main" xmlns:r="http://schemas.openxmlformats.org/officeDocument/2006/relationships">
+<p:sld xmlns:a="http://schemas.openxmlformats.org/drawingml/2006/main" xmlns:r="http://schemas.openxmlformats.org/officeDocument/2006/relationships" xmlns:p="http://schemas.openxmlformats.org/presentationml/2006/main">
   <p:cSld>
     <p:bg>
       <p:bgPr>
@@ -6503,7 +9991,14 @@
         <p:cNvGrpSpPr/>
         <p:nvPr/>
       </p:nvGrpSpPr>
-      <p:grpSpPr/>
+      <p:grpSpPr>
+        <a:xfrm>
+          <a:off x="0" y="0"/>
+          <a:ext cx="0" cy="0"/>
+          <a:chOff x="0" y="0"/>
+          <a:chExt cx="0" cy="0"/>
+        </a:xfrm>
+      </p:grpSpPr>
       <p:sp>
         <p:nvSpPr>
           <p:cNvPr id="2" name="Rectangle 1"/>
@@ -6544,6 +10039,7 @@
           <a:lstStyle/>
           <a:p>
             <a:pPr algn="ctr"/>
+            <a:endParaRPr/>
           </a:p>
         </p:txBody>
       </p:sp>
@@ -6581,7 +10077,7 @@
           </a:fontRef>
         </p:style>
         <p:txBody>
-          <a:bodyPr rtlCol="0" anchor="ctr" wrap="square"/>
+          <a:bodyPr wrap="square" rtlCol="0" anchor="ctr"/>
           <a:lstStyle/>
           <a:p>
             <a:pPr algn="l"/>
@@ -6649,6 +10145,7 @@
           <a:lstStyle/>
           <a:p>
             <a:pPr algn="ctr"/>
+            <a:endParaRPr/>
           </a:p>
         </p:txBody>
       </p:sp>
@@ -6692,6 +10189,7 @@
           <a:lstStyle/>
           <a:p>
             <a:pPr algn="ctr"/>
+            <a:endParaRPr/>
           </a:p>
         </p:txBody>
       </p:sp>
@@ -6729,7 +10227,7 @@
           </a:fontRef>
         </p:style>
         <p:txBody>
-          <a:bodyPr rtlCol="0" anchor="ctr" wrap="square"/>
+          <a:bodyPr wrap="square" rtlCol="0" anchor="ctr"/>
           <a:lstStyle/>
           <a:p>
             <a:pPr algn="ctr"/>
@@ -6778,7 +10276,7 @@
           </a:fontRef>
         </p:style>
         <p:txBody>
-          <a:bodyPr rtlCol="0" anchor="ctr" wrap="square"/>
+          <a:bodyPr wrap="square" rtlCol="0" anchor="ctr"/>
           <a:lstStyle/>
           <a:p>
             <a:pPr algn="ctr"/>
@@ -6835,6 +10333,7 @@
           <a:lstStyle/>
           <a:p>
             <a:pPr algn="ctr"/>
+            <a:endParaRPr/>
           </a:p>
         </p:txBody>
       </p:sp>
@@ -6878,6 +10377,7 @@
           <a:lstStyle/>
           <a:p>
             <a:pPr algn="ctr"/>
+            <a:endParaRPr/>
           </a:p>
         </p:txBody>
       </p:sp>
@@ -6915,7 +10415,7 @@
           </a:fontRef>
         </p:style>
         <p:txBody>
-          <a:bodyPr rtlCol="0" anchor="ctr" wrap="square"/>
+          <a:bodyPr wrap="square" rtlCol="0" anchor="ctr"/>
           <a:lstStyle/>
           <a:p>
             <a:pPr algn="ctr"/>
@@ -6964,7 +10464,7 @@
           </a:fontRef>
         </p:style>
         <p:txBody>
-          <a:bodyPr rtlCol="0" anchor="ctr" wrap="square"/>
+          <a:bodyPr wrap="square" rtlCol="0" anchor="ctr"/>
           <a:lstStyle/>
           <a:p>
             <a:pPr algn="ctr"/>
@@ -7021,6 +10521,7 @@
           <a:lstStyle/>
           <a:p>
             <a:pPr algn="ctr"/>
+            <a:endParaRPr/>
           </a:p>
         </p:txBody>
       </p:sp>
@@ -7064,6 +10565,7 @@
           <a:lstStyle/>
           <a:p>
             <a:pPr algn="ctr"/>
+            <a:endParaRPr/>
           </a:p>
         </p:txBody>
       </p:sp>
@@ -7101,7 +10603,7 @@
           </a:fontRef>
         </p:style>
         <p:txBody>
-          <a:bodyPr rtlCol="0" anchor="ctr" wrap="square"/>
+          <a:bodyPr wrap="square" rtlCol="0" anchor="ctr"/>
           <a:lstStyle/>
           <a:p>
             <a:pPr algn="ctr"/>
@@ -7150,7 +10652,7 @@
           </a:fontRef>
         </p:style>
         <p:txBody>
-          <a:bodyPr rtlCol="0" anchor="ctr" wrap="square"/>
+          <a:bodyPr wrap="square" rtlCol="0" anchor="ctr"/>
           <a:lstStyle/>
           <a:p>
             <a:pPr algn="ctr"/>
@@ -7207,6 +10709,7 @@
           <a:lstStyle/>
           <a:p>
             <a:pPr algn="ctr"/>
+            <a:endParaRPr/>
           </a:p>
         </p:txBody>
       </p:sp>
@@ -7250,6 +10753,7 @@
           <a:lstStyle/>
           <a:p>
             <a:pPr algn="ctr"/>
+            <a:endParaRPr/>
           </a:p>
         </p:txBody>
       </p:sp>
@@ -7287,7 +10791,7 @@
           </a:fontRef>
         </p:style>
         <p:txBody>
-          <a:bodyPr rtlCol="0" anchor="ctr" wrap="square"/>
+          <a:bodyPr wrap="square" rtlCol="0" anchor="ctr"/>
           <a:lstStyle/>
           <a:p>
             <a:pPr algn="ctr"/>
@@ -7336,7 +10840,7 @@
           </a:fontRef>
         </p:style>
         <p:txBody>
-          <a:bodyPr rtlCol="0" anchor="ctr" wrap="square"/>
+          <a:bodyPr wrap="square" rtlCol="0" anchor="ctr"/>
           <a:lstStyle/>
           <a:p>
             <a:pPr algn="ctr"/>
@@ -7393,6 +10897,7 @@
           <a:lstStyle/>
           <a:p>
             <a:pPr algn="ctr"/>
+            <a:endParaRPr/>
           </a:p>
         </p:txBody>
       </p:sp>
@@ -7436,6 +10941,7 @@
           <a:lstStyle/>
           <a:p>
             <a:pPr algn="ctr"/>
+            <a:endParaRPr/>
           </a:p>
         </p:txBody>
       </p:sp>
@@ -7473,7 +10979,7 @@
           </a:fontRef>
         </p:style>
         <p:txBody>
-          <a:bodyPr rtlCol="0" anchor="ctr" wrap="square"/>
+          <a:bodyPr wrap="square" rtlCol="0" anchor="ctr"/>
           <a:lstStyle/>
           <a:p>
             <a:pPr algn="l"/>
@@ -7522,7 +11028,7 @@
           </a:fontRef>
         </p:style>
         <p:txBody>
-          <a:bodyPr rtlCol="0" anchor="t" wrap="square"/>
+          <a:bodyPr wrap="square" rtlCol="0" anchor="t"/>
           <a:lstStyle/>
           <a:p>
             <a:pPr algn="l"/>
@@ -7536,14 +11042,29 @@
             </a:r>
           </a:p>
           <a:p>
-            <a:r>
-              <a:rPr sz="300">
+            <a:endParaRPr sz="1100">
+              <a:solidFill>
+                <a:srgbClr val="2C3E50"/>
+              </a:solidFill>
+            </a:endParaRPr>
+          </a:p>
+          <a:p>
+            <a:pPr algn="l"/>
+            <a:r>
+              <a:rPr sz="1100">
                 <a:solidFill>
                   <a:srgbClr val="2C3E50"/>
                 </a:solidFill>
               </a:rPr>
-              <a:t/>
-            </a:r>
+              <a:t>•  Identify opportunities: 1.5 h -&gt; 0.2 h</a:t>
+            </a:r>
+          </a:p>
+          <a:p>
+            <a:endParaRPr sz="1100">
+              <a:solidFill>
+                <a:srgbClr val="2C3E50"/>
+              </a:solidFill>
+            </a:endParaRPr>
           </a:p>
           <a:p>
             <a:pPr algn="l"/>
@@ -7553,60 +11074,33 @@
                   <a:srgbClr val="2C3E50"/>
                 </a:solidFill>
               </a:rPr>
-              <a:t>•  Identify opportunities: 1.5 h -&gt; 0.2 h</a:t>
-            </a:r>
-          </a:p>
-          <a:p>
-            <a:r>
-              <a:rPr sz="300">
+              <a:t>•  Classify into 40-field schema: 2.0 h -&gt; 0.2 h</a:t>
+            </a:r>
+          </a:p>
+          <a:p>
+            <a:endParaRPr sz="1100">
+              <a:solidFill>
+                <a:srgbClr val="2C3E50"/>
+              </a:solidFill>
+            </a:endParaRPr>
+          </a:p>
+          <a:p>
+            <a:pPr algn="l"/>
+            <a:r>
+              <a:rPr sz="1100">
                 <a:solidFill>
                   <a:srgbClr val="2C3E50"/>
                 </a:solidFill>
               </a:rPr>
-              <a:t/>
-            </a:r>
-          </a:p>
-          <a:p>
-            <a:pPr algn="l"/>
-            <a:r>
-              <a:rPr sz="1100">
-                <a:solidFill>
-                  <a:srgbClr val="2C3E50"/>
-                </a:solidFill>
-              </a:rPr>
-              <a:t>•  Classify into 40-field schema: 2.0 h -&gt; 0.2 h</a:t>
-            </a:r>
-          </a:p>
-          <a:p>
-            <a:r>
-              <a:rPr sz="300">
-                <a:solidFill>
-                  <a:srgbClr val="2C3E50"/>
-                </a:solidFill>
-              </a:rPr>
-              <a:t/>
-            </a:r>
-          </a:p>
-          <a:p>
-            <a:pPr algn="l"/>
-            <a:r>
-              <a:rPr sz="1100">
-                <a:solidFill>
-                  <a:srgbClr val="2C3E50"/>
-                </a:solidFill>
-              </a:rPr>
               <a:t>•  Build workbook + payload + reports: 1.0 h -&gt; 0.1 h</a:t>
             </a:r>
           </a:p>
           <a:p>
-            <a:r>
-              <a:rPr sz="300">
-                <a:solidFill>
-                  <a:srgbClr val="2C3E50"/>
-                </a:solidFill>
-              </a:rPr>
-              <a:t/>
-            </a:r>
+            <a:endParaRPr sz="1100">
+              <a:solidFill>
+                <a:srgbClr val="2C3E50"/>
+              </a:solidFill>
+            </a:endParaRPr>
           </a:p>
           <a:p>
             <a:pPr algn="l"/>
@@ -7663,6 +11157,7 @@
           <a:lstStyle/>
           <a:p>
             <a:pPr algn="ctr"/>
+            <a:endParaRPr/>
           </a:p>
         </p:txBody>
       </p:sp>
@@ -7706,6 +11201,7 @@
           <a:lstStyle/>
           <a:p>
             <a:pPr algn="ctr"/>
+            <a:endParaRPr/>
           </a:p>
         </p:txBody>
       </p:sp>
@@ -7743,7 +11239,7 @@
           </a:fontRef>
         </p:style>
         <p:txBody>
-          <a:bodyPr rtlCol="0" anchor="ctr" wrap="square"/>
+          <a:bodyPr wrap="square" rtlCol="0" anchor="ctr"/>
           <a:lstStyle/>
           <a:p>
             <a:pPr algn="l"/>
@@ -7792,7 +11288,7 @@
           </a:fontRef>
         </p:style>
         <p:txBody>
-          <a:bodyPr rtlCol="0" anchor="t" wrap="square"/>
+          <a:bodyPr wrap="square" rtlCol="0" anchor="t"/>
           <a:lstStyle/>
           <a:p>
             <a:pPr algn="l"/>
@@ -7806,14 +11302,29 @@
             </a:r>
           </a:p>
           <a:p>
-            <a:r>
-              <a:rPr sz="300">
+            <a:endParaRPr sz="1100">
+              <a:solidFill>
+                <a:srgbClr val="2C3E50"/>
+              </a:solidFill>
+            </a:endParaRPr>
+          </a:p>
+          <a:p>
+            <a:pPr algn="l"/>
+            <a:r>
+              <a:rPr sz="1100">
                 <a:solidFill>
                   <a:srgbClr val="2C3E50"/>
                 </a:solidFill>
               </a:rPr>
-              <a:t/>
-            </a:r>
+              <a:t>•  Status tracking + follow-up: ~1 h/wk -&gt; ~5 min</a:t>
+            </a:r>
+          </a:p>
+          <a:p>
+            <a:endParaRPr sz="1100">
+              <a:solidFill>
+                <a:srgbClr val="2C3E50"/>
+              </a:solidFill>
+            </a:endParaRPr>
           </a:p>
           <a:p>
             <a:pPr algn="l"/>
@@ -7823,60 +11334,33 @@
                   <a:srgbClr val="2C3E50"/>
                 </a:solidFill>
               </a:rPr>
-              <a:t>•  Status tracking + follow-up: ~1 h/wk -&gt; ~5 min</a:t>
-            </a:r>
-          </a:p>
-          <a:p>
-            <a:r>
-              <a:rPr sz="300">
+              <a:t>•  Traceability lookups: ~20 min/wk -&gt; 0</a:t>
+            </a:r>
+          </a:p>
+          <a:p>
+            <a:endParaRPr sz="1100">
+              <a:solidFill>
+                <a:srgbClr val="2C3E50"/>
+              </a:solidFill>
+            </a:endParaRPr>
+          </a:p>
+          <a:p>
+            <a:pPr algn="l"/>
+            <a:r>
+              <a:rPr sz="1100">
                 <a:solidFill>
                   <a:srgbClr val="2C3E50"/>
                 </a:solidFill>
               </a:rPr>
-              <a:t/>
-            </a:r>
-          </a:p>
-          <a:p>
-            <a:pPr algn="l"/>
-            <a:r>
-              <a:rPr sz="1100">
-                <a:solidFill>
-                  <a:srgbClr val="2C3E50"/>
-                </a:solidFill>
-              </a:rPr>
-              <a:t>•  Traceability lookups: ~20 min/wk -&gt; 0</a:t>
-            </a:r>
-          </a:p>
-          <a:p>
-            <a:r>
-              <a:rPr sz="300">
-                <a:solidFill>
-                  <a:srgbClr val="2C3E50"/>
-                </a:solidFill>
-              </a:rPr>
-              <a:t/>
-            </a:r>
-          </a:p>
-          <a:p>
-            <a:pPr algn="l"/>
-            <a:r>
-              <a:rPr sz="1100">
-                <a:solidFill>
-                  <a:srgbClr val="2C3E50"/>
-                </a:solidFill>
-              </a:rPr>
               <a:t>•  Dedup-safe re-runs eliminate rework risk</a:t>
             </a:r>
           </a:p>
           <a:p>
-            <a:r>
-              <a:rPr sz="300">
-                <a:solidFill>
-                  <a:srgbClr val="2C3E50"/>
-                </a:solidFill>
-              </a:rPr>
-              <a:t/>
-            </a:r>
+            <a:endParaRPr sz="1100">
+              <a:solidFill>
+                <a:srgbClr val="2C3E50"/>
+              </a:solidFill>
+            </a:endParaRPr>
           </a:p>
           <a:p>
             <a:pPr algn="l"/>
@@ -7925,7 +11409,7 @@
           </a:fontRef>
         </p:style>
         <p:txBody>
-          <a:bodyPr rtlCol="0" anchor="ctr" wrap="square"/>
+          <a:bodyPr wrap="square" rtlCol="0" anchor="ctr"/>
           <a:lstStyle/>
           <a:p>
             <a:pPr algn="l"/>
@@ -7974,7 +11458,7 @@
           </a:fontRef>
         </p:style>
         <p:txBody>
-          <a:bodyPr rtlCol="0" anchor="ctr" wrap="square"/>
+          <a:bodyPr wrap="square" rtlCol="0" anchor="ctr"/>
           <a:lstStyle/>
           <a:p>
             <a:pPr algn="l"/>
@@ -7998,7 +11482,7 @@
 </file>
 
 <file path=ppt/slides/slide16.xml><?xml version="1.0" encoding="utf-8"?>
-<p:sld xmlns:a="http://schemas.openxmlformats.org/drawingml/2006/main" xmlns:p="http://schemas.openxmlformats.org/presentationml/2006/main" xmlns:r="http://schemas.openxmlformats.org/officeDocument/2006/relationships">
+<p:sld xmlns:a="http://schemas.openxmlformats.org/drawingml/2006/main" xmlns:r="http://schemas.openxmlformats.org/officeDocument/2006/relationships" xmlns:p="http://schemas.openxmlformats.org/presentationml/2006/main">
   <p:cSld>
     <p:bg>
       <p:bgPr>
@@ -8014,7 +11498,14 @@
         <p:cNvGrpSpPr/>
         <p:nvPr/>
       </p:nvGrpSpPr>
-      <p:grpSpPr/>
+      <p:grpSpPr>
+        <a:xfrm>
+          <a:off x="0" y="0"/>
+          <a:ext cx="0" cy="0"/>
+          <a:chOff x="0" y="0"/>
+          <a:chExt cx="0" cy="0"/>
+        </a:xfrm>
+      </p:grpSpPr>
       <p:sp>
         <p:nvSpPr>
           <p:cNvPr id="2" name="Rectangle 1"/>
@@ -8055,6 +11546,7 @@
           <a:lstStyle/>
           <a:p>
             <a:pPr algn="ctr"/>
+            <a:endParaRPr/>
           </a:p>
         </p:txBody>
       </p:sp>
@@ -8092,7 +11584,7 @@
           </a:fontRef>
         </p:style>
         <p:txBody>
-          <a:bodyPr rtlCol="0" anchor="ctr" wrap="square"/>
+          <a:bodyPr wrap="square" rtlCol="0" anchor="ctr"/>
           <a:lstStyle/>
           <a:p>
             <a:pPr algn="l"/>
@@ -8152,7 +11644,7 @@
           </a:fontRef>
         </p:style>
         <p:txBody>
-          <a:bodyPr rtlCol="0" anchor="ctr" wrap="square"/>
+          <a:bodyPr wrap="square" rtlCol="0" anchor="ctr"/>
           <a:lstStyle/>
           <a:p>
             <a:pPr algn="l"/>
@@ -8209,6 +11701,7 @@
           <a:lstStyle/>
           <a:p>
             <a:pPr algn="ctr"/>
+            <a:endParaRPr/>
           </a:p>
         </p:txBody>
       </p:sp>
@@ -8252,6 +11745,7 @@
           <a:lstStyle/>
           <a:p>
             <a:pPr algn="ctr"/>
+            <a:endParaRPr/>
           </a:p>
         </p:txBody>
       </p:sp>
@@ -8289,7 +11783,7 @@
           </a:fontRef>
         </p:style>
         <p:txBody>
-          <a:bodyPr rtlCol="0" anchor="ctr" wrap="square"/>
+          <a:bodyPr wrap="square" rtlCol="0" anchor="ctr"/>
           <a:lstStyle/>
           <a:p>
             <a:pPr algn="l"/>
@@ -8338,7 +11832,7 @@
           </a:fontRef>
         </p:style>
         <p:txBody>
-          <a:bodyPr rtlCol="0" anchor="ctr" wrap="square"/>
+          <a:bodyPr wrap="square" rtlCol="0" anchor="ctr"/>
           <a:lstStyle/>
           <a:p>
             <a:pPr algn="l"/>
@@ -8387,7 +11881,7 @@
           </a:fontRef>
         </p:style>
         <p:txBody>
-          <a:bodyPr rtlCol="0" anchor="ctr" wrap="square"/>
+          <a:bodyPr wrap="square" rtlCol="0" anchor="ctr"/>
           <a:lstStyle/>
           <a:p>
             <a:pPr algn="l"/>
@@ -8444,6 +11938,7 @@
           <a:lstStyle/>
           <a:p>
             <a:pPr algn="ctr"/>
+            <a:endParaRPr/>
           </a:p>
         </p:txBody>
       </p:sp>
@@ -8487,6 +11982,7 @@
           <a:lstStyle/>
           <a:p>
             <a:pPr algn="ctr"/>
+            <a:endParaRPr/>
           </a:p>
         </p:txBody>
       </p:sp>
@@ -8524,7 +12020,7 @@
           </a:fontRef>
         </p:style>
         <p:txBody>
-          <a:bodyPr rtlCol="0" anchor="ctr" wrap="square"/>
+          <a:bodyPr wrap="square" rtlCol="0" anchor="ctr"/>
           <a:lstStyle/>
           <a:p>
             <a:pPr algn="l"/>
@@ -8573,7 +12069,7 @@
           </a:fontRef>
         </p:style>
         <p:txBody>
-          <a:bodyPr rtlCol="0" anchor="ctr" wrap="square"/>
+          <a:bodyPr wrap="square" rtlCol="0" anchor="ctr"/>
           <a:lstStyle/>
           <a:p>
             <a:pPr algn="l"/>
@@ -8622,7 +12118,7 @@
           </a:fontRef>
         </p:style>
         <p:txBody>
-          <a:bodyPr rtlCol="0" anchor="ctr" wrap="square"/>
+          <a:bodyPr wrap="square" rtlCol="0" anchor="ctr"/>
           <a:lstStyle/>
           <a:p>
             <a:pPr algn="l"/>
@@ -8679,6 +12175,7 @@
           <a:lstStyle/>
           <a:p>
             <a:pPr algn="ctr"/>
+            <a:endParaRPr/>
           </a:p>
         </p:txBody>
       </p:sp>
@@ -8722,6 +12219,7 @@
           <a:lstStyle/>
           <a:p>
             <a:pPr algn="ctr"/>
+            <a:endParaRPr/>
           </a:p>
         </p:txBody>
       </p:sp>
@@ -8759,7 +12257,7 @@
           </a:fontRef>
         </p:style>
         <p:txBody>
-          <a:bodyPr rtlCol="0" anchor="ctr" wrap="square"/>
+          <a:bodyPr wrap="square" rtlCol="0" anchor="ctr"/>
           <a:lstStyle/>
           <a:p>
             <a:pPr algn="l"/>
@@ -8808,7 +12306,7 @@
           </a:fontRef>
         </p:style>
         <p:txBody>
-          <a:bodyPr rtlCol="0" anchor="ctr" wrap="square"/>
+          <a:bodyPr wrap="square" rtlCol="0" anchor="ctr"/>
           <a:lstStyle/>
           <a:p>
             <a:pPr algn="l"/>
@@ -8857,7 +12355,7 @@
           </a:fontRef>
         </p:style>
         <p:txBody>
-          <a:bodyPr rtlCol="0" anchor="ctr" wrap="square"/>
+          <a:bodyPr wrap="square" rtlCol="0" anchor="ctr"/>
           <a:lstStyle/>
           <a:p>
             <a:pPr algn="l"/>
@@ -8914,6 +12412,7 @@
           <a:lstStyle/>
           <a:p>
             <a:pPr algn="ctr"/>
+            <a:endParaRPr/>
           </a:p>
         </p:txBody>
       </p:sp>
@@ -8957,6 +12456,7 @@
           <a:lstStyle/>
           <a:p>
             <a:pPr algn="ctr"/>
+            <a:endParaRPr/>
           </a:p>
         </p:txBody>
       </p:sp>
@@ -8994,7 +12494,7 @@
           </a:fontRef>
         </p:style>
         <p:txBody>
-          <a:bodyPr rtlCol="0" anchor="ctr" wrap="square"/>
+          <a:bodyPr wrap="square" rtlCol="0" anchor="ctr"/>
           <a:lstStyle/>
           <a:p>
             <a:pPr algn="l"/>
@@ -9043,7 +12543,7 @@
           </a:fontRef>
         </p:style>
         <p:txBody>
-          <a:bodyPr rtlCol="0" anchor="ctr" wrap="square"/>
+          <a:bodyPr wrap="square" rtlCol="0" anchor="ctr"/>
           <a:lstStyle/>
           <a:p>
             <a:pPr algn="l"/>
@@ -9092,7 +12592,7 @@
           </a:fontRef>
         </p:style>
         <p:txBody>
-          <a:bodyPr rtlCol="0" anchor="ctr" wrap="square"/>
+          <a:bodyPr wrap="square" rtlCol="0" anchor="ctr"/>
           <a:lstStyle/>
           <a:p>
             <a:pPr algn="l"/>
@@ -9149,6 +12649,7 @@
           <a:lstStyle/>
           <a:p>
             <a:pPr algn="ctr"/>
+            <a:endParaRPr/>
           </a:p>
         </p:txBody>
       </p:sp>
@@ -9192,6 +12693,7 @@
           <a:lstStyle/>
           <a:p>
             <a:pPr algn="ctr"/>
+            <a:endParaRPr/>
           </a:p>
         </p:txBody>
       </p:sp>
@@ -9229,7 +12731,7 @@
           </a:fontRef>
         </p:style>
         <p:txBody>
-          <a:bodyPr rtlCol="0" anchor="ctr" wrap="square"/>
+          <a:bodyPr wrap="square" rtlCol="0" anchor="ctr"/>
           <a:lstStyle/>
           <a:p>
             <a:pPr algn="l"/>
@@ -9278,7 +12780,7 @@
           </a:fontRef>
         </p:style>
         <p:txBody>
-          <a:bodyPr rtlCol="0" anchor="ctr" wrap="square"/>
+          <a:bodyPr wrap="square" rtlCol="0" anchor="ctr"/>
           <a:lstStyle/>
           <a:p>
             <a:pPr algn="l"/>
@@ -9327,7 +12829,7 @@
           </a:fontRef>
         </p:style>
         <p:txBody>
-          <a:bodyPr rtlCol="0" anchor="ctr" wrap="square"/>
+          <a:bodyPr wrap="square" rtlCol="0" anchor="ctr"/>
           <a:lstStyle/>
           <a:p>
             <a:pPr algn="l"/>
@@ -9384,6 +12886,7 @@
           <a:lstStyle/>
           <a:p>
             <a:pPr algn="ctr"/>
+            <a:endParaRPr/>
           </a:p>
         </p:txBody>
       </p:sp>
@@ -9427,6 +12930,7 @@
           <a:lstStyle/>
           <a:p>
             <a:pPr algn="ctr"/>
+            <a:endParaRPr/>
           </a:p>
         </p:txBody>
       </p:sp>
@@ -9464,7 +12968,7 @@
           </a:fontRef>
         </p:style>
         <p:txBody>
-          <a:bodyPr rtlCol="0" anchor="ctr" wrap="square"/>
+          <a:bodyPr wrap="square" rtlCol="0" anchor="ctr"/>
           <a:lstStyle/>
           <a:p>
             <a:pPr algn="l"/>
@@ -9513,7 +13017,7 @@
           </a:fontRef>
         </p:style>
         <p:txBody>
-          <a:bodyPr rtlCol="0" anchor="ctr" wrap="square"/>
+          <a:bodyPr wrap="square" rtlCol="0" anchor="ctr"/>
           <a:lstStyle/>
           <a:p>
             <a:pPr algn="l"/>
@@ -9562,7 +13066,7 @@
           </a:fontRef>
         </p:style>
         <p:txBody>
-          <a:bodyPr rtlCol="0" anchor="ctr" wrap="square"/>
+          <a:bodyPr wrap="square" rtlCol="0" anchor="ctr"/>
           <a:lstStyle/>
           <a:p>
             <a:pPr algn="l"/>
@@ -9613,7 +13117,7 @@
           </a:fontRef>
         </p:style>
         <p:txBody>
-          <a:bodyPr rtlCol="0" anchor="ctr" wrap="square"/>
+          <a:bodyPr wrap="square" rtlCol="0" anchor="ctr"/>
           <a:lstStyle/>
           <a:p>
             <a:pPr algn="ctr"/>
@@ -9662,7 +13166,7 @@
           </a:fontRef>
         </p:style>
         <p:txBody>
-          <a:bodyPr rtlCol="0" anchor="ctr" wrap="square"/>
+          <a:bodyPr wrap="square" rtlCol="0" anchor="ctr"/>
           <a:lstStyle/>
           <a:p>
             <a:pPr algn="l"/>
@@ -9686,7 +13190,7 @@
 </file>
 
 <file path=ppt/slides/slide17.xml><?xml version="1.0" encoding="utf-8"?>
-<p:sld xmlns:a="http://schemas.openxmlformats.org/drawingml/2006/main" xmlns:p="http://schemas.openxmlformats.org/presentationml/2006/main" xmlns:r="http://schemas.openxmlformats.org/officeDocument/2006/relationships">
+<p:sld xmlns:a="http://schemas.openxmlformats.org/drawingml/2006/main" xmlns:r="http://schemas.openxmlformats.org/officeDocument/2006/relationships" xmlns:p="http://schemas.openxmlformats.org/presentationml/2006/main">
   <p:cSld>
     <p:bg>
       <p:bgPr>
@@ -9702,7 +13206,14 @@
         <p:cNvGrpSpPr/>
         <p:nvPr/>
       </p:nvGrpSpPr>
-      <p:grpSpPr/>
+      <p:grpSpPr>
+        <a:xfrm>
+          <a:off x="0" y="0"/>
+          <a:ext cx="0" cy="0"/>
+          <a:chOff x="0" y="0"/>
+          <a:chExt cx="0" cy="0"/>
+        </a:xfrm>
+      </p:grpSpPr>
       <p:sp>
         <p:nvSpPr>
           <p:cNvPr id="2" name="Rectangle 1"/>
@@ -9743,6 +13254,7 @@
           <a:lstStyle/>
           <a:p>
             <a:pPr algn="ctr"/>
+            <a:endParaRPr/>
           </a:p>
         </p:txBody>
       </p:sp>
@@ -9780,7 +13292,7 @@
           </a:fontRef>
         </p:style>
         <p:txBody>
-          <a:bodyPr rtlCol="0" anchor="ctr" wrap="square"/>
+          <a:bodyPr wrap="square" rtlCol="0" anchor="ctr"/>
           <a:lstStyle/>
           <a:p>
             <a:pPr algn="l"/>
@@ -9842,7 +13354,7 @@
           </a:fontRef>
         </p:style>
         <p:txBody>
-          <a:bodyPr rtlCol="0" anchor="ctr" wrap="square"/>
+          <a:bodyPr wrap="square" rtlCol="0" anchor="ctr"/>
           <a:lstStyle/>
           <a:p>
             <a:pPr algn="ctr"/>
@@ -9891,7 +13403,7 @@
           </a:fontRef>
         </p:style>
         <p:txBody>
-          <a:bodyPr rtlCol="0" anchor="ctr" wrap="square"/>
+          <a:bodyPr wrap="square" rtlCol="0" anchor="ctr"/>
           <a:lstStyle/>
           <a:p>
             <a:pPr algn="l"/>
@@ -9940,7 +13452,7 @@
           </a:fontRef>
         </p:style>
         <p:txBody>
-          <a:bodyPr rtlCol="0" anchor="ctr" wrap="square"/>
+          <a:bodyPr wrap="square" rtlCol="0" anchor="ctr"/>
           <a:lstStyle/>
           <a:p>
             <a:pPr algn="l"/>
@@ -9991,7 +13503,7 @@
           </a:fontRef>
         </p:style>
         <p:txBody>
-          <a:bodyPr rtlCol="0" anchor="ctr" wrap="square"/>
+          <a:bodyPr wrap="square" rtlCol="0" anchor="ctr"/>
           <a:lstStyle/>
           <a:p>
             <a:pPr algn="ctr"/>
@@ -10040,7 +13552,7 @@
           </a:fontRef>
         </p:style>
         <p:txBody>
-          <a:bodyPr rtlCol="0" anchor="ctr" wrap="square"/>
+          <a:bodyPr wrap="square" rtlCol="0" anchor="ctr"/>
           <a:lstStyle/>
           <a:p>
             <a:pPr algn="l"/>
@@ -10089,7 +13601,7 @@
           </a:fontRef>
         </p:style>
         <p:txBody>
-          <a:bodyPr rtlCol="0" anchor="ctr" wrap="square"/>
+          <a:bodyPr wrap="square" rtlCol="0" anchor="ctr"/>
           <a:lstStyle/>
           <a:p>
             <a:pPr algn="l"/>
@@ -10140,7 +13652,7 @@
           </a:fontRef>
         </p:style>
         <p:txBody>
-          <a:bodyPr rtlCol="0" anchor="ctr" wrap="square"/>
+          <a:bodyPr wrap="square" rtlCol="0" anchor="ctr"/>
           <a:lstStyle/>
           <a:p>
             <a:pPr algn="ctr"/>
@@ -10189,7 +13701,7 @@
           </a:fontRef>
         </p:style>
         <p:txBody>
-          <a:bodyPr rtlCol="0" anchor="ctr" wrap="square"/>
+          <a:bodyPr wrap="square" rtlCol="0" anchor="ctr"/>
           <a:lstStyle/>
           <a:p>
             <a:pPr algn="l"/>
@@ -10238,7 +13750,7 @@
           </a:fontRef>
         </p:style>
         <p:txBody>
-          <a:bodyPr rtlCol="0" anchor="ctr" wrap="square"/>
+          <a:bodyPr wrap="square" rtlCol="0" anchor="ctr"/>
           <a:lstStyle/>
           <a:p>
             <a:pPr algn="l"/>
@@ -10289,7 +13801,7 @@
           </a:fontRef>
         </p:style>
         <p:txBody>
-          <a:bodyPr rtlCol="0" anchor="ctr" wrap="square"/>
+          <a:bodyPr wrap="square" rtlCol="0" anchor="ctr"/>
           <a:lstStyle/>
           <a:p>
             <a:pPr algn="ctr"/>
@@ -10338,7 +13850,7 @@
           </a:fontRef>
         </p:style>
         <p:txBody>
-          <a:bodyPr rtlCol="0" anchor="ctr" wrap="square"/>
+          <a:bodyPr wrap="square" rtlCol="0" anchor="ctr"/>
           <a:lstStyle/>
           <a:p>
             <a:pPr algn="l"/>
@@ -10387,7 +13899,7 @@
           </a:fontRef>
         </p:style>
         <p:txBody>
-          <a:bodyPr rtlCol="0" anchor="ctr" wrap="square"/>
+          <a:bodyPr wrap="square" rtlCol="0" anchor="ctr"/>
           <a:lstStyle/>
           <a:p>
             <a:pPr algn="l"/>
@@ -10438,7 +13950,7 @@
           </a:fontRef>
         </p:style>
         <p:txBody>
-          <a:bodyPr rtlCol="0" anchor="ctr" wrap="square"/>
+          <a:bodyPr wrap="square" rtlCol="0" anchor="ctr"/>
           <a:lstStyle/>
           <a:p>
             <a:pPr algn="ctr"/>
@@ -10487,7 +13999,7 @@
           </a:fontRef>
         </p:style>
         <p:txBody>
-          <a:bodyPr rtlCol="0" anchor="ctr" wrap="square"/>
+          <a:bodyPr wrap="square" rtlCol="0" anchor="ctr"/>
           <a:lstStyle/>
           <a:p>
             <a:pPr algn="l"/>
@@ -10536,7 +14048,7 @@
           </a:fontRef>
         </p:style>
         <p:txBody>
-          <a:bodyPr rtlCol="0" anchor="ctr" wrap="square"/>
+          <a:bodyPr wrap="square" rtlCol="0" anchor="ctr"/>
           <a:lstStyle/>
           <a:p>
             <a:pPr algn="l"/>
@@ -10587,7 +14099,7 @@
           </a:fontRef>
         </p:style>
         <p:txBody>
-          <a:bodyPr rtlCol="0" anchor="ctr" wrap="square"/>
+          <a:bodyPr wrap="square" rtlCol="0" anchor="ctr"/>
           <a:lstStyle/>
           <a:p>
             <a:pPr algn="ctr"/>
@@ -10636,7 +14148,7 @@
           </a:fontRef>
         </p:style>
         <p:txBody>
-          <a:bodyPr rtlCol="0" anchor="ctr" wrap="square"/>
+          <a:bodyPr wrap="square" rtlCol="0" anchor="ctr"/>
           <a:lstStyle/>
           <a:p>
             <a:pPr algn="l"/>
@@ -10660,7 +14172,7 @@
 </file>
 
 <file path=ppt/slides/slide18.xml><?xml version="1.0" encoding="utf-8"?>
-<p:sld xmlns:a="http://schemas.openxmlformats.org/drawingml/2006/main" xmlns:p="http://schemas.openxmlformats.org/presentationml/2006/main" xmlns:r="http://schemas.openxmlformats.org/officeDocument/2006/relationships">
+<p:sld xmlns:a="http://schemas.openxmlformats.org/drawingml/2006/main" xmlns:r="http://schemas.openxmlformats.org/officeDocument/2006/relationships" xmlns:p="http://schemas.openxmlformats.org/presentationml/2006/main">
   <p:cSld>
     <p:bg>
       <p:bgPr>
@@ -10676,7 +14188,14 @@
         <p:cNvGrpSpPr/>
         <p:nvPr/>
       </p:nvGrpSpPr>
-      <p:grpSpPr/>
+      <p:grpSpPr>
+        <a:xfrm>
+          <a:off x="0" y="0"/>
+          <a:ext cx="0" cy="0"/>
+          <a:chOff x="0" y="0"/>
+          <a:chExt cx="0" cy="0"/>
+        </a:xfrm>
+      </p:grpSpPr>
       <p:sp>
         <p:nvSpPr>
           <p:cNvPr id="2" name="Rectangle 1"/>
@@ -10717,6 +14236,7 @@
           <a:lstStyle/>
           <a:p>
             <a:pPr algn="ctr"/>
+            <a:endParaRPr/>
           </a:p>
         </p:txBody>
       </p:sp>
@@ -10754,7 +14274,7 @@
           </a:fontRef>
         </p:style>
         <p:txBody>
-          <a:bodyPr rtlCol="0" anchor="ctr" wrap="square"/>
+          <a:bodyPr wrap="square" rtlCol="0" anchor="ctr"/>
           <a:lstStyle/>
           <a:p>
             <a:pPr algn="l"/>
@@ -10803,7 +14323,7 @@
           </a:fontRef>
         </p:style>
         <p:txBody>
-          <a:bodyPr rtlCol="0" anchor="t" wrap="square"/>
+          <a:bodyPr wrap="square" rtlCol="0" anchor="t"/>
           <a:lstStyle/>
           <a:p>
             <a:pPr algn="l"/>
@@ -10817,14 +14337,29 @@
             </a:r>
           </a:p>
           <a:p>
-            <a:r>
-              <a:rPr sz="800">
+            <a:endParaRPr sz="1600">
+              <a:solidFill>
+                <a:srgbClr val="B9C4D1"/>
+              </a:solidFill>
+            </a:endParaRPr>
+          </a:p>
+          <a:p>
+            <a:pPr algn="l"/>
+            <a:r>
+              <a:rPr sz="1600">
                 <a:solidFill>
                   <a:srgbClr val="B9C4D1"/>
                 </a:solidFill>
               </a:rPr>
-              <a:t/>
-            </a:r>
+              <a:t>-  Saves ~7.5 hours/week (~390 hours/year) versus doing it by hand</a:t>
+            </a:r>
+          </a:p>
+          <a:p>
+            <a:endParaRPr sz="1600">
+              <a:solidFill>
+                <a:srgbClr val="B9C4D1"/>
+              </a:solidFill>
+            </a:endParaRPr>
           </a:p>
           <a:p>
             <a:pPr algn="l"/>
@@ -10834,60 +14369,33 @@
                   <a:srgbClr val="B9C4D1"/>
                 </a:solidFill>
               </a:rPr>
-              <a:t>-  Saves ~7.5 hours/week (~390 hours/year) versus doing it by hand</a:t>
-            </a:r>
-          </a:p>
-          <a:p>
-            <a:r>
-              <a:rPr sz="800">
+              <a:t>-  Closes the loop with Azure DevOps - discussion becomes tracked execution</a:t>
+            </a:r>
+          </a:p>
+          <a:p>
+            <a:endParaRPr sz="1600">
+              <a:solidFill>
+                <a:srgbClr val="B9C4D1"/>
+              </a:solidFill>
+            </a:endParaRPr>
+          </a:p>
+          <a:p>
+            <a:pPr algn="l"/>
+            <a:r>
+              <a:rPr sz="1600">
                 <a:solidFill>
                   <a:srgbClr val="B9C4D1"/>
                 </a:solidFill>
               </a:rPr>
-              <a:t/>
-            </a:r>
-          </a:p>
-          <a:p>
-            <a:pPr algn="l"/>
-            <a:r>
-              <a:rPr sz="1600">
-                <a:solidFill>
-                  <a:srgbClr val="B9C4D1"/>
-                </a:solidFill>
-              </a:rPr>
-              <a:t>-  Closes the loop with Azure DevOps - discussion becomes tracked execution</a:t>
-            </a:r>
-          </a:p>
-          <a:p>
-            <a:r>
-              <a:rPr sz="800">
-                <a:solidFill>
-                  <a:srgbClr val="B9C4D1"/>
-                </a:solidFill>
-              </a:rPr>
-              <a:t/>
-            </a:r>
-          </a:p>
-          <a:p>
-            <a:pPr algn="l"/>
-            <a:r>
-              <a:rPr sz="1600">
-                <a:solidFill>
-                  <a:srgbClr val="B9C4D1"/>
-                </a:solidFill>
-              </a:rPr>
               <a:t>-  Human-in-the-loop and draft-only at every step - safe by design</a:t>
             </a:r>
           </a:p>
           <a:p>
-            <a:r>
-              <a:rPr sz="800">
-                <a:solidFill>
-                  <a:srgbClr val="B9C4D1"/>
-                </a:solidFill>
-              </a:rPr>
-              <a:t/>
-            </a:r>
+            <a:endParaRPr sz="1600">
+              <a:solidFill>
+                <a:srgbClr val="B9C4D1"/>
+              </a:solidFill>
+            </a:endParaRPr>
           </a:p>
           <a:p>
             <a:pPr algn="l"/>
@@ -10936,7 +14444,7 @@
           </a:fontRef>
         </p:style>
         <p:txBody>
-          <a:bodyPr rtlCol="0" anchor="ctr" wrap="square"/>
+          <a:bodyPr wrap="square" rtlCol="0" anchor="ctr"/>
           <a:lstStyle/>
           <a:p>
             <a:pPr algn="l"/>
@@ -10985,7 +14493,7 @@
           </a:fontRef>
         </p:style>
         <p:txBody>
-          <a:bodyPr rtlCol="0" anchor="ctr" wrap="square"/>
+          <a:bodyPr wrap="square" rtlCol="0" anchor="ctr"/>
           <a:lstStyle/>
           <a:p>
             <a:pPr algn="l"/>
@@ -11009,7 +14517,7 @@
 </file>
 
 <file path=ppt/slides/slide19.xml><?xml version="1.0" encoding="utf-8"?>
-<p:sld xmlns:a="http://schemas.openxmlformats.org/drawingml/2006/main" xmlns:p="http://schemas.openxmlformats.org/presentationml/2006/main" xmlns:r="http://schemas.openxmlformats.org/officeDocument/2006/relationships">
+<p:sld xmlns:a="http://schemas.openxmlformats.org/drawingml/2006/main" xmlns:r="http://schemas.openxmlformats.org/officeDocument/2006/relationships" xmlns:p="http://schemas.openxmlformats.org/presentationml/2006/main">
   <p:cSld>
     <p:bg>
       <p:bgPr>
@@ -11025,7 +14533,14 @@
         <p:cNvGrpSpPr/>
         <p:nvPr/>
       </p:nvGrpSpPr>
-      <p:grpSpPr/>
+      <p:grpSpPr>
+        <a:xfrm>
+          <a:off x="0" y="0"/>
+          <a:ext cx="0" cy="0"/>
+          <a:chOff x="0" y="0"/>
+          <a:chExt cx="0" cy="0"/>
+        </a:xfrm>
+      </p:grpSpPr>
       <p:sp>
         <p:nvSpPr>
           <p:cNvPr id="2" name="Rectangle 1"/>
@@ -11066,6 +14581,7 @@
           <a:lstStyle/>
           <a:p>
             <a:pPr algn="ctr"/>
+            <a:endParaRPr/>
           </a:p>
         </p:txBody>
       </p:sp>
@@ -11103,7 +14619,7 @@
           </a:fontRef>
         </p:style>
         <p:txBody>
-          <a:bodyPr rtlCol="0" anchor="ctr" wrap="square"/>
+          <a:bodyPr wrap="square" rtlCol="0" anchor="ctr"/>
           <a:lstStyle/>
           <a:p>
             <a:pPr algn="l"/>
@@ -11163,7 +14679,7 @@
           </a:fontRef>
         </p:style>
         <p:txBody>
-          <a:bodyPr rtlCol="0" anchor="ctr" wrap="square"/>
+          <a:bodyPr wrap="square" rtlCol="0" anchor="ctr"/>
           <a:lstStyle/>
           <a:p>
             <a:pPr algn="l"/>
@@ -11187,7 +14703,7 @@
 </file>
 
 <file path=ppt/slides/slide2.xml><?xml version="1.0" encoding="utf-8"?>
-<p:sld xmlns:a="http://schemas.openxmlformats.org/drawingml/2006/main" xmlns:p="http://schemas.openxmlformats.org/presentationml/2006/main" xmlns:r="http://schemas.openxmlformats.org/officeDocument/2006/relationships">
+<p:sld xmlns:a="http://schemas.openxmlformats.org/drawingml/2006/main" xmlns:r="http://schemas.openxmlformats.org/officeDocument/2006/relationships" xmlns:p="http://schemas.openxmlformats.org/presentationml/2006/main">
   <p:cSld>
     <p:bg>
       <p:bgPr>
@@ -11203,7 +14719,14 @@
         <p:cNvGrpSpPr/>
         <p:nvPr/>
       </p:nvGrpSpPr>
-      <p:grpSpPr/>
+      <p:grpSpPr>
+        <a:xfrm>
+          <a:off x="0" y="0"/>
+          <a:ext cx="0" cy="0"/>
+          <a:chOff x="0" y="0"/>
+          <a:chExt cx="0" cy="0"/>
+        </a:xfrm>
+      </p:grpSpPr>
       <p:sp>
         <p:nvSpPr>
           <p:cNvPr id="2" name="Rectangle 1"/>
@@ -11244,6 +14767,7 @@
           <a:lstStyle/>
           <a:p>
             <a:pPr algn="ctr"/>
+            <a:endParaRPr/>
           </a:p>
         </p:txBody>
       </p:sp>
@@ -11281,7 +14805,7 @@
           </a:fontRef>
         </p:style>
         <p:txBody>
-          <a:bodyPr rtlCol="0" anchor="ctr" wrap="square"/>
+          <a:bodyPr wrap="square" rtlCol="0" anchor="ctr"/>
           <a:lstStyle/>
           <a:p>
             <a:pPr algn="l"/>
@@ -11343,7 +14867,7 @@
           </a:fontRef>
         </p:style>
         <p:txBody>
-          <a:bodyPr rtlCol="0" anchor="ctr" wrap="square"/>
+          <a:bodyPr wrap="square" rtlCol="0" anchor="ctr"/>
           <a:lstStyle/>
           <a:p>
             <a:pPr algn="ctr"/>
@@ -11392,7 +14916,7 @@
           </a:fontRef>
         </p:style>
         <p:txBody>
-          <a:bodyPr rtlCol="0" anchor="ctr" wrap="square"/>
+          <a:bodyPr wrap="square" rtlCol="0" anchor="ctr"/>
           <a:lstStyle/>
           <a:p>
             <a:pPr algn="l"/>
@@ -11441,7 +14965,7 @@
           </a:fontRef>
         </p:style>
         <p:txBody>
-          <a:bodyPr rtlCol="0" anchor="ctr" wrap="square"/>
+          <a:bodyPr wrap="square" rtlCol="0" anchor="ctr"/>
           <a:lstStyle/>
           <a:p>
             <a:pPr algn="l"/>
@@ -11492,7 +15016,7 @@
           </a:fontRef>
         </p:style>
         <p:txBody>
-          <a:bodyPr rtlCol="0" anchor="ctr" wrap="square"/>
+          <a:bodyPr wrap="square" rtlCol="0" anchor="ctr"/>
           <a:lstStyle/>
           <a:p>
             <a:pPr algn="ctr"/>
@@ -11541,7 +15065,7 @@
           </a:fontRef>
         </p:style>
         <p:txBody>
-          <a:bodyPr rtlCol="0" anchor="ctr" wrap="square"/>
+          <a:bodyPr wrap="square" rtlCol="0" anchor="ctr"/>
           <a:lstStyle/>
           <a:p>
             <a:pPr algn="l"/>
@@ -11590,7 +15114,7 @@
           </a:fontRef>
         </p:style>
         <p:txBody>
-          <a:bodyPr rtlCol="0" anchor="ctr" wrap="square"/>
+          <a:bodyPr wrap="square" rtlCol="0" anchor="ctr"/>
           <a:lstStyle/>
           <a:p>
             <a:pPr algn="l"/>
@@ -11641,7 +15165,7 @@
           </a:fontRef>
         </p:style>
         <p:txBody>
-          <a:bodyPr rtlCol="0" anchor="ctr" wrap="square"/>
+          <a:bodyPr wrap="square" rtlCol="0" anchor="ctr"/>
           <a:lstStyle/>
           <a:p>
             <a:pPr algn="ctr"/>
@@ -11690,7 +15214,7 @@
           </a:fontRef>
         </p:style>
         <p:txBody>
-          <a:bodyPr rtlCol="0" anchor="ctr" wrap="square"/>
+          <a:bodyPr wrap="square" rtlCol="0" anchor="ctr"/>
           <a:lstStyle/>
           <a:p>
             <a:pPr algn="l"/>
@@ -11739,7 +15263,7 @@
           </a:fontRef>
         </p:style>
         <p:txBody>
-          <a:bodyPr rtlCol="0" anchor="ctr" wrap="square"/>
+          <a:bodyPr wrap="square" rtlCol="0" anchor="ctr"/>
           <a:lstStyle/>
           <a:p>
             <a:pPr algn="l"/>
@@ -11790,7 +15314,7 @@
           </a:fontRef>
         </p:style>
         <p:txBody>
-          <a:bodyPr rtlCol="0" anchor="ctr" wrap="square"/>
+          <a:bodyPr wrap="square" rtlCol="0" anchor="ctr"/>
           <a:lstStyle/>
           <a:p>
             <a:pPr algn="ctr"/>
@@ -11839,7 +15363,7 @@
           </a:fontRef>
         </p:style>
         <p:txBody>
-          <a:bodyPr rtlCol="0" anchor="ctr" wrap="square"/>
+          <a:bodyPr wrap="square" rtlCol="0" anchor="ctr"/>
           <a:lstStyle/>
           <a:p>
             <a:pPr algn="l"/>
@@ -11888,7 +15412,7 @@
           </a:fontRef>
         </p:style>
         <p:txBody>
-          <a:bodyPr rtlCol="0" anchor="ctr" wrap="square"/>
+          <a:bodyPr wrap="square" rtlCol="0" anchor="ctr"/>
           <a:lstStyle/>
           <a:p>
             <a:pPr algn="l"/>
@@ -11939,7 +15463,7 @@
           </a:fontRef>
         </p:style>
         <p:txBody>
-          <a:bodyPr rtlCol="0" anchor="ctr" wrap="square"/>
+          <a:bodyPr wrap="square" rtlCol="0" anchor="ctr"/>
           <a:lstStyle/>
           <a:p>
             <a:pPr algn="ctr"/>
@@ -11988,7 +15512,7 @@
           </a:fontRef>
         </p:style>
         <p:txBody>
-          <a:bodyPr rtlCol="0" anchor="ctr" wrap="square"/>
+          <a:bodyPr wrap="square" rtlCol="0" anchor="ctr"/>
           <a:lstStyle/>
           <a:p>
             <a:pPr algn="l"/>
@@ -12037,7 +15561,7 @@
           </a:fontRef>
         </p:style>
         <p:txBody>
-          <a:bodyPr rtlCol="0" anchor="ctr" wrap="square"/>
+          <a:bodyPr wrap="square" rtlCol="0" anchor="ctr"/>
           <a:lstStyle/>
           <a:p>
             <a:pPr algn="l"/>
@@ -12088,7 +15612,7 @@
           </a:fontRef>
         </p:style>
         <p:txBody>
-          <a:bodyPr rtlCol="0" anchor="ctr" wrap="square"/>
+          <a:bodyPr wrap="square" rtlCol="0" anchor="ctr"/>
           <a:lstStyle/>
           <a:p>
             <a:pPr algn="ctr"/>
@@ -12137,7 +15661,7 @@
           </a:fontRef>
         </p:style>
         <p:txBody>
-          <a:bodyPr rtlCol="0" anchor="ctr" wrap="square"/>
+          <a:bodyPr wrap="square" rtlCol="0" anchor="ctr"/>
           <a:lstStyle/>
           <a:p>
             <a:pPr algn="l"/>
@@ -12186,7 +15710,7 @@
           </a:fontRef>
         </p:style>
         <p:txBody>
-          <a:bodyPr rtlCol="0" anchor="ctr" wrap="square"/>
+          <a:bodyPr wrap="square" rtlCol="0" anchor="ctr"/>
           <a:lstStyle/>
           <a:p>
             <a:pPr algn="l"/>
@@ -12237,7 +15761,7 @@
           </a:fontRef>
         </p:style>
         <p:txBody>
-          <a:bodyPr rtlCol="0" anchor="ctr" wrap="square"/>
+          <a:bodyPr wrap="square" rtlCol="0" anchor="ctr"/>
           <a:lstStyle/>
           <a:p>
             <a:pPr algn="ctr"/>
@@ -12286,7 +15810,7 @@
           </a:fontRef>
         </p:style>
         <p:txBody>
-          <a:bodyPr rtlCol="0" anchor="ctr" wrap="square"/>
+          <a:bodyPr wrap="square" rtlCol="0" anchor="ctr"/>
           <a:lstStyle/>
           <a:p>
             <a:pPr algn="l"/>
@@ -12335,7 +15859,7 @@
           </a:fontRef>
         </p:style>
         <p:txBody>
-          <a:bodyPr rtlCol="0" anchor="ctr" wrap="square"/>
+          <a:bodyPr wrap="square" rtlCol="0" anchor="ctr"/>
           <a:lstStyle/>
           <a:p>
             <a:pPr algn="l"/>
@@ -12386,7 +15910,7 @@
           </a:fontRef>
         </p:style>
         <p:txBody>
-          <a:bodyPr rtlCol="0" anchor="ctr" wrap="square"/>
+          <a:bodyPr wrap="square" rtlCol="0" anchor="ctr"/>
           <a:lstStyle/>
           <a:p>
             <a:pPr algn="ctr"/>
@@ -12435,7 +15959,7 @@
           </a:fontRef>
         </p:style>
         <p:txBody>
-          <a:bodyPr rtlCol="0" anchor="ctr" wrap="square"/>
+          <a:bodyPr wrap="square" rtlCol="0" anchor="ctr"/>
           <a:lstStyle/>
           <a:p>
             <a:pPr algn="l"/>
@@ -12484,7 +16008,7 @@
           </a:fontRef>
         </p:style>
         <p:txBody>
-          <a:bodyPr rtlCol="0" anchor="ctr" wrap="square"/>
+          <a:bodyPr wrap="square" rtlCol="0" anchor="ctr"/>
           <a:lstStyle/>
           <a:p>
             <a:pPr algn="l"/>
@@ -12533,7 +16057,7 @@
           </a:fontRef>
         </p:style>
         <p:txBody>
-          <a:bodyPr rtlCol="0" anchor="ctr" wrap="square"/>
+          <a:bodyPr wrap="square" rtlCol="0" anchor="ctr"/>
           <a:lstStyle/>
           <a:p>
             <a:pPr algn="l"/>
@@ -12557,7 +16081,7 @@
 </file>
 
 <file path=ppt/slides/slide3.xml><?xml version="1.0" encoding="utf-8"?>
-<p:sld xmlns:a="http://schemas.openxmlformats.org/drawingml/2006/main" xmlns:p="http://schemas.openxmlformats.org/presentationml/2006/main" xmlns:r="http://schemas.openxmlformats.org/officeDocument/2006/relationships">
+<p:sld xmlns:a="http://schemas.openxmlformats.org/drawingml/2006/main" xmlns:r="http://schemas.openxmlformats.org/officeDocument/2006/relationships" xmlns:p="http://schemas.openxmlformats.org/presentationml/2006/main">
   <p:cSld>
     <p:bg>
       <p:bgPr>
@@ -12573,7 +16097,14 @@
         <p:cNvGrpSpPr/>
         <p:nvPr/>
       </p:nvGrpSpPr>
-      <p:grpSpPr/>
+      <p:grpSpPr>
+        <a:xfrm>
+          <a:off x="0" y="0"/>
+          <a:ext cx="0" cy="0"/>
+          <a:chOff x="0" y="0"/>
+          <a:chExt cx="0" cy="0"/>
+        </a:xfrm>
+      </p:grpSpPr>
       <p:sp>
         <p:nvSpPr>
           <p:cNvPr id="2" name="Rectangle 1"/>
@@ -12614,6 +16145,7 @@
           <a:lstStyle/>
           <a:p>
             <a:pPr algn="ctr"/>
+            <a:endParaRPr/>
           </a:p>
         </p:txBody>
       </p:sp>
@@ -12651,7 +16183,7 @@
           </a:fontRef>
         </p:style>
         <p:txBody>
-          <a:bodyPr rtlCol="0" anchor="ctr" wrap="square"/>
+          <a:bodyPr wrap="square" rtlCol="0" anchor="ctr"/>
           <a:lstStyle/>
           <a:p>
             <a:pPr algn="l"/>
@@ -12700,7 +16232,7 @@
           </a:fontRef>
         </p:style>
         <p:txBody>
-          <a:bodyPr rtlCol="0" anchor="ctr" wrap="square"/>
+          <a:bodyPr wrap="square" rtlCol="0" anchor="ctr"/>
           <a:lstStyle/>
           <a:p>
             <a:pPr algn="l"/>
@@ -12749,7 +16281,7 @@
           </a:fontRef>
         </p:style>
         <p:txBody>
-          <a:bodyPr rtlCol="0" anchor="ctr" wrap="square"/>
+          <a:bodyPr wrap="square" rtlCol="0" anchor="ctr"/>
           <a:lstStyle/>
           <a:p>
             <a:pPr algn="l"/>
@@ -12773,7 +16305,7 @@
 </file>
 
 <file path=ppt/slides/slide4.xml><?xml version="1.0" encoding="utf-8"?>
-<p:sld xmlns:a="http://schemas.openxmlformats.org/drawingml/2006/main" xmlns:p="http://schemas.openxmlformats.org/presentationml/2006/main" xmlns:r="http://schemas.openxmlformats.org/officeDocument/2006/relationships">
+<p:sld xmlns:a="http://schemas.openxmlformats.org/drawingml/2006/main" xmlns:r="http://schemas.openxmlformats.org/officeDocument/2006/relationships" xmlns:p="http://schemas.openxmlformats.org/presentationml/2006/main">
   <p:cSld>
     <p:bg>
       <p:bgPr>
@@ -12789,7 +16321,14 @@
         <p:cNvGrpSpPr/>
         <p:nvPr/>
       </p:nvGrpSpPr>
-      <p:grpSpPr/>
+      <p:grpSpPr>
+        <a:xfrm>
+          <a:off x="0" y="0"/>
+          <a:ext cx="0" cy="0"/>
+          <a:chOff x="0" y="0"/>
+          <a:chExt cx="0" cy="0"/>
+        </a:xfrm>
+      </p:grpSpPr>
       <p:sp>
         <p:nvSpPr>
           <p:cNvPr id="2" name="Rectangle 1"/>
@@ -12830,6 +16369,7 @@
           <a:lstStyle/>
           <a:p>
             <a:pPr algn="ctr"/>
+            <a:endParaRPr/>
           </a:p>
         </p:txBody>
       </p:sp>
@@ -12867,7 +16407,7 @@
           </a:fontRef>
         </p:style>
         <p:txBody>
-          <a:bodyPr rtlCol="0" anchor="ctr" wrap="square"/>
+          <a:bodyPr wrap="square" rtlCol="0" anchor="ctr"/>
           <a:lstStyle/>
           <a:p>
             <a:pPr algn="l"/>
@@ -12927,7 +16467,7 @@
           </a:fontRef>
         </p:style>
         <p:txBody>
-          <a:bodyPr rtlCol="0" anchor="ctr" wrap="square"/>
+          <a:bodyPr wrap="square" rtlCol="0" anchor="ctr"/>
           <a:lstStyle/>
           <a:p>
             <a:pPr algn="l"/>
@@ -12984,6 +16524,7 @@
           <a:lstStyle/>
           <a:p>
             <a:pPr algn="ctr"/>
+            <a:endParaRPr/>
           </a:p>
         </p:txBody>
       </p:sp>
@@ -13027,6 +16568,7 @@
           <a:lstStyle/>
           <a:p>
             <a:pPr algn="ctr"/>
+            <a:endParaRPr/>
           </a:p>
         </p:txBody>
       </p:sp>
@@ -13064,7 +16606,7 @@
           </a:fontRef>
         </p:style>
         <p:txBody>
-          <a:bodyPr rtlCol="0" anchor="ctr" wrap="square"/>
+          <a:bodyPr wrap="square" rtlCol="0" anchor="ctr"/>
           <a:lstStyle/>
           <a:p>
             <a:pPr algn="l"/>
@@ -13113,7 +16655,7 @@
           </a:fontRef>
         </p:style>
         <p:txBody>
-          <a:bodyPr rtlCol="0" anchor="t" wrap="square"/>
+          <a:bodyPr wrap="square" rtlCol="0" anchor="t"/>
           <a:lstStyle/>
           <a:p>
             <a:pPr algn="l"/>
@@ -13127,14 +16669,29 @@
             </a:r>
           </a:p>
           <a:p>
-            <a:r>
-              <a:rPr sz="300">
+            <a:endParaRPr sz="1100">
+              <a:solidFill>
+                <a:srgbClr val="2C3E50"/>
+              </a:solidFill>
+            </a:endParaRPr>
+          </a:p>
+          <a:p>
+            <a:pPr algn="l"/>
+            <a:r>
+              <a:rPr sz="1100">
                 <a:solidFill>
                   <a:srgbClr val="2C3E50"/>
                 </a:solidFill>
               </a:rPr>
-              <a:t/>
-            </a:r>
+              <a:t>•  Pull out the real opportunities by hand</a:t>
+            </a:r>
+          </a:p>
+          <a:p>
+            <a:endParaRPr sz="1100">
+              <a:solidFill>
+                <a:srgbClr val="2C3E50"/>
+              </a:solidFill>
+            </a:endParaRPr>
           </a:p>
           <a:p>
             <a:pPr algn="l"/>
@@ -13144,39 +16701,15 @@
                   <a:srgbClr val="2C3E50"/>
                 </a:solidFill>
               </a:rPr>
-              <a:t>•  Pull out the real opportunities by hand</a:t>
-            </a:r>
-          </a:p>
-          <a:p>
-            <a:r>
-              <a:rPr sz="300">
-                <a:solidFill>
-                  <a:srgbClr val="2C3E50"/>
-                </a:solidFill>
-              </a:rPr>
-              <a:t/>
-            </a:r>
-          </a:p>
-          <a:p>
-            <a:pPr algn="l"/>
-            <a:r>
-              <a:rPr sz="1100">
-                <a:solidFill>
-                  <a:srgbClr val="2C3E50"/>
-                </a:solidFill>
-              </a:rPr>
               <a:t>•  Fill ~40 fields per idea in a spreadsheet</a:t>
             </a:r>
           </a:p>
           <a:p>
-            <a:r>
-              <a:rPr sz="300">
-                <a:solidFill>
-                  <a:srgbClr val="2C3E50"/>
-                </a:solidFill>
-              </a:rPr>
-              <a:t/>
-            </a:r>
+            <a:endParaRPr sz="1100">
+              <a:solidFill>
+                <a:srgbClr val="2C3E50"/>
+              </a:solidFill>
+            </a:endParaRPr>
           </a:p>
           <a:p>
             <a:pPr algn="l"/>
@@ -13233,6 +16766,7 @@
           <a:lstStyle/>
           <a:p>
             <a:pPr algn="ctr"/>
+            <a:endParaRPr/>
           </a:p>
         </p:txBody>
       </p:sp>
@@ -13276,6 +16810,7 @@
           <a:lstStyle/>
           <a:p>
             <a:pPr algn="ctr"/>
+            <a:endParaRPr/>
           </a:p>
         </p:txBody>
       </p:sp>
@@ -13313,7 +16848,7 @@
           </a:fontRef>
         </p:style>
         <p:txBody>
-          <a:bodyPr rtlCol="0" anchor="ctr" wrap="square"/>
+          <a:bodyPr wrap="square" rtlCol="0" anchor="ctr"/>
           <a:lstStyle/>
           <a:p>
             <a:pPr algn="l"/>
@@ -13362,7 +16897,7 @@
           </a:fontRef>
         </p:style>
         <p:txBody>
-          <a:bodyPr rtlCol="0" anchor="t" wrap="square"/>
+          <a:bodyPr wrap="square" rtlCol="0" anchor="t"/>
           <a:lstStyle/>
           <a:p>
             <a:pPr algn="l"/>
@@ -13376,14 +16911,29 @@
             </a:r>
           </a:p>
           <a:p>
-            <a:r>
-              <a:rPr sz="300">
+            <a:endParaRPr sz="1100">
+              <a:solidFill>
+                <a:srgbClr val="2C3E50"/>
+              </a:solidFill>
+            </a:endParaRPr>
+          </a:p>
+          <a:p>
+            <a:pPr algn="l"/>
+            <a:r>
+              <a:rPr sz="1100">
                 <a:solidFill>
                   <a:srgbClr val="2C3E50"/>
                 </a:solidFill>
               </a:rPr>
-              <a:t/>
-            </a:r>
+              <a:t>•  No shared classification language</a:t>
+            </a:r>
+          </a:p>
+          <a:p>
+            <a:endParaRPr sz="1100">
+              <a:solidFill>
+                <a:srgbClr val="2C3E50"/>
+              </a:solidFill>
+            </a:endParaRPr>
           </a:p>
           <a:p>
             <a:pPr algn="l"/>
@@ -13393,39 +16943,15 @@
                   <a:srgbClr val="2C3E50"/>
                 </a:solidFill>
               </a:rPr>
-              <a:t>•  No shared classification language</a:t>
-            </a:r>
-          </a:p>
-          <a:p>
-            <a:r>
-              <a:rPr sz="300">
-                <a:solidFill>
-                  <a:srgbClr val="2C3E50"/>
-                </a:solidFill>
-              </a:rPr>
-              <a:t/>
-            </a:r>
-          </a:p>
-          <a:p>
-            <a:pPr algn="l"/>
-            <a:r>
-              <a:rPr sz="1100">
-                <a:solidFill>
-                  <a:srgbClr val="2C3E50"/>
-                </a:solidFill>
-              </a:rPr>
               <a:t>•  Hard to compare week over week</a:t>
             </a:r>
           </a:p>
           <a:p>
-            <a:r>
-              <a:rPr sz="300">
-                <a:solidFill>
-                  <a:srgbClr val="2C3E50"/>
-                </a:solidFill>
-              </a:rPr>
-              <a:t/>
-            </a:r>
+            <a:endParaRPr sz="1100">
+              <a:solidFill>
+                <a:srgbClr val="2C3E50"/>
+              </a:solidFill>
+            </a:endParaRPr>
           </a:p>
           <a:p>
             <a:pPr algn="l"/>
@@ -13482,6 +17008,7 @@
           <a:lstStyle/>
           <a:p>
             <a:pPr algn="ctr"/>
+            <a:endParaRPr/>
           </a:p>
         </p:txBody>
       </p:sp>
@@ -13525,6 +17052,7 @@
           <a:lstStyle/>
           <a:p>
             <a:pPr algn="ctr"/>
+            <a:endParaRPr/>
           </a:p>
         </p:txBody>
       </p:sp>
@@ -13562,7 +17090,7 @@
           </a:fontRef>
         </p:style>
         <p:txBody>
-          <a:bodyPr rtlCol="0" anchor="ctr" wrap="square"/>
+          <a:bodyPr wrap="square" rtlCol="0" anchor="ctr"/>
           <a:lstStyle/>
           <a:p>
             <a:pPr algn="l"/>
@@ -13611,7 +17139,7 @@
           </a:fontRef>
         </p:style>
         <p:txBody>
-          <a:bodyPr rtlCol="0" anchor="t" wrap="square"/>
+          <a:bodyPr wrap="square" rtlCol="0" anchor="t"/>
           <a:lstStyle/>
           <a:p>
             <a:pPr algn="l"/>
@@ -13625,14 +17153,29 @@
             </a:r>
           </a:p>
           <a:p>
-            <a:r>
-              <a:rPr sz="300">
+            <a:endParaRPr sz="1100">
+              <a:solidFill>
+                <a:srgbClr val="2C3E50"/>
+              </a:solidFill>
+            </a:endParaRPr>
+          </a:p>
+          <a:p>
+            <a:pPr algn="l"/>
+            <a:r>
+              <a:rPr sz="1100">
                 <a:solidFill>
                   <a:srgbClr val="2C3E50"/>
                 </a:solidFill>
               </a:rPr>
-              <a:t/>
-            </a:r>
+              <a:t>•  No link to who would actually do them</a:t>
+            </a:r>
+          </a:p>
+          <a:p>
+            <a:endParaRPr sz="1100">
+              <a:solidFill>
+                <a:srgbClr val="2C3E50"/>
+              </a:solidFill>
+            </a:endParaRPr>
           </a:p>
           <a:p>
             <a:pPr algn="l"/>
@@ -13642,39 +17185,15 @@
                   <a:srgbClr val="2C3E50"/>
                 </a:solidFill>
               </a:rPr>
-              <a:t>•  No link to who would actually do them</a:t>
-            </a:r>
-          </a:p>
-          <a:p>
-            <a:r>
-              <a:rPr sz="300">
-                <a:solidFill>
-                  <a:srgbClr val="2C3E50"/>
-                </a:solidFill>
-              </a:rPr>
-              <a:t/>
-            </a:r>
-          </a:p>
-          <a:p>
-            <a:pPr algn="l"/>
-            <a:r>
-              <a:rPr sz="1100">
-                <a:solidFill>
-                  <a:srgbClr val="2C3E50"/>
-                </a:solidFill>
-              </a:rPr>
               <a:t>•  'Did anything happen with X?' - nobody knew</a:t>
             </a:r>
           </a:p>
           <a:p>
-            <a:r>
-              <a:rPr sz="300">
-                <a:solidFill>
-                  <a:srgbClr val="2C3E50"/>
-                </a:solidFill>
-              </a:rPr>
-              <a:t/>
-            </a:r>
+            <a:endParaRPr sz="1100">
+              <a:solidFill>
+                <a:srgbClr val="2C3E50"/>
+              </a:solidFill>
+            </a:endParaRPr>
           </a:p>
           <a:p>
             <a:pPr algn="l"/>
@@ -13725,7 +17244,7 @@
           </a:fontRef>
         </p:style>
         <p:txBody>
-          <a:bodyPr rtlCol="0" anchor="ctr" wrap="square"/>
+          <a:bodyPr wrap="square" rtlCol="0" anchor="ctr"/>
           <a:lstStyle/>
           <a:p>
             <a:pPr algn="ctr"/>
@@ -13774,7 +17293,7 @@
           </a:fontRef>
         </p:style>
         <p:txBody>
-          <a:bodyPr rtlCol="0" anchor="ctr" wrap="square"/>
+          <a:bodyPr wrap="square" rtlCol="0" anchor="ctr"/>
           <a:lstStyle/>
           <a:p>
             <a:pPr algn="l"/>
@@ -13798,7 +17317,7 @@
 </file>
 
 <file path=ppt/slides/slide5.xml><?xml version="1.0" encoding="utf-8"?>
-<p:sld xmlns:a="http://schemas.openxmlformats.org/drawingml/2006/main" xmlns:p="http://schemas.openxmlformats.org/presentationml/2006/main" xmlns:r="http://schemas.openxmlformats.org/officeDocument/2006/relationships">
+<p:sld xmlns:a="http://schemas.openxmlformats.org/drawingml/2006/main" xmlns:r="http://schemas.openxmlformats.org/officeDocument/2006/relationships" xmlns:p="http://schemas.openxmlformats.org/presentationml/2006/main">
   <p:cSld>
     <p:bg>
       <p:bgPr>
@@ -13814,7 +17333,14 @@
         <p:cNvGrpSpPr/>
         <p:nvPr/>
       </p:nvGrpSpPr>
-      <p:grpSpPr/>
+      <p:grpSpPr>
+        <a:xfrm>
+          <a:off x="0" y="0"/>
+          <a:ext cx="0" cy="0"/>
+          <a:chOff x="0" y="0"/>
+          <a:chExt cx="0" cy="0"/>
+        </a:xfrm>
+      </p:grpSpPr>
       <p:sp>
         <p:nvSpPr>
           <p:cNvPr id="2" name="Rectangle 1"/>
@@ -13855,6 +17381,7 @@
           <a:lstStyle/>
           <a:p>
             <a:pPr algn="ctr"/>
+            <a:endParaRPr/>
           </a:p>
         </p:txBody>
       </p:sp>
@@ -13892,7 +17419,7 @@
           </a:fontRef>
         </p:style>
         <p:txBody>
-          <a:bodyPr rtlCol="0" anchor="ctr" wrap="square"/>
+          <a:bodyPr wrap="square" rtlCol="0" anchor="ctr"/>
           <a:lstStyle/>
           <a:p>
             <a:pPr algn="l"/>
@@ -13952,7 +17479,7 @@
           </a:fontRef>
         </p:style>
         <p:txBody>
-          <a:bodyPr rtlCol="0" anchor="ctr" wrap="square"/>
+          <a:bodyPr wrap="square" rtlCol="0" anchor="ctr"/>
           <a:lstStyle/>
           <a:p>
             <a:pPr algn="l"/>
@@ -14003,18 +17530,11 @@
           </a:fontRef>
         </p:style>
         <p:txBody>
-          <a:bodyPr rtlCol="0" anchor="ctr" wrap="square"/>
+          <a:bodyPr wrap="square" rtlCol="0" anchor="ctr"/>
           <a:lstStyle/>
           <a:p>
             <a:pPr algn="ctr"/>
-            <a:r>
-              <a:rPr sz="1100" b="1">
-                <a:solidFill>
-                  <a:srgbClr val="FFFFFF"/>
-                </a:solidFill>
-              </a:rPr>
-              <a:t/>
-            </a:r>
+            <a:endParaRPr/>
           </a:p>
         </p:txBody>
       </p:sp>
@@ -14052,7 +17572,7 @@
           </a:fontRef>
         </p:style>
         <p:txBody>
-          <a:bodyPr rtlCol="0" anchor="ctr" wrap="square"/>
+          <a:bodyPr wrap="square" rtlCol="0" anchor="ctr"/>
           <a:lstStyle/>
           <a:p>
             <a:pPr algn="ctr"/>
@@ -14101,7 +17621,7 @@
           </a:fontRef>
         </p:style>
         <p:txBody>
-          <a:bodyPr rtlCol="0" anchor="ctr" wrap="square"/>
+          <a:bodyPr wrap="square" rtlCol="0" anchor="ctr"/>
           <a:lstStyle/>
           <a:p>
             <a:pPr algn="ctr"/>
@@ -14150,7 +17670,7 @@
           </a:fontRef>
         </p:style>
         <p:txBody>
-          <a:bodyPr rtlCol="0" anchor="ctr" wrap="square"/>
+          <a:bodyPr wrap="square" rtlCol="0" anchor="ctr"/>
           <a:lstStyle/>
           <a:p>
             <a:pPr algn="ctr"/>
@@ -14201,18 +17721,11 @@
           </a:fontRef>
         </p:style>
         <p:txBody>
-          <a:bodyPr rtlCol="0" anchor="ctr" wrap="square"/>
+          <a:bodyPr wrap="square" rtlCol="0" anchor="ctr"/>
           <a:lstStyle/>
           <a:p>
             <a:pPr algn="ctr"/>
-            <a:r>
-              <a:rPr sz="1100" b="1">
-                <a:solidFill>
-                  <a:srgbClr val="FFFFFF"/>
-                </a:solidFill>
-              </a:rPr>
-              <a:t/>
-            </a:r>
+            <a:endParaRPr/>
           </a:p>
         </p:txBody>
       </p:sp>
@@ -14250,7 +17763,7 @@
           </a:fontRef>
         </p:style>
         <p:txBody>
-          <a:bodyPr rtlCol="0" anchor="ctr" wrap="square"/>
+          <a:bodyPr wrap="square" rtlCol="0" anchor="ctr"/>
           <a:lstStyle/>
           <a:p>
             <a:pPr algn="ctr"/>
@@ -14299,7 +17812,7 @@
           </a:fontRef>
         </p:style>
         <p:txBody>
-          <a:bodyPr rtlCol="0" anchor="ctr" wrap="square"/>
+          <a:bodyPr wrap="square" rtlCol="0" anchor="ctr"/>
           <a:lstStyle/>
           <a:p>
             <a:pPr algn="ctr"/>
@@ -14348,7 +17861,7 @@
           </a:fontRef>
         </p:style>
         <p:txBody>
-          <a:bodyPr rtlCol="0" anchor="ctr" wrap="square"/>
+          <a:bodyPr wrap="square" rtlCol="0" anchor="ctr"/>
           <a:lstStyle/>
           <a:p>
             <a:pPr algn="ctr"/>
@@ -14399,18 +17912,11 @@
           </a:fontRef>
         </p:style>
         <p:txBody>
-          <a:bodyPr rtlCol="0" anchor="ctr" wrap="square"/>
+          <a:bodyPr wrap="square" rtlCol="0" anchor="ctr"/>
           <a:lstStyle/>
           <a:p>
             <a:pPr algn="ctr"/>
-            <a:r>
-              <a:rPr sz="1100" b="1">
-                <a:solidFill>
-                  <a:srgbClr val="FFFFFF"/>
-                </a:solidFill>
-              </a:rPr>
-              <a:t/>
-            </a:r>
+            <a:endParaRPr/>
           </a:p>
         </p:txBody>
       </p:sp>
@@ -14448,7 +17954,7 @@
           </a:fontRef>
         </p:style>
         <p:txBody>
-          <a:bodyPr rtlCol="0" anchor="ctr" wrap="square"/>
+          <a:bodyPr wrap="square" rtlCol="0" anchor="ctr"/>
           <a:lstStyle/>
           <a:p>
             <a:pPr algn="ctr"/>
@@ -14497,7 +18003,7 @@
           </a:fontRef>
         </p:style>
         <p:txBody>
-          <a:bodyPr rtlCol="0" anchor="ctr" wrap="square"/>
+          <a:bodyPr wrap="square" rtlCol="0" anchor="ctr"/>
           <a:lstStyle/>
           <a:p>
             <a:pPr algn="ctr"/>
@@ -14546,7 +18052,7 @@
           </a:fontRef>
         </p:style>
         <p:txBody>
-          <a:bodyPr rtlCol="0" anchor="ctr" wrap="square"/>
+          <a:bodyPr wrap="square" rtlCol="0" anchor="ctr"/>
           <a:lstStyle/>
           <a:p>
             <a:pPr algn="ctr"/>
@@ -14597,18 +18103,11 @@
           </a:fontRef>
         </p:style>
         <p:txBody>
-          <a:bodyPr rtlCol="0" anchor="ctr" wrap="square"/>
+          <a:bodyPr wrap="square" rtlCol="0" anchor="ctr"/>
           <a:lstStyle/>
           <a:p>
             <a:pPr algn="ctr"/>
-            <a:r>
-              <a:rPr sz="1100" b="1">
-                <a:solidFill>
-                  <a:srgbClr val="FFFFFF"/>
-                </a:solidFill>
-              </a:rPr>
-              <a:t/>
-            </a:r>
+            <a:endParaRPr/>
           </a:p>
         </p:txBody>
       </p:sp>
@@ -14646,7 +18145,7 @@
           </a:fontRef>
         </p:style>
         <p:txBody>
-          <a:bodyPr rtlCol="0" anchor="ctr" wrap="square"/>
+          <a:bodyPr wrap="square" rtlCol="0" anchor="ctr"/>
           <a:lstStyle/>
           <a:p>
             <a:pPr algn="ctr"/>
@@ -14695,7 +18194,7 @@
           </a:fontRef>
         </p:style>
         <p:txBody>
-          <a:bodyPr rtlCol="0" anchor="ctr" wrap="square"/>
+          <a:bodyPr wrap="square" rtlCol="0" anchor="ctr"/>
           <a:lstStyle/>
           <a:p>
             <a:pPr algn="ctr"/>
@@ -14744,7 +18243,7 @@
           </a:fontRef>
         </p:style>
         <p:txBody>
-          <a:bodyPr rtlCol="0" anchor="ctr" wrap="square"/>
+          <a:bodyPr wrap="square" rtlCol="0" anchor="ctr"/>
           <a:lstStyle/>
           <a:p>
             <a:pPr algn="ctr"/>
@@ -14795,18 +18294,11 @@
           </a:fontRef>
         </p:style>
         <p:txBody>
-          <a:bodyPr rtlCol="0" anchor="ctr" wrap="square"/>
+          <a:bodyPr wrap="square" rtlCol="0" anchor="ctr"/>
           <a:lstStyle/>
           <a:p>
             <a:pPr algn="ctr"/>
-            <a:r>
-              <a:rPr sz="1100" b="1">
-                <a:solidFill>
-                  <a:srgbClr val="FFFFFF"/>
-                </a:solidFill>
-              </a:rPr>
-              <a:t/>
-            </a:r>
+            <a:endParaRPr/>
           </a:p>
         </p:txBody>
       </p:sp>
@@ -14844,7 +18336,7 @@
           </a:fontRef>
         </p:style>
         <p:txBody>
-          <a:bodyPr rtlCol="0" anchor="ctr" wrap="square"/>
+          <a:bodyPr wrap="square" rtlCol="0" anchor="ctr"/>
           <a:lstStyle/>
           <a:p>
             <a:pPr algn="ctr"/>
@@ -14893,7 +18385,7 @@
           </a:fontRef>
         </p:style>
         <p:txBody>
-          <a:bodyPr rtlCol="0" anchor="ctr" wrap="square"/>
+          <a:bodyPr wrap="square" rtlCol="0" anchor="ctr"/>
           <a:lstStyle/>
           <a:p>
             <a:pPr algn="ctr"/>
@@ -14950,6 +18442,7 @@
           <a:lstStyle/>
           <a:p>
             <a:pPr algn="ctr"/>
+            <a:endParaRPr/>
           </a:p>
         </p:txBody>
       </p:sp>
@@ -14993,6 +18486,7 @@
           <a:lstStyle/>
           <a:p>
             <a:pPr algn="ctr"/>
+            <a:endParaRPr/>
           </a:p>
         </p:txBody>
       </p:sp>
@@ -15030,7 +18524,7 @@
           </a:fontRef>
         </p:style>
         <p:txBody>
-          <a:bodyPr rtlCol="0" anchor="ctr" wrap="square"/>
+          <a:bodyPr wrap="square" rtlCol="0" anchor="ctr"/>
           <a:lstStyle/>
           <a:p>
             <a:pPr algn="l"/>
@@ -15079,7 +18573,7 @@
           </a:fontRef>
         </p:style>
         <p:txBody>
-          <a:bodyPr rtlCol="0" anchor="t" wrap="square"/>
+          <a:bodyPr wrap="square" rtlCol="0" anchor="t"/>
           <a:lstStyle/>
           <a:p>
             <a:pPr algn="l"/>
@@ -15093,14 +18587,29 @@
             </a:r>
           </a:p>
           <a:p>
-            <a:r>
-              <a:rPr sz="300">
+            <a:endParaRPr sz="1100">
+              <a:solidFill>
+                <a:srgbClr val="2C3E50"/>
+              </a:solidFill>
+            </a:endParaRPr>
+          </a:p>
+          <a:p>
+            <a:pPr algn="l"/>
+            <a:r>
+              <a:rPr sz="1100">
                 <a:solidFill>
                   <a:srgbClr val="2C3E50"/>
                 </a:solidFill>
               </a:rPr>
-              <a:t/>
-            </a:r>
+              <a:t>•  Every AI output is DRAFT-only, defaults to 'Needs Review'</a:t>
+            </a:r>
+          </a:p>
+          <a:p>
+            <a:endParaRPr sz="1100">
+              <a:solidFill>
+                <a:srgbClr val="2C3E50"/>
+              </a:solidFill>
+            </a:endParaRPr>
           </a:p>
           <a:p>
             <a:pPr algn="l"/>
@@ -15110,39 +18619,15 @@
                   <a:srgbClr val="2C3E50"/>
                 </a:solidFill>
               </a:rPr>
-              <a:t>•  Every AI output is DRAFT-only, defaults to 'Needs Review'</a:t>
-            </a:r>
-          </a:p>
-          <a:p>
-            <a:r>
-              <a:rPr sz="300">
-                <a:solidFill>
-                  <a:srgbClr val="2C3E50"/>
-                </a:solidFill>
-              </a:rPr>
-              <a:t/>
-            </a:r>
-          </a:p>
-          <a:p>
-            <a:pPr algn="l"/>
-            <a:r>
-              <a:rPr sz="1100">
-                <a:solidFill>
-                  <a:srgbClr val="2C3E50"/>
-                </a:solidFill>
-              </a:rPr>
               <a:t>•  Human review required before any SharePoint or ADO push</a:t>
             </a:r>
           </a:p>
           <a:p>
-            <a:r>
-              <a:rPr sz="300">
-                <a:solidFill>
-                  <a:srgbClr val="2C3E50"/>
-                </a:solidFill>
-              </a:rPr>
-              <a:t/>
-            </a:r>
+            <a:endParaRPr sz="1100">
+              <a:solidFill>
+                <a:srgbClr val="2C3E50"/>
+              </a:solidFill>
+            </a:endParaRPr>
           </a:p>
           <a:p>
             <a:pPr algn="l"/>
@@ -15199,6 +18684,7 @@
           <a:lstStyle/>
           <a:p>
             <a:pPr algn="ctr"/>
+            <a:endParaRPr/>
           </a:p>
         </p:txBody>
       </p:sp>
@@ -15242,6 +18728,7 @@
           <a:lstStyle/>
           <a:p>
             <a:pPr algn="ctr"/>
+            <a:endParaRPr/>
           </a:p>
         </p:txBody>
       </p:sp>
@@ -15279,7 +18766,7 @@
           </a:fontRef>
         </p:style>
         <p:txBody>
-          <a:bodyPr rtlCol="0" anchor="ctr" wrap="square"/>
+          <a:bodyPr wrap="square" rtlCol="0" anchor="ctr"/>
           <a:lstStyle/>
           <a:p>
             <a:pPr algn="l"/>
@@ -15328,7 +18815,7 @@
           </a:fontRef>
         </p:style>
         <p:txBody>
-          <a:bodyPr rtlCol="0" anchor="t" wrap="square"/>
+          <a:bodyPr wrap="square" rtlCol="0" anchor="t"/>
           <a:lstStyle/>
           <a:p>
             <a:pPr algn="l"/>
@@ -15342,14 +18829,29 @@
             </a:r>
           </a:p>
           <a:p>
-            <a:r>
-              <a:rPr sz="300">
+            <a:endParaRPr sz="1100">
+              <a:solidFill>
+                <a:srgbClr val="2C3E50"/>
+              </a:solidFill>
+            </a:endParaRPr>
+          </a:p>
+          <a:p>
+            <a:pPr algn="l"/>
+            <a:r>
+              <a:rPr sz="1100">
                 <a:solidFill>
                   <a:srgbClr val="2C3E50"/>
                 </a:solidFill>
               </a:rPr>
-              <a:t/>
-            </a:r>
+              <a:t>•  AI used only for the two semantic steps: extract + classify</a:t>
+            </a:r>
+          </a:p>
+          <a:p>
+            <a:endParaRPr sz="1100">
+              <a:solidFill>
+                <a:srgbClr val="2C3E50"/>
+              </a:solidFill>
+            </a:endParaRPr>
           </a:p>
           <a:p>
             <a:pPr algn="l"/>
@@ -15359,39 +18861,15 @@
                   <a:srgbClr val="2C3E50"/>
                 </a:solidFill>
               </a:rPr>
-              <a:t>•  AI used only for the two semantic steps: extract + classify</a:t>
-            </a:r>
-          </a:p>
-          <a:p>
-            <a:r>
-              <a:rPr sz="300">
-                <a:solidFill>
-                  <a:srgbClr val="2C3E50"/>
-                </a:solidFill>
-              </a:rPr>
-              <a:t/>
-            </a:r>
-          </a:p>
-          <a:p>
-            <a:pPr algn="l"/>
-            <a:r>
-              <a:rPr sz="1100">
-                <a:solidFill>
-                  <a:srgbClr val="2C3E50"/>
-                </a:solidFill>
-              </a:rPr>
               <a:t>•  Runs on your existing GitHub Copilot subscription - no new key</a:t>
             </a:r>
           </a:p>
           <a:p>
-            <a:r>
-              <a:rPr sz="300">
-                <a:solidFill>
-                  <a:srgbClr val="2C3E50"/>
-                </a:solidFill>
-              </a:rPr>
-              <a:t/>
-            </a:r>
+            <a:endParaRPr sz="1100">
+              <a:solidFill>
+                <a:srgbClr val="2C3E50"/>
+              </a:solidFill>
+            </a:endParaRPr>
           </a:p>
           <a:p>
             <a:pPr algn="l"/>
@@ -15440,7 +18918,7 @@
           </a:fontRef>
         </p:style>
         <p:txBody>
-          <a:bodyPr rtlCol="0" anchor="ctr" wrap="square"/>
+          <a:bodyPr wrap="square" rtlCol="0" anchor="ctr"/>
           <a:lstStyle/>
           <a:p>
             <a:pPr algn="l"/>
@@ -15464,7 +18942,7 @@
 </file>
 
 <file path=ppt/slides/slide6.xml><?xml version="1.0" encoding="utf-8"?>
-<p:sld xmlns:a="http://schemas.openxmlformats.org/drawingml/2006/main" xmlns:p="http://schemas.openxmlformats.org/presentationml/2006/main" xmlns:r="http://schemas.openxmlformats.org/officeDocument/2006/relationships">
+<p:sld xmlns:a="http://schemas.openxmlformats.org/drawingml/2006/main" xmlns:r="http://schemas.openxmlformats.org/officeDocument/2006/relationships" xmlns:p="http://schemas.openxmlformats.org/presentationml/2006/main">
   <p:cSld>
     <p:bg>
       <p:bgPr>
@@ -15480,7 +18958,14 @@
         <p:cNvGrpSpPr/>
         <p:nvPr/>
       </p:nvGrpSpPr>
-      <p:grpSpPr/>
+      <p:grpSpPr>
+        <a:xfrm>
+          <a:off x="0" y="0"/>
+          <a:ext cx="0" cy="0"/>
+          <a:chOff x="0" y="0"/>
+          <a:chExt cx="0" cy="0"/>
+        </a:xfrm>
+      </p:grpSpPr>
       <p:sp>
         <p:nvSpPr>
           <p:cNvPr id="2" name="Rectangle 1"/>
@@ -15521,6 +19006,7 @@
           <a:lstStyle/>
           <a:p>
             <a:pPr algn="ctr"/>
+            <a:endParaRPr/>
           </a:p>
         </p:txBody>
       </p:sp>
@@ -15558,7 +19044,7 @@
           </a:fontRef>
         </p:style>
         <p:txBody>
-          <a:bodyPr rtlCol="0" anchor="ctr" wrap="square"/>
+          <a:bodyPr wrap="square" rtlCol="0" anchor="ctr"/>
           <a:lstStyle/>
           <a:p>
             <a:pPr algn="l"/>
@@ -15607,7 +19093,7 @@
           </a:fontRef>
         </p:style>
         <p:txBody>
-          <a:bodyPr rtlCol="0" anchor="ctr" wrap="square"/>
+          <a:bodyPr wrap="square" rtlCol="0" anchor="ctr"/>
           <a:lstStyle/>
           <a:p>
             <a:pPr algn="l"/>
@@ -15656,7 +19142,7 @@
           </a:fontRef>
         </p:style>
         <p:txBody>
-          <a:bodyPr rtlCol="0" anchor="ctr" wrap="square"/>
+          <a:bodyPr wrap="square" rtlCol="0" anchor="ctr"/>
           <a:lstStyle/>
           <a:p>
             <a:pPr algn="l"/>
@@ -15680,7 +19166,7 @@
 </file>
 
 <file path=ppt/slides/slide7.xml><?xml version="1.0" encoding="utf-8"?>
-<p:sld xmlns:a="http://schemas.openxmlformats.org/drawingml/2006/main" xmlns:p="http://schemas.openxmlformats.org/presentationml/2006/main" xmlns:r="http://schemas.openxmlformats.org/officeDocument/2006/relationships">
+<p:sld xmlns:a="http://schemas.openxmlformats.org/drawingml/2006/main" xmlns:r="http://schemas.openxmlformats.org/officeDocument/2006/relationships" xmlns:p="http://schemas.openxmlformats.org/presentationml/2006/main">
   <p:cSld>
     <p:bg>
       <p:bgPr>
@@ -15696,7 +19182,14 @@
         <p:cNvGrpSpPr/>
         <p:nvPr/>
       </p:nvGrpSpPr>
-      <p:grpSpPr/>
+      <p:grpSpPr>
+        <a:xfrm>
+          <a:off x="0" y="0"/>
+          <a:ext cx="0" cy="0"/>
+          <a:chOff x="0" y="0"/>
+          <a:chExt cx="0" cy="0"/>
+        </a:xfrm>
+      </p:grpSpPr>
       <p:sp>
         <p:nvSpPr>
           <p:cNvPr id="2" name="Rectangle 1"/>
@@ -15737,6 +19230,7 @@
           <a:lstStyle/>
           <a:p>
             <a:pPr algn="ctr"/>
+            <a:endParaRPr/>
           </a:p>
         </p:txBody>
       </p:sp>
@@ -15774,7 +19268,7 @@
           </a:fontRef>
         </p:style>
         <p:txBody>
-          <a:bodyPr rtlCol="0" anchor="ctr" wrap="square"/>
+          <a:bodyPr wrap="square" rtlCol="0" anchor="ctr"/>
           <a:lstStyle/>
           <a:p>
             <a:pPr algn="l"/>
@@ -15836,7 +19330,7 @@
           </a:fontRef>
         </p:style>
         <p:txBody>
-          <a:bodyPr rtlCol="0" anchor="ctr" wrap="square"/>
+          <a:bodyPr wrap="square" rtlCol="0" anchor="ctr"/>
           <a:lstStyle/>
           <a:p>
             <a:pPr algn="l"/>
@@ -15893,6 +19387,7 @@
           <a:lstStyle/>
           <a:p>
             <a:pPr algn="ctr"/>
+            <a:endParaRPr/>
           </a:p>
         </p:txBody>
       </p:sp>
@@ -15930,7 +19425,7 @@
           </a:fontRef>
         </p:style>
         <p:txBody>
-          <a:bodyPr rtlCol="0" anchor="ctr" wrap="square"/>
+          <a:bodyPr wrap="square" rtlCol="0" anchor="ctr"/>
           <a:lstStyle/>
           <a:p>
             <a:pPr algn="l"/>
@@ -15979,7 +19474,7 @@
           </a:fontRef>
         </p:style>
         <p:txBody>
-          <a:bodyPr rtlCol="0" anchor="ctr" wrap="square"/>
+          <a:bodyPr wrap="square" rtlCol="0" anchor="ctr"/>
           <a:lstStyle/>
           <a:p>
             <a:pPr algn="l"/>
@@ -16028,7 +19523,7 @@
           </a:fontRef>
         </p:style>
         <p:txBody>
-          <a:bodyPr rtlCol="0" anchor="ctr" wrap="square"/>
+          <a:bodyPr wrap="square" rtlCol="0" anchor="ctr"/>
           <a:lstStyle/>
           <a:p>
             <a:pPr algn="l"/>
@@ -16058,7 +19553,7 @@
             <a:avLst/>
           </a:prstGeom>
           <a:solidFill>
-            <a:srgbClr val="3A4B5C"/>
+            <a:srgbClr val="00B0F0"/>
           </a:solidFill>
           <a:ln>
             <a:noFill/>
@@ -16079,7 +19574,7 @@
           </a:fontRef>
         </p:style>
         <p:txBody>
-          <a:bodyPr rtlCol="0" anchor="ctr" wrap="square"/>
+          <a:bodyPr wrap="square" rtlCol="0" anchor="ctr"/>
           <a:lstStyle/>
           <a:p>
             <a:pPr algn="ctr"/>
@@ -16136,6 +19631,7 @@
           <a:lstStyle/>
           <a:p>
             <a:pPr algn="ctr"/>
+            <a:endParaRPr/>
           </a:p>
         </p:txBody>
       </p:sp>
@@ -16173,7 +19669,7 @@
           </a:fontRef>
         </p:style>
         <p:txBody>
-          <a:bodyPr rtlCol="0" anchor="ctr" wrap="square"/>
+          <a:bodyPr wrap="square" rtlCol="0" anchor="ctr"/>
           <a:lstStyle/>
           <a:p>
             <a:pPr algn="l"/>
@@ -16222,7 +19718,7 @@
           </a:fontRef>
         </p:style>
         <p:txBody>
-          <a:bodyPr rtlCol="0" anchor="ctr" wrap="square"/>
+          <a:bodyPr wrap="square" rtlCol="0" anchor="ctr"/>
           <a:lstStyle/>
           <a:p>
             <a:pPr algn="l"/>
@@ -16271,7 +19767,7 @@
           </a:fontRef>
         </p:style>
         <p:txBody>
-          <a:bodyPr rtlCol="0" anchor="ctr" wrap="square"/>
+          <a:bodyPr wrap="square" rtlCol="0" anchor="ctr"/>
           <a:lstStyle/>
           <a:p>
             <a:pPr algn="l"/>
@@ -16301,7 +19797,7 @@
             <a:avLst/>
           </a:prstGeom>
           <a:solidFill>
-            <a:srgbClr val="3A4B5C"/>
+            <a:srgbClr val="00B0F0"/>
           </a:solidFill>
           <a:ln>
             <a:noFill/>
@@ -16322,12 +19818,12 @@
           </a:fontRef>
         </p:style>
         <p:txBody>
-          <a:bodyPr rtlCol="0" anchor="ctr" wrap="square"/>
+          <a:bodyPr wrap="square" rtlCol="0" anchor="ctr"/>
           <a:lstStyle/>
           <a:p>
             <a:pPr algn="ctr"/>
             <a:r>
-              <a:rPr sz="1000" b="1">
+              <a:rPr sz="1000" b="1" dirty="0">
                 <a:solidFill>
                   <a:srgbClr val="FFFFFF"/>
                 </a:solidFill>
@@ -16379,6 +19875,7 @@
           <a:lstStyle/>
           <a:p>
             <a:pPr algn="ctr"/>
+            <a:endParaRPr/>
           </a:p>
         </p:txBody>
       </p:sp>
@@ -16416,7 +19913,7 @@
           </a:fontRef>
         </p:style>
         <p:txBody>
-          <a:bodyPr rtlCol="0" anchor="ctr" wrap="square"/>
+          <a:bodyPr wrap="square" rtlCol="0" anchor="ctr"/>
           <a:lstStyle/>
           <a:p>
             <a:pPr algn="l"/>
@@ -16465,7 +19962,7 @@
           </a:fontRef>
         </p:style>
         <p:txBody>
-          <a:bodyPr rtlCol="0" anchor="ctr" wrap="square"/>
+          <a:bodyPr wrap="square" rtlCol="0" anchor="ctr"/>
           <a:lstStyle/>
           <a:p>
             <a:pPr algn="l"/>
@@ -16514,7 +20011,7 @@
           </a:fontRef>
         </p:style>
         <p:txBody>
-          <a:bodyPr rtlCol="0" anchor="ctr" wrap="square"/>
+          <a:bodyPr wrap="square" rtlCol="0" anchor="ctr"/>
           <a:lstStyle/>
           <a:p>
             <a:pPr algn="l"/>
@@ -16565,18 +20062,31 @@
           </a:fontRef>
         </p:style>
         <p:txBody>
-          <a:bodyPr rtlCol="0" anchor="ctr" wrap="square"/>
+          <a:bodyPr wrap="square" rtlCol="0" anchor="ctr"/>
           <a:lstStyle/>
           <a:p>
             <a:pPr algn="ctr"/>
             <a:r>
-              <a:rPr sz="1000" b="1">
+              <a:rPr sz="1000" b="1" dirty="0">
                 <a:solidFill>
                   <a:srgbClr val="FFFFFF"/>
                 </a:solidFill>
               </a:rPr>
               <a:t>AI</a:t>
             </a:r>
+            <a:r>
+              <a:rPr lang="en-US" sz="1000" b="1" dirty="0">
+                <a:solidFill>
+                  <a:srgbClr val="FFFFFF"/>
+                </a:solidFill>
+              </a:rPr>
+              <a:t> – Sonnet 4.6</a:t>
+            </a:r>
+            <a:endParaRPr sz="1000" b="1" dirty="0">
+              <a:solidFill>
+                <a:srgbClr val="FFFFFF"/>
+              </a:solidFill>
+            </a:endParaRPr>
           </a:p>
         </p:txBody>
       </p:sp>
@@ -16622,6 +20132,7 @@
           <a:lstStyle/>
           <a:p>
             <a:pPr algn="ctr"/>
+            <a:endParaRPr/>
           </a:p>
         </p:txBody>
       </p:sp>
@@ -16659,7 +20170,7 @@
           </a:fontRef>
         </p:style>
         <p:txBody>
-          <a:bodyPr rtlCol="0" anchor="ctr" wrap="square"/>
+          <a:bodyPr wrap="square" rtlCol="0" anchor="ctr"/>
           <a:lstStyle/>
           <a:p>
             <a:pPr algn="l"/>
@@ -16708,7 +20219,7 @@
           </a:fontRef>
         </p:style>
         <p:txBody>
-          <a:bodyPr rtlCol="0" anchor="ctr" wrap="square"/>
+          <a:bodyPr wrap="square" rtlCol="0" anchor="ctr"/>
           <a:lstStyle/>
           <a:p>
             <a:pPr algn="l"/>
@@ -16757,7 +20268,7 @@
           </a:fontRef>
         </p:style>
         <p:txBody>
-          <a:bodyPr rtlCol="0" anchor="ctr" wrap="square"/>
+          <a:bodyPr wrap="square" rtlCol="0" anchor="ctr"/>
           <a:lstStyle/>
           <a:p>
             <a:pPr algn="l"/>
@@ -16808,18 +20319,31 @@
           </a:fontRef>
         </p:style>
         <p:txBody>
-          <a:bodyPr rtlCol="0" anchor="ctr" wrap="square"/>
+          <a:bodyPr wrap="square" rtlCol="0" anchor="ctr"/>
           <a:lstStyle/>
           <a:p>
             <a:pPr algn="ctr"/>
             <a:r>
-              <a:rPr sz="1000" b="1">
+              <a:rPr sz="1000" b="1" dirty="0">
                 <a:solidFill>
                   <a:srgbClr val="FFFFFF"/>
                 </a:solidFill>
               </a:rPr>
               <a:t>AI</a:t>
             </a:r>
+            <a:r>
+              <a:rPr lang="en-US" sz="1000" b="1" dirty="0">
+                <a:solidFill>
+                  <a:srgbClr val="FFFFFF"/>
+                </a:solidFill>
+              </a:rPr>
+              <a:t> – Sonnet 4.6</a:t>
+            </a:r>
+            <a:endParaRPr sz="1000" b="1" dirty="0">
+              <a:solidFill>
+                <a:srgbClr val="FFFFFF"/>
+              </a:solidFill>
+            </a:endParaRPr>
           </a:p>
         </p:txBody>
       </p:sp>
@@ -16865,6 +20389,7 @@
           <a:lstStyle/>
           <a:p>
             <a:pPr algn="ctr"/>
+            <a:endParaRPr/>
           </a:p>
         </p:txBody>
       </p:sp>
@@ -16902,7 +20427,7 @@
           </a:fontRef>
         </p:style>
         <p:txBody>
-          <a:bodyPr rtlCol="0" anchor="ctr" wrap="square"/>
+          <a:bodyPr wrap="square" rtlCol="0" anchor="ctr"/>
           <a:lstStyle/>
           <a:p>
             <a:pPr algn="l"/>
@@ -16951,7 +20476,7 @@
           </a:fontRef>
         </p:style>
         <p:txBody>
-          <a:bodyPr rtlCol="0" anchor="ctr" wrap="square"/>
+          <a:bodyPr wrap="square" rtlCol="0" anchor="ctr"/>
           <a:lstStyle/>
           <a:p>
             <a:pPr algn="l"/>
@@ -17000,7 +20525,7 @@
           </a:fontRef>
         </p:style>
         <p:txBody>
-          <a:bodyPr rtlCol="0" anchor="ctr" wrap="square"/>
+          <a:bodyPr wrap="square" rtlCol="0" anchor="ctr"/>
           <a:lstStyle/>
           <a:p>
             <a:pPr algn="l"/>
@@ -17030,7 +20555,7 @@
             <a:avLst/>
           </a:prstGeom>
           <a:solidFill>
-            <a:srgbClr val="3A4B5C"/>
+            <a:srgbClr val="00B0F0"/>
           </a:solidFill>
           <a:ln>
             <a:noFill/>
@@ -17051,12 +20576,12 @@
           </a:fontRef>
         </p:style>
         <p:txBody>
-          <a:bodyPr rtlCol="0" anchor="ctr" wrap="square"/>
+          <a:bodyPr wrap="square" rtlCol="0" anchor="ctr"/>
           <a:lstStyle/>
           <a:p>
             <a:pPr algn="ctr"/>
             <a:r>
-              <a:rPr sz="1000" b="1">
+              <a:rPr sz="1000" b="1" dirty="0">
                 <a:solidFill>
                   <a:srgbClr val="FFFFFF"/>
                 </a:solidFill>
@@ -17108,6 +20633,7 @@
           <a:lstStyle/>
           <a:p>
             <a:pPr algn="ctr"/>
+            <a:endParaRPr/>
           </a:p>
         </p:txBody>
       </p:sp>
@@ -17145,7 +20671,7 @@
           </a:fontRef>
         </p:style>
         <p:txBody>
-          <a:bodyPr rtlCol="0" anchor="ctr" wrap="square"/>
+          <a:bodyPr wrap="square" rtlCol="0" anchor="ctr"/>
           <a:lstStyle/>
           <a:p>
             <a:pPr algn="l"/>
@@ -17194,7 +20720,7 @@
           </a:fontRef>
         </p:style>
         <p:txBody>
-          <a:bodyPr rtlCol="0" anchor="ctr" wrap="square"/>
+          <a:bodyPr wrap="square" rtlCol="0" anchor="ctr"/>
           <a:lstStyle/>
           <a:p>
             <a:pPr algn="l"/>
@@ -17243,7 +20769,7 @@
           </a:fontRef>
         </p:style>
         <p:txBody>
-          <a:bodyPr rtlCol="0" anchor="ctr" wrap="square"/>
+          <a:bodyPr wrap="square" rtlCol="0" anchor="ctr"/>
           <a:lstStyle/>
           <a:p>
             <a:pPr algn="l"/>
@@ -17273,33 +20799,38 @@
             <a:avLst/>
           </a:prstGeom>
           <a:solidFill>
-            <a:srgbClr val="47A8BD"/>
+            <a:srgbClr val="00B0F0"/>
           </a:solidFill>
           <a:ln>
-            <a:noFill/>
-          </a:ln>
-        </p:spPr>
-        <p:style>
-          <a:lnRef idx="1">
-            <a:schemeClr val="accent1"/>
-          </a:lnRef>
-          <a:fillRef idx="3">
-            <a:schemeClr val="accent1"/>
-          </a:fillRef>
-          <a:effectRef idx="2">
-            <a:schemeClr val="accent1"/>
-          </a:effectRef>
-          <a:fontRef idx="minor">
-            <a:schemeClr val="lt1"/>
-          </a:fontRef>
-        </p:style>
-        <p:txBody>
-          <a:bodyPr rtlCol="0" anchor="ctr" wrap="square"/>
+            <a:solidFill>
+              <a:schemeClr val="tx1">
+                <a:lumMod val="65000"/>
+                <a:lumOff val="35000"/>
+              </a:schemeClr>
+            </a:solidFill>
+          </a:ln>
+        </p:spPr>
+        <p:style>
+          <a:lnRef idx="1">
+            <a:schemeClr val="accent1"/>
+          </a:lnRef>
+          <a:fillRef idx="3">
+            <a:schemeClr val="accent1"/>
+          </a:fillRef>
+          <a:effectRef idx="2">
+            <a:schemeClr val="accent1"/>
+          </a:effectRef>
+          <a:fontRef idx="minor">
+            <a:schemeClr val="lt1"/>
+          </a:fontRef>
+        </p:style>
+        <p:txBody>
+          <a:bodyPr wrap="square" rtlCol="0" anchor="ctr"/>
           <a:lstStyle/>
           <a:p>
             <a:pPr algn="ctr"/>
             <a:r>
-              <a:rPr sz="1000" b="1">
+              <a:rPr sz="1000" b="1" dirty="0">
                 <a:solidFill>
                   <a:srgbClr val="FFFFFF"/>
                 </a:solidFill>
@@ -17351,6 +20882,7 @@
           <a:lstStyle/>
           <a:p>
             <a:pPr algn="ctr"/>
+            <a:endParaRPr/>
           </a:p>
         </p:txBody>
       </p:sp>
@@ -17388,7 +20920,7 @@
           </a:fontRef>
         </p:style>
         <p:txBody>
-          <a:bodyPr rtlCol="0" anchor="ctr" wrap="square"/>
+          <a:bodyPr wrap="square" rtlCol="0" anchor="ctr"/>
           <a:lstStyle/>
           <a:p>
             <a:pPr algn="l"/>
@@ -17437,7 +20969,7 @@
           </a:fontRef>
         </p:style>
         <p:txBody>
-          <a:bodyPr rtlCol="0" anchor="ctr" wrap="square"/>
+          <a:bodyPr wrap="square" rtlCol="0" anchor="ctr"/>
           <a:lstStyle/>
           <a:p>
             <a:pPr algn="l"/>
@@ -17486,7 +21018,7 @@
           </a:fontRef>
         </p:style>
         <p:txBody>
-          <a:bodyPr rtlCol="0" anchor="ctr" wrap="square"/>
+          <a:bodyPr wrap="square" rtlCol="0" anchor="ctr"/>
           <a:lstStyle/>
           <a:p>
             <a:pPr algn="l"/>
@@ -17516,7 +21048,7 @@
             <a:avLst/>
           </a:prstGeom>
           <a:solidFill>
-            <a:srgbClr val="47A8BD"/>
+            <a:srgbClr val="00B0F0"/>
           </a:solidFill>
           <a:ln>
             <a:noFill/>
@@ -17537,12 +21069,12 @@
           </a:fontRef>
         </p:style>
         <p:txBody>
-          <a:bodyPr rtlCol="0" anchor="ctr" wrap="square"/>
+          <a:bodyPr wrap="square" rtlCol="0" anchor="ctr"/>
           <a:lstStyle/>
           <a:p>
             <a:pPr algn="ctr"/>
             <a:r>
-              <a:rPr sz="1000" b="1">
+              <a:rPr sz="1000" b="1" dirty="0">
                 <a:solidFill>
                   <a:srgbClr val="FFFFFF"/>
                 </a:solidFill>
@@ -17594,6 +21126,7 @@
           <a:lstStyle/>
           <a:p>
             <a:pPr algn="ctr"/>
+            <a:endParaRPr/>
           </a:p>
         </p:txBody>
       </p:sp>
@@ -17631,7 +21164,7 @@
           </a:fontRef>
         </p:style>
         <p:txBody>
-          <a:bodyPr rtlCol="0" anchor="ctr" wrap="square"/>
+          <a:bodyPr wrap="square" rtlCol="0" anchor="ctr"/>
           <a:lstStyle/>
           <a:p>
             <a:pPr algn="l"/>
@@ -17680,7 +21213,7 @@
           </a:fontRef>
         </p:style>
         <p:txBody>
-          <a:bodyPr rtlCol="0" anchor="ctr" wrap="square"/>
+          <a:bodyPr wrap="square" rtlCol="0" anchor="ctr"/>
           <a:lstStyle/>
           <a:p>
             <a:pPr algn="l"/>
@@ -17729,7 +21262,7 @@
           </a:fontRef>
         </p:style>
         <p:txBody>
-          <a:bodyPr rtlCol="0" anchor="ctr" wrap="square"/>
+          <a:bodyPr wrap="square" rtlCol="0" anchor="ctr"/>
           <a:lstStyle/>
           <a:p>
             <a:pPr algn="l"/>
@@ -17759,7 +21292,7 @@
             <a:avLst/>
           </a:prstGeom>
           <a:solidFill>
-            <a:srgbClr val="5DB7A0"/>
+            <a:srgbClr val="00B0F0"/>
           </a:solidFill>
           <a:ln>
             <a:noFill/>
@@ -17780,12 +21313,12 @@
           </a:fontRef>
         </p:style>
         <p:txBody>
-          <a:bodyPr rtlCol="0" anchor="ctr" wrap="square"/>
+          <a:bodyPr wrap="square" rtlCol="0" anchor="ctr"/>
           <a:lstStyle/>
           <a:p>
             <a:pPr algn="ctr"/>
             <a:r>
-              <a:rPr sz="1000" b="1">
+              <a:rPr sz="1000" b="1" dirty="0">
                 <a:solidFill>
                   <a:srgbClr val="FFFFFF"/>
                 </a:solidFill>
@@ -17829,7 +21362,7 @@
           </a:fontRef>
         </p:style>
         <p:txBody>
-          <a:bodyPr rtlCol="0" anchor="ctr" wrap="square"/>
+          <a:bodyPr wrap="square" rtlCol="0" anchor="ctr"/>
           <a:lstStyle/>
           <a:p>
             <a:pPr algn="l"/>
@@ -17853,7 +21386,7 @@
 </file>
 
 <file path=ppt/slides/slide8.xml><?xml version="1.0" encoding="utf-8"?>
-<p:sld xmlns:a="http://schemas.openxmlformats.org/drawingml/2006/main" xmlns:p="http://schemas.openxmlformats.org/presentationml/2006/main" xmlns:r="http://schemas.openxmlformats.org/officeDocument/2006/relationships">
+<p:sld xmlns:a="http://schemas.openxmlformats.org/drawingml/2006/main" xmlns:r="http://schemas.openxmlformats.org/officeDocument/2006/relationships" xmlns:p="http://schemas.openxmlformats.org/presentationml/2006/main">
   <p:cSld>
     <p:bg>
       <p:bgPr>
@@ -17869,7 +21402,14 @@
         <p:cNvGrpSpPr/>
         <p:nvPr/>
       </p:nvGrpSpPr>
-      <p:grpSpPr/>
+      <p:grpSpPr>
+        <a:xfrm>
+          <a:off x="0" y="0"/>
+          <a:ext cx="0" cy="0"/>
+          <a:chOff x="0" y="0"/>
+          <a:chExt cx="0" cy="0"/>
+        </a:xfrm>
+      </p:grpSpPr>
       <p:sp>
         <p:nvSpPr>
           <p:cNvPr id="2" name="Rectangle 1"/>
@@ -17910,6 +21450,7 @@
           <a:lstStyle/>
           <a:p>
             <a:pPr algn="ctr"/>
+            <a:endParaRPr/>
           </a:p>
         </p:txBody>
       </p:sp>
@@ -17947,7 +21488,7 @@
           </a:fontRef>
         </p:style>
         <p:txBody>
-          <a:bodyPr rtlCol="0" anchor="ctr" wrap="square"/>
+          <a:bodyPr wrap="square" rtlCol="0" anchor="ctr"/>
           <a:lstStyle/>
           <a:p>
             <a:pPr algn="l"/>
@@ -18015,6 +21556,7 @@
           <a:lstStyle/>
           <a:p>
             <a:pPr algn="ctr"/>
+            <a:endParaRPr/>
           </a:p>
         </p:txBody>
       </p:sp>
@@ -18058,6 +21600,7 @@
           <a:lstStyle/>
           <a:p>
             <a:pPr algn="ctr"/>
+            <a:endParaRPr/>
           </a:p>
         </p:txBody>
       </p:sp>
@@ -18095,7 +21638,7 @@
           </a:fontRef>
         </p:style>
         <p:txBody>
-          <a:bodyPr rtlCol="0" anchor="ctr" wrap="square"/>
+          <a:bodyPr wrap="square" rtlCol="0" anchor="ctr"/>
           <a:lstStyle/>
           <a:p>
             <a:pPr algn="l"/>
@@ -18144,12 +21687,12 @@
           </a:fontRef>
         </p:style>
         <p:txBody>
-          <a:bodyPr rtlCol="0" anchor="t" wrap="square"/>
-          <a:lstStyle/>
-          <a:p>
-            <a:pPr algn="l"/>
-            <a:r>
-              <a:rPr sz="1200">
+          <a:bodyPr wrap="square" rtlCol="0" anchor="t"/>
+          <a:lstStyle/>
+          <a:p>
+            <a:pPr algn="l"/>
+            <a:r>
+              <a:rPr sz="1200" dirty="0">
                 <a:solidFill>
                   <a:srgbClr val="2C3E50"/>
                 </a:solidFill>
@@ -18158,103 +21701,71 @@
             </a:r>
           </a:p>
           <a:p>
-            <a:r>
-              <a:rPr sz="300">
+            <a:endParaRPr sz="1200" dirty="0">
+              <a:solidFill>
+                <a:srgbClr val="2C3E50"/>
+              </a:solidFill>
+            </a:endParaRPr>
+          </a:p>
+          <a:p>
+            <a:pPr algn="l"/>
+            <a:r>
+              <a:rPr sz="1200" dirty="0">
                 <a:solidFill>
                   <a:srgbClr val="2C3E50"/>
                 </a:solidFill>
               </a:rPr>
-              <a:t/>
-            </a:r>
-          </a:p>
-          <a:p>
-            <a:pPr algn="l"/>
-            <a:r>
-              <a:rPr sz="1200">
+              <a:t>•  Classification: fills ~40 framework fields per opportunity</a:t>
+            </a:r>
+          </a:p>
+          <a:p>
+            <a:endParaRPr sz="1200" dirty="0">
+              <a:solidFill>
+                <a:srgbClr val="2C3E50"/>
+              </a:solidFill>
+            </a:endParaRPr>
+          </a:p>
+          <a:p>
+            <a:pPr algn="l"/>
+            <a:r>
+              <a:rPr sz="1200" dirty="0">
                 <a:solidFill>
                   <a:srgbClr val="2C3E50"/>
                 </a:solidFill>
               </a:rPr>
-              <a:t>•  Classification: fills ~40 framework fields per opportunity</a:t>
-            </a:r>
-          </a:p>
-          <a:p>
-            <a:r>
-              <a:rPr sz="300">
+              <a:t>•  One model call per chunk / per candidate - small, cheap prompts</a:t>
+            </a:r>
+          </a:p>
+          <a:p>
+            <a:endParaRPr sz="1200" dirty="0">
+              <a:solidFill>
+                <a:srgbClr val="2C3E50"/>
+              </a:solidFill>
+            </a:endParaRPr>
+          </a:p>
+          <a:p>
+            <a:pPr algn="l"/>
+            <a:r>
+              <a:rPr sz="1200" dirty="0">
                 <a:solidFill>
                   <a:srgbClr val="2C3E50"/>
                 </a:solidFill>
               </a:rPr>
-              <a:t/>
-            </a:r>
-          </a:p>
-          <a:p>
-            <a:pPr algn="l"/>
-            <a:r>
-              <a:rPr sz="1200">
-                <a:solidFill>
-                  <a:srgbClr val="2C3E50"/>
-                </a:solidFill>
-              </a:rPr>
-              <a:t>•  One model call per chunk / per candidate - small, cheap prompts</a:t>
-            </a:r>
-          </a:p>
-          <a:p>
-            <a:r>
-              <a:rPr sz="300">
-                <a:solidFill>
-                  <a:srgbClr val="2C3E50"/>
-                </a:solidFill>
-              </a:rPr>
-              <a:t/>
-            </a:r>
-          </a:p>
-          <a:p>
-            <a:pPr algn="l"/>
-            <a:r>
-              <a:rPr sz="1200">
-                <a:solidFill>
-                  <a:srgbClr val="2C3E50"/>
-                </a:solidFill>
-              </a:rPr>
               <a:t>•  Runs on GitHub Copilot SDK by default (or OpenAI if a key is set)</a:t>
             </a:r>
           </a:p>
           <a:p>
-            <a:r>
-              <a:rPr sz="300">
-                <a:solidFill>
-                  <a:srgbClr val="2C3E50"/>
-                </a:solidFill>
-              </a:rPr>
-              <a:t/>
-            </a:r>
-          </a:p>
-          <a:p>
-            <a:pPr algn="l"/>
-            <a:r>
-              <a:rPr sz="1200">
-                <a:solidFill>
-                  <a:srgbClr val="2C3E50"/>
-                </a:solidFill>
-              </a:rPr>
-              <a:t>•  </a:t>
-            </a:r>
-          </a:p>
-          <a:p>
-            <a:r>
-              <a:rPr sz="300">
-                <a:solidFill>
-                  <a:srgbClr val="2C3E50"/>
-                </a:solidFill>
-              </a:rPr>
-              <a:t/>
-            </a:r>
-          </a:p>
-          <a:p>
-            <a:pPr algn="l"/>
-            <a:r>
-              <a:rPr sz="1200">
+            <a:pPr algn="l"/>
+            <a:endParaRPr sz="1200" dirty="0">
+              <a:solidFill>
+                <a:srgbClr val="2C3E50"/>
+              </a:solidFill>
+            </a:endParaRPr>
+          </a:p>
+          <a:p>
+            <a:pPr algn="l"/>
+            <a:r>
+              <a:rPr sz="1200" dirty="0">
                 <a:solidFill>
                   <a:srgbClr val="2C3E50"/>
                 </a:solidFill>
@@ -18306,6 +21817,7 @@
           <a:lstStyle/>
           <a:p>
             <a:pPr algn="ctr"/>
+            <a:endParaRPr/>
           </a:p>
         </p:txBody>
       </p:sp>
@@ -18349,6 +21861,7 @@
           <a:lstStyle/>
           <a:p>
             <a:pPr algn="ctr"/>
+            <a:endParaRPr/>
           </a:p>
         </p:txBody>
       </p:sp>
@@ -18386,7 +21899,7 @@
           </a:fontRef>
         </p:style>
         <p:txBody>
-          <a:bodyPr rtlCol="0" anchor="ctr" wrap="square"/>
+          <a:bodyPr wrap="square" rtlCol="0" anchor="ctr"/>
           <a:lstStyle/>
           <a:p>
             <a:pPr algn="l"/>
@@ -18435,12 +21948,12 @@
           </a:fontRef>
         </p:style>
         <p:txBody>
-          <a:bodyPr rtlCol="0" anchor="t" wrap="square"/>
-          <a:lstStyle/>
-          <a:p>
-            <a:pPr algn="l"/>
-            <a:r>
-              <a:rPr sz="1200">
+          <a:bodyPr wrap="square" rtlCol="0" anchor="t"/>
+          <a:lstStyle/>
+          <a:p>
+            <a:pPr algn="l"/>
+            <a:r>
+              <a:rPr sz="1200" dirty="0">
                 <a:solidFill>
                   <a:srgbClr val="2C3E50"/>
                 </a:solidFill>
@@ -18449,145 +21962,122 @@
             </a:r>
           </a:p>
           <a:p>
-            <a:r>
-              <a:rPr sz="300">
+            <a:endParaRPr sz="1200" dirty="0">
+              <a:solidFill>
+                <a:srgbClr val="2C3E50"/>
+              </a:solidFill>
+            </a:endParaRPr>
+          </a:p>
+          <a:p>
+            <a:pPr algn="l"/>
+            <a:r>
+              <a:rPr sz="1200" dirty="0">
                 <a:solidFill>
                   <a:srgbClr val="2C3E50"/>
                 </a:solidFill>
               </a:rPr>
-              <a:t/>
-            </a:r>
-          </a:p>
-          <a:p>
-            <a:pPr algn="l"/>
-            <a:r>
-              <a:rPr sz="1200">
+              <a:t>•  Keyword filtering and chunking (token control)</a:t>
+            </a:r>
+          </a:p>
+          <a:p>
+            <a:endParaRPr sz="1200" dirty="0">
+              <a:solidFill>
+                <a:srgbClr val="2C3E50"/>
+              </a:solidFill>
+            </a:endParaRPr>
+          </a:p>
+          <a:p>
+            <a:pPr algn="l"/>
+            <a:r>
+              <a:rPr sz="1200" dirty="0">
                 <a:solidFill>
                   <a:srgbClr val="2C3E50"/>
                 </a:solidFill>
               </a:rPr>
-              <a:t>•  Keyword filtering and chunking (token control)</a:t>
-            </a:r>
-          </a:p>
-          <a:p>
-            <a:r>
-              <a:rPr sz="300">
+              <a:t>•  JSON validation against allowed choice values</a:t>
+            </a:r>
+          </a:p>
+          <a:p>
+            <a:endParaRPr sz="1200" dirty="0">
+              <a:solidFill>
+                <a:srgbClr val="2C3E50"/>
+              </a:solidFill>
+            </a:endParaRPr>
+          </a:p>
+          <a:p>
+            <a:pPr algn="l"/>
+            <a:r>
+              <a:rPr sz="1200" dirty="0">
                 <a:solidFill>
                   <a:srgbClr val="2C3E50"/>
                 </a:solidFill>
               </a:rPr>
-              <a:t/>
-            </a:r>
-          </a:p>
-          <a:p>
-            <a:pPr algn="l"/>
-            <a:r>
-              <a:rPr sz="1200">
+              <a:t>•  Excel export, payload building, HTML report generation</a:t>
+            </a:r>
+          </a:p>
+          <a:p>
+            <a:endParaRPr sz="1200" dirty="0">
+              <a:solidFill>
+                <a:srgbClr val="2C3E50"/>
+              </a:solidFill>
+            </a:endParaRPr>
+          </a:p>
+          <a:p>
+            <a:pPr algn="l"/>
+            <a:r>
+              <a:rPr sz="1200" dirty="0">
                 <a:solidFill>
                   <a:srgbClr val="2C3E50"/>
                 </a:solidFill>
               </a:rPr>
-              <a:t>•  JSON validation against allowed choice values</a:t>
-            </a:r>
-          </a:p>
-          <a:p>
-            <a:r>
-              <a:rPr sz="300">
+              <a:t>•  History store, trend analysis, </a:t>
+            </a:r>
+            <a:r>
+              <a:rPr sz="1200" dirty="0" err="1">
                 <a:solidFill>
                   <a:srgbClr val="2C3E50"/>
                 </a:solidFill>
               </a:rPr>
-              <a:t/>
-            </a:r>
-          </a:p>
-          <a:p>
-            <a:pPr algn="l"/>
-            <a:r>
-              <a:rPr sz="1200">
+              <a:t>dedup</a:t>
+            </a:r>
+            <a:r>
+              <a:rPr sz="1200" dirty="0">
                 <a:solidFill>
                   <a:srgbClr val="2C3E50"/>
                 </a:solidFill>
               </a:rPr>
-              <a:t>•  Excel export, payload building, HTML report generation</a:t>
-            </a:r>
-          </a:p>
-          <a:p>
-            <a:r>
-              <a:rPr sz="300">
+              <a:t> matching</a:t>
+            </a:r>
+          </a:p>
+          <a:p>
+            <a:endParaRPr sz="1200" dirty="0">
+              <a:solidFill>
+                <a:srgbClr val="2C3E50"/>
+              </a:solidFill>
+            </a:endParaRPr>
+          </a:p>
+          <a:p>
+            <a:pPr algn="l"/>
+            <a:r>
+              <a:rPr sz="1200" dirty="0">
                 <a:solidFill>
                   <a:srgbClr val="2C3E50"/>
                 </a:solidFill>
               </a:rPr>
-              <a:t/>
-            </a:r>
-          </a:p>
-          <a:p>
-            <a:pPr algn="l"/>
-            <a:r>
-              <a:rPr sz="1200">
-                <a:solidFill>
-                  <a:srgbClr val="2C3E50"/>
-                </a:solidFill>
-              </a:rPr>
-              <a:t>•  History store, trend analysis, dedup matching</a:t>
-            </a:r>
-          </a:p>
-          <a:p>
-            <a:r>
-              <a:rPr sz="300">
-                <a:solidFill>
-                  <a:srgbClr val="2C3E50"/>
-                </a:solidFill>
-              </a:rPr>
-              <a:t/>
-            </a:r>
-          </a:p>
-          <a:p>
-            <a:pPr algn="l"/>
-            <a:r>
-              <a:rPr sz="1200">
-                <a:solidFill>
-                  <a:srgbClr val="2C3E50"/>
-                </a:solidFill>
-              </a:rPr>
               <a:t>•  ADO REST API calls (push + status sync)</a:t>
             </a:r>
           </a:p>
           <a:p>
-            <a:r>
-              <a:rPr sz="300">
-                <a:solidFill>
-                  <a:srgbClr val="2C3E50"/>
-                </a:solidFill>
-              </a:rPr>
-              <a:t/>
-            </a:r>
-          </a:p>
-          <a:p>
-            <a:pPr algn="l"/>
-            <a:r>
-              <a:rPr sz="1200">
-                <a:solidFill>
-                  <a:srgbClr val="2C3E50"/>
-                </a:solidFill>
-              </a:rPr>
-              <a:t>•  </a:t>
-            </a:r>
-          </a:p>
-          <a:p>
-            <a:r>
-              <a:rPr sz="300">
-                <a:solidFill>
-                  <a:srgbClr val="2C3E50"/>
-                </a:solidFill>
-              </a:rPr>
-              <a:t/>
-            </a:r>
-          </a:p>
-          <a:p>
-            <a:pPr algn="l"/>
-            <a:r>
-              <a:rPr sz="1200">
+            <a:endParaRPr sz="1200" dirty="0">
+              <a:solidFill>
+                <a:srgbClr val="2C3E50"/>
+              </a:solidFill>
+            </a:endParaRPr>
+          </a:p>
+          <a:p>
+            <a:pPr algn="l"/>
+            <a:r>
+              <a:rPr sz="1200" dirty="0">
                 <a:solidFill>
                   <a:srgbClr val="2C3E50"/>
                 </a:solidFill>
@@ -18631,7 +22121,7 @@
           </a:fontRef>
         </p:style>
         <p:txBody>
-          <a:bodyPr rtlCol="0" anchor="ctr" wrap="square"/>
+          <a:bodyPr wrap="square" rtlCol="0" anchor="ctr"/>
           <a:lstStyle/>
           <a:p>
             <a:pPr algn="l"/>
@@ -18655,7 +22145,7 @@
 </file>
 
 <file path=ppt/slides/slide9.xml><?xml version="1.0" encoding="utf-8"?>
-<p:sld xmlns:a="http://schemas.openxmlformats.org/drawingml/2006/main" xmlns:p="http://schemas.openxmlformats.org/presentationml/2006/main" xmlns:r="http://schemas.openxmlformats.org/officeDocument/2006/relationships">
+<p:sld xmlns:a="http://schemas.openxmlformats.org/drawingml/2006/main" xmlns:r="http://schemas.openxmlformats.org/officeDocument/2006/relationships" xmlns:p="http://schemas.openxmlformats.org/presentationml/2006/main">
   <p:cSld>
     <p:bg>
       <p:bgPr>
@@ -18671,7 +22161,14 @@
         <p:cNvGrpSpPr/>
         <p:nvPr/>
       </p:nvGrpSpPr>
-      <p:grpSpPr/>
+      <p:grpSpPr>
+        <a:xfrm>
+          <a:off x="0" y="0"/>
+          <a:ext cx="0" cy="0"/>
+          <a:chOff x="0" y="0"/>
+          <a:chExt cx="0" cy="0"/>
+        </a:xfrm>
+      </p:grpSpPr>
       <p:sp>
         <p:nvSpPr>
           <p:cNvPr id="2" name="Rectangle 1"/>
@@ -18712,6 +22209,7 @@
           <a:lstStyle/>
           <a:p>
             <a:pPr algn="ctr"/>
+            <a:endParaRPr/>
           </a:p>
         </p:txBody>
       </p:sp>
@@ -18749,7 +22247,7 @@
           </a:fontRef>
         </p:style>
         <p:txBody>
-          <a:bodyPr rtlCol="0" anchor="ctr" wrap="square"/>
+          <a:bodyPr wrap="square" rtlCol="0" anchor="ctr"/>
           <a:lstStyle/>
           <a:p>
             <a:pPr algn="l"/>
@@ -18809,7 +22307,7 @@
           </a:fontRef>
         </p:style>
         <p:txBody>
-          <a:bodyPr rtlCol="0" anchor="ctr" wrap="square"/>
+          <a:bodyPr wrap="square" rtlCol="0" anchor="ctr"/>
           <a:lstStyle/>
           <a:p>
             <a:pPr algn="l"/>
@@ -18866,6 +22364,7 @@
           <a:lstStyle/>
           <a:p>
             <a:pPr algn="ctr"/>
+            <a:endParaRPr/>
           </a:p>
         </p:txBody>
       </p:sp>
@@ -18909,6 +22408,7 @@
           <a:lstStyle/>
           <a:p>
             <a:pPr algn="ctr"/>
+            <a:endParaRPr/>
           </a:p>
         </p:txBody>
       </p:sp>
@@ -18946,7 +22446,7 @@
           </a:fontRef>
         </p:style>
         <p:txBody>
-          <a:bodyPr rtlCol="0" anchor="ctr" wrap="square"/>
+          <a:bodyPr wrap="square" rtlCol="0" anchor="ctr"/>
           <a:lstStyle/>
           <a:p>
             <a:pPr algn="l"/>
@@ -18995,7 +22495,7 @@
           </a:fontRef>
         </p:style>
         <p:txBody>
-          <a:bodyPr rtlCol="0" anchor="ctr" wrap="square"/>
+          <a:bodyPr wrap="square" rtlCol="0" anchor="ctr"/>
           <a:lstStyle/>
           <a:p>
             <a:pPr algn="l"/>
@@ -19052,6 +22552,7 @@
           <a:lstStyle/>
           <a:p>
             <a:pPr algn="ctr"/>
+            <a:endParaRPr/>
           </a:p>
         </p:txBody>
       </p:sp>
@@ -19095,6 +22596,7 @@
           <a:lstStyle/>
           <a:p>
             <a:pPr algn="ctr"/>
+            <a:endParaRPr/>
           </a:p>
         </p:txBody>
       </p:sp>
@@ -19132,7 +22634,7 @@
           </a:fontRef>
         </p:style>
         <p:txBody>
-          <a:bodyPr rtlCol="0" anchor="ctr" wrap="square"/>
+          <a:bodyPr wrap="square" rtlCol="0" anchor="ctr"/>
           <a:lstStyle/>
           <a:p>
             <a:pPr algn="l"/>
@@ -19181,7 +22683,7 @@
           </a:fontRef>
         </p:style>
         <p:txBody>
-          <a:bodyPr rtlCol="0" anchor="ctr" wrap="square"/>
+          <a:bodyPr wrap="square" rtlCol="0" anchor="ctr"/>
           <a:lstStyle/>
           <a:p>
             <a:pPr algn="l"/>
@@ -19238,6 +22740,7 @@
           <a:lstStyle/>
           <a:p>
             <a:pPr algn="ctr"/>
+            <a:endParaRPr/>
           </a:p>
         </p:txBody>
       </p:sp>
@@ -19281,6 +22784,7 @@
           <a:lstStyle/>
           <a:p>
             <a:pPr algn="ctr"/>
+            <a:endParaRPr/>
           </a:p>
         </p:txBody>
       </p:sp>
@@ -19318,7 +22822,7 @@
           </a:fontRef>
         </p:style>
         <p:txBody>
-          <a:bodyPr rtlCol="0" anchor="ctr" wrap="square"/>
+          <a:bodyPr wrap="square" rtlCol="0" anchor="ctr"/>
           <a:lstStyle/>
           <a:p>
             <a:pPr algn="l"/>
@@ -19367,7 +22871,7 @@
           </a:fontRef>
         </p:style>
         <p:txBody>
-          <a:bodyPr rtlCol="0" anchor="ctr" wrap="square"/>
+          <a:bodyPr wrap="square" rtlCol="0" anchor="ctr"/>
           <a:lstStyle/>
           <a:p>
             <a:pPr algn="l"/>
@@ -19424,6 +22928,7 @@
           <a:lstStyle/>
           <a:p>
             <a:pPr algn="ctr"/>
+            <a:endParaRPr/>
           </a:p>
         </p:txBody>
       </p:sp>
@@ -19467,6 +22972,7 @@
           <a:lstStyle/>
           <a:p>
             <a:pPr algn="ctr"/>
+            <a:endParaRPr/>
           </a:p>
         </p:txBody>
       </p:sp>
@@ -19504,7 +23010,7 @@
           </a:fontRef>
         </p:style>
         <p:txBody>
-          <a:bodyPr rtlCol="0" anchor="ctr" wrap="square"/>
+          <a:bodyPr wrap="square" rtlCol="0" anchor="ctr"/>
           <a:lstStyle/>
           <a:p>
             <a:pPr algn="l"/>
@@ -19553,7 +23059,7 @@
           </a:fontRef>
         </p:style>
         <p:txBody>
-          <a:bodyPr rtlCol="0" anchor="ctr" wrap="square"/>
+          <a:bodyPr wrap="square" rtlCol="0" anchor="ctr"/>
           <a:lstStyle/>
           <a:p>
             <a:pPr algn="l"/>
@@ -19610,6 +23116,7 @@
           <a:lstStyle/>
           <a:p>
             <a:pPr algn="ctr"/>
+            <a:endParaRPr/>
           </a:p>
         </p:txBody>
       </p:sp>
@@ -19653,6 +23160,7 @@
           <a:lstStyle/>
           <a:p>
             <a:pPr algn="ctr"/>
+            <a:endParaRPr/>
           </a:p>
         </p:txBody>
       </p:sp>
@@ -19690,7 +23198,7 @@
           </a:fontRef>
         </p:style>
         <p:txBody>
-          <a:bodyPr rtlCol="0" anchor="ctr" wrap="square"/>
+          <a:bodyPr wrap="square" rtlCol="0" anchor="ctr"/>
           <a:lstStyle/>
           <a:p>
             <a:pPr algn="l"/>
@@ -19739,7 +23247,7 @@
           </a:fontRef>
         </p:style>
         <p:txBody>
-          <a:bodyPr rtlCol="0" anchor="ctr" wrap="square"/>
+          <a:bodyPr wrap="square" rtlCol="0" anchor="ctr"/>
           <a:lstStyle/>
           <a:p>
             <a:pPr algn="l"/>
@@ -19796,6 +23304,7 @@
           <a:lstStyle/>
           <a:p>
             <a:pPr algn="ctr"/>
+            <a:endParaRPr/>
           </a:p>
         </p:txBody>
       </p:sp>
@@ -19839,6 +23348,7 @@
           <a:lstStyle/>
           <a:p>
             <a:pPr algn="ctr"/>
+            <a:endParaRPr/>
           </a:p>
         </p:txBody>
       </p:sp>
@@ -19876,7 +23386,7 @@
           </a:fontRef>
         </p:style>
         <p:txBody>
-          <a:bodyPr rtlCol="0" anchor="ctr" wrap="square"/>
+          <a:bodyPr wrap="square" rtlCol="0" anchor="ctr"/>
           <a:lstStyle/>
           <a:p>
             <a:pPr algn="l"/>
@@ -19925,7 +23435,7 @@
           </a:fontRef>
         </p:style>
         <p:txBody>
-          <a:bodyPr rtlCol="0" anchor="ctr" wrap="square"/>
+          <a:bodyPr wrap="square" rtlCol="0" anchor="ctr"/>
           <a:lstStyle/>
           <a:p>
             <a:pPr algn="l"/>
@@ -19976,7 +23486,7 @@
           </a:fontRef>
         </p:style>
         <p:txBody>
-          <a:bodyPr rtlCol="0" anchor="ctr" wrap="square"/>
+          <a:bodyPr wrap="square" rtlCol="0" anchor="ctr"/>
           <a:lstStyle/>
           <a:p>
             <a:pPr algn="ctr"/>
@@ -20025,7 +23535,7 @@
           </a:fontRef>
         </p:style>
         <p:txBody>
-          <a:bodyPr rtlCol="0" anchor="ctr" wrap="square"/>
+          <a:bodyPr wrap="square" rtlCol="0" anchor="ctr"/>
           <a:lstStyle/>
           <a:p>
             <a:pPr algn="l"/>
@@ -20366,4 +23876,325 @@
   </a:objectDefaults>
   <a:extraClrSchemeLst/>
 </a:theme>
+</file>
+
+<file path=ppt/theme/theme2.xml><?xml version="1.0" encoding="utf-8"?>
+<a:theme xmlns:a="http://schemas.openxmlformats.org/drawingml/2006/main" name="Office Theme">
+  <a:themeElements>
+    <a:clrScheme name="Office">
+      <a:dk1>
+        <a:sysClr val="windowText" lastClr="000000"/>
+      </a:dk1>
+      <a:lt1>
+        <a:sysClr val="window" lastClr="FFFFFF"/>
+      </a:lt1>
+      <a:dk2>
+        <a:srgbClr val="0E2841"/>
+      </a:dk2>
+      <a:lt2>
+        <a:srgbClr val="E8E8E8"/>
+      </a:lt2>
+      <a:accent1>
+        <a:srgbClr val="156082"/>
+      </a:accent1>
+      <a:accent2>
+        <a:srgbClr val="E97132"/>
+      </a:accent2>
+      <a:accent3>
+        <a:srgbClr val="196B24"/>
+      </a:accent3>
+      <a:accent4>
+        <a:srgbClr val="0F9ED5"/>
+      </a:accent4>
+      <a:accent5>
+        <a:srgbClr val="A02B93"/>
+      </a:accent5>
+      <a:accent6>
+        <a:srgbClr val="4EA72E"/>
+      </a:accent6>
+      <a:hlink>
+        <a:srgbClr val="467886"/>
+      </a:hlink>
+      <a:folHlink>
+        <a:srgbClr val="96607D"/>
+      </a:folHlink>
+    </a:clrScheme>
+    <a:fontScheme name="Office">
+      <a:majorFont>
+        <a:latin typeface="Aptos Display" panose="02110004020202020204"/>
+        <a:ea typeface=""/>
+        <a:cs typeface=""/>
+        <a:font script="Jpan" typeface="游ゴシック Light"/>
+        <a:font script="Hang" typeface="맑은 고딕"/>
+        <a:font script="Hans" typeface="等线 Light"/>
+        <a:font script="Hant" typeface="新細明體"/>
+        <a:font script="Arab" typeface="Times New Roman"/>
+        <a:font script="Hebr" typeface="Times New Roman"/>
+        <a:font script="Thai" typeface="Angsana New"/>
+        <a:font script="Ethi" typeface="Nyala"/>
+        <a:font script="Beng" typeface="Vrinda"/>
+        <a:font script="Gujr" typeface="Shruti"/>
+        <a:font script="Khmr" typeface="MoolBoran"/>
+        <a:font script="Knda" typeface="Tunga"/>
+        <a:font script="Guru" typeface="Raavi"/>
+        <a:font script="Cans" typeface="Euphemia"/>
+        <a:font script="Cher" typeface="Plantagenet Cherokee"/>
+        <a:font script="Yiii" typeface="Microsoft Yi Baiti"/>
+        <a:font script="Tibt" typeface="Microsoft Himalaya"/>
+        <a:font script="Thaa" typeface="MV Boli"/>
+        <a:font script="Deva" typeface="Mangal"/>
+        <a:font script="Telu" typeface="Gautami"/>
+        <a:font script="Taml" typeface="Latha"/>
+        <a:font script="Syrc" typeface="Estrangelo Edessa"/>
+        <a:font script="Orya" typeface="Kalinga"/>
+        <a:font script="Mlym" typeface="Kartika"/>
+        <a:font script="Laoo" typeface="DokChampa"/>
+        <a:font script="Sinh" typeface="Iskoola Pota"/>
+        <a:font script="Mong" typeface="Mongolian Baiti"/>
+        <a:font script="Viet" typeface="Times New Roman"/>
+        <a:font script="Uigh" typeface="Microsoft Uighur"/>
+        <a:font script="Geor" typeface="Sylfaen"/>
+        <a:font script="Armn" typeface="Arial"/>
+        <a:font script="Bugi" typeface="Leelawadee UI"/>
+        <a:font script="Bopo" typeface="Microsoft JhengHei"/>
+        <a:font script="Java" typeface="Javanese Text"/>
+        <a:font script="Lisu" typeface="Segoe UI"/>
+        <a:font script="Mymr" typeface="Myanmar Text"/>
+        <a:font script="Nkoo" typeface="Ebrima"/>
+        <a:font script="Olck" typeface="Nirmala UI"/>
+        <a:font script="Osma" typeface="Ebrima"/>
+        <a:font script="Phag" typeface="Phagspa"/>
+        <a:font script="Syrn" typeface="Estrangelo Edessa"/>
+        <a:font script="Syrj" typeface="Estrangelo Edessa"/>
+        <a:font script="Syre" typeface="Estrangelo Edessa"/>
+        <a:font script="Sora" typeface="Nirmala UI"/>
+        <a:font script="Tale" typeface="Microsoft Tai Le"/>
+        <a:font script="Talu" typeface="Microsoft New Tai Lue"/>
+        <a:font script="Tfng" typeface="Ebrima"/>
+      </a:majorFont>
+      <a:minorFont>
+        <a:latin typeface="Aptos" panose="02110004020202020204"/>
+        <a:ea typeface=""/>
+        <a:cs typeface=""/>
+        <a:font script="Jpan" typeface="游ゴシック"/>
+        <a:font script="Hang" typeface="맑은 고딕"/>
+        <a:font script="Hans" typeface="等线"/>
+        <a:font script="Hant" typeface="新細明體"/>
+        <a:font script="Arab" typeface="Arial"/>
+        <a:font script="Hebr" typeface="Arial"/>
+        <a:font script="Thai" typeface="Cordia New"/>
+        <a:font script="Ethi" typeface="Nyala"/>
+        <a:font script="Beng" typeface="Vrinda"/>
+        <a:font script="Gujr" typeface="Shruti"/>
+        <a:font script="Khmr" typeface="DaunPenh"/>
+        <a:font script="Knda" typeface="Tunga"/>
+        <a:font script="Guru" typeface="Raavi"/>
+        <a:font script="Cans" typeface="Euphemia"/>
+        <a:font script="Cher" typeface="Plantagenet Cherokee"/>
+        <a:font script="Yiii" typeface="Microsoft Yi Baiti"/>
+        <a:font script="Tibt" typeface="Microsoft Himalaya"/>
+        <a:font script="Thaa" typeface="MV Boli"/>
+        <a:font script="Deva" typeface="Mangal"/>
+        <a:font script="Telu" typeface="Gautami"/>
+        <a:font script="Taml" typeface="Latha"/>
+        <a:font script="Syrc" typeface="Estrangelo Edessa"/>
+        <a:font script="Orya" typeface="Kalinga"/>
+        <a:font script="Mlym" typeface="Kartika"/>
+        <a:font script="Laoo" typeface="DokChampa"/>
+        <a:font script="Sinh" typeface="Iskoola Pota"/>
+        <a:font script="Mong" typeface="Mongolian Baiti"/>
+        <a:font script="Viet" typeface="Arial"/>
+        <a:font script="Uigh" typeface="Microsoft Uighur"/>
+        <a:font script="Geor" typeface="Sylfaen"/>
+        <a:font script="Armn" typeface="Arial"/>
+        <a:font script="Bugi" typeface="Leelawadee UI"/>
+        <a:font script="Bopo" typeface="Microsoft JhengHei"/>
+        <a:font script="Java" typeface="Javanese Text"/>
+        <a:font script="Lisu" typeface="Segoe UI"/>
+        <a:font script="Mymr" typeface="Myanmar Text"/>
+        <a:font script="Nkoo" typeface="Ebrima"/>
+        <a:font script="Olck" typeface="Nirmala UI"/>
+        <a:font script="Osma" typeface="Ebrima"/>
+        <a:font script="Phag" typeface="Phagspa"/>
+        <a:font script="Syrn" typeface="Estrangelo Edessa"/>
+        <a:font script="Syrj" typeface="Estrangelo Edessa"/>
+        <a:font script="Syre" typeface="Estrangelo Edessa"/>
+        <a:font script="Sora" typeface="Nirmala UI"/>
+        <a:font script="Tale" typeface="Microsoft Tai Le"/>
+        <a:font script="Talu" typeface="Microsoft New Tai Lue"/>
+        <a:font script="Tfng" typeface="Ebrima"/>
+      </a:minorFont>
+    </a:fontScheme>
+    <a:fmtScheme name="Office">
+      <a:fillStyleLst>
+        <a:solidFill>
+          <a:schemeClr val="phClr"/>
+        </a:solidFill>
+        <a:gradFill rotWithShape="1">
+          <a:gsLst>
+            <a:gs pos="0">
+              <a:schemeClr val="phClr">
+                <a:lumMod val="110000"/>
+                <a:satMod val="105000"/>
+                <a:tint val="67000"/>
+              </a:schemeClr>
+            </a:gs>
+            <a:gs pos="50000">
+              <a:schemeClr val="phClr">
+                <a:lumMod val="105000"/>
+                <a:satMod val="103000"/>
+                <a:tint val="73000"/>
+              </a:schemeClr>
+            </a:gs>
+            <a:gs pos="100000">
+              <a:schemeClr val="phClr">
+                <a:lumMod val="105000"/>
+                <a:satMod val="109000"/>
+                <a:tint val="81000"/>
+              </a:schemeClr>
+            </a:gs>
+          </a:gsLst>
+          <a:lin ang="5400000" scaled="0"/>
+        </a:gradFill>
+        <a:gradFill rotWithShape="1">
+          <a:gsLst>
+            <a:gs pos="0">
+              <a:schemeClr val="phClr">
+                <a:satMod val="103000"/>
+                <a:lumMod val="102000"/>
+                <a:tint val="94000"/>
+              </a:schemeClr>
+            </a:gs>
+            <a:gs pos="50000">
+              <a:schemeClr val="phClr">
+                <a:satMod val="110000"/>
+                <a:lumMod val="100000"/>
+                <a:shade val="100000"/>
+              </a:schemeClr>
+            </a:gs>
+            <a:gs pos="100000">
+              <a:schemeClr val="phClr">
+                <a:lumMod val="99000"/>
+                <a:satMod val="120000"/>
+                <a:shade val="78000"/>
+              </a:schemeClr>
+            </a:gs>
+          </a:gsLst>
+          <a:lin ang="5400000" scaled="0"/>
+        </a:gradFill>
+      </a:fillStyleLst>
+      <a:lnStyleLst>
+        <a:ln w="12700" cap="flat" cmpd="sng" algn="ctr">
+          <a:solidFill>
+            <a:schemeClr val="phClr"/>
+          </a:solidFill>
+          <a:prstDash val="solid"/>
+          <a:miter lim="800000"/>
+        </a:ln>
+        <a:ln w="19050" cap="flat" cmpd="sng" algn="ctr">
+          <a:solidFill>
+            <a:schemeClr val="phClr"/>
+          </a:solidFill>
+          <a:prstDash val="solid"/>
+          <a:miter lim="800000"/>
+        </a:ln>
+        <a:ln w="25400" cap="flat" cmpd="sng" algn="ctr">
+          <a:solidFill>
+            <a:schemeClr val="phClr"/>
+          </a:solidFill>
+          <a:prstDash val="solid"/>
+          <a:miter lim="800000"/>
+        </a:ln>
+      </a:lnStyleLst>
+      <a:effectStyleLst>
+        <a:effectStyle>
+          <a:effectLst/>
+        </a:effectStyle>
+        <a:effectStyle>
+          <a:effectLst/>
+        </a:effectStyle>
+        <a:effectStyle>
+          <a:effectLst>
+            <a:outerShdw blurRad="57150" dist="19050" dir="5400000" algn="ctr" rotWithShape="0">
+              <a:srgbClr val="000000">
+                <a:alpha val="63000"/>
+              </a:srgbClr>
+            </a:outerShdw>
+          </a:effectLst>
+        </a:effectStyle>
+      </a:effectStyleLst>
+      <a:bgFillStyleLst>
+        <a:solidFill>
+          <a:schemeClr val="phClr"/>
+        </a:solidFill>
+        <a:solidFill>
+          <a:schemeClr val="phClr">
+            <a:tint val="95000"/>
+            <a:satMod val="170000"/>
+          </a:schemeClr>
+        </a:solidFill>
+        <a:gradFill rotWithShape="1">
+          <a:gsLst>
+            <a:gs pos="0">
+              <a:schemeClr val="phClr">
+                <a:tint val="93000"/>
+                <a:satMod val="150000"/>
+                <a:shade val="98000"/>
+                <a:lumMod val="102000"/>
+              </a:schemeClr>
+            </a:gs>
+            <a:gs pos="50000">
+              <a:schemeClr val="phClr">
+                <a:tint val="98000"/>
+                <a:satMod val="130000"/>
+                <a:shade val="90000"/>
+                <a:lumMod val="103000"/>
+              </a:schemeClr>
+            </a:gs>
+            <a:gs pos="100000">
+              <a:schemeClr val="phClr">
+                <a:shade val="63000"/>
+                <a:satMod val="120000"/>
+              </a:schemeClr>
+            </a:gs>
+          </a:gsLst>
+          <a:lin ang="5400000" scaled="0"/>
+        </a:gradFill>
+      </a:bgFillStyleLst>
+    </a:fmtScheme>
+  </a:themeElements>
+  <a:objectDefaults>
+    <a:lnDef>
+      <a:spPr/>
+      <a:bodyPr/>
+      <a:lstStyle/>
+      <a:style>
+        <a:lnRef idx="2">
+          <a:schemeClr val="accent1"/>
+        </a:lnRef>
+        <a:fillRef idx="0">
+          <a:schemeClr val="accent1"/>
+        </a:fillRef>
+        <a:effectRef idx="1">
+          <a:schemeClr val="accent1"/>
+        </a:effectRef>
+        <a:fontRef idx="minor">
+          <a:schemeClr val="tx1"/>
+        </a:fontRef>
+      </a:style>
+    </a:lnDef>
+  </a:objectDefaults>
+  <a:extraClrSchemeLst/>
+  <a:extLst>
+    <a:ext uri="{05A4C25C-085E-4340-85A3-A5531E510DB2}">
+      <thm15:themeFamily xmlns:thm15="http://schemas.microsoft.com/office/thememl/2012/main" name="Office Theme" id="{2E142A2C-CD16-42D6-873A-C26D2A0506FA}" vid="{1BDDFF52-6CD6-40A5-AB3C-68EB2F1E4D0A}"/>
+    </a:ext>
+  </a:extLst>
+</a:theme>
+</file>
+
+<file path=docMetadata/LabelInfo.xml><?xml version="1.0" encoding="utf-8"?>
+<clbl:labelList xmlns:clbl="http://schemas.microsoft.com/office/2020/mipLabelMetadata">
+  <clbl:label id="{caadbe96-024e-4f67-82ec-fb28ff53d16d}" enabled="0" method="" siteId="{caadbe96-024e-4f67-82ec-fb28ff53d16d}" removed="1"/>
+</clbl:labelList>
 </file>